--- a/deck/Archon-KPMG-Pitch.pptx
+++ b/deck/Archon-KPMG-Pitch.pptx
@@ -4,6 +4,9 @@
   <p:sldMasterIdLst>
     <p:sldMasterId id="2147483648" r:id="rId1"/>
   </p:sldMasterIdLst>
+  <p:notesMasterIdLst>
+    <p:notesMasterId r:id="rId11"/>
+  </p:notesMasterIdLst>
   <p:sldIdLst>
     <p:sldId id="256" r:id="rId2"/>
     <p:sldId id="257" r:id="rId3"/>
@@ -15,11 +18,8 @@
     <p:sldId id="263" r:id="rId9"/>
     <p:sldId id="264" r:id="rId10"/>
   </p:sldIdLst>
-  <p:notesMasterIdLst>
-    <p:notesMasterId r:id="rId11"/>
-  </p:notesMasterIdLst>
-  <p:sldSz cx="12191695" cy="6858000"/>
-  <p:notesSz cx="6858000" cy="12191695"/>
+  <p:sldSz cx="12192000" cy="6858000"/>
+  <p:notesSz cx="6858000" cy="12192000"/>
   <p:defaultTextStyle>
     <a:lvl1pPr marL="0" algn="l" defTabSz="914400" rtl="0" eaLnBrk="1" latinLnBrk="0" hangingPunct="1">
       <a:defRPr sz="1800" kern="1200">
@@ -112,6 +112,11 @@
       </a:defRPr>
     </a:lvl9pPr>
   </p:defaultTextStyle>
+  <p:extLst>
+    <p:ext uri="{EFAFB233-063F-42B5-8137-9DF3F51BA10A}">
+      <p15:sldGuideLst xmlns:p15="http://schemas.microsoft.com/office/powerpoint/2012/main"/>
+    </p:ext>
+  </p:extLst>
 </p:presentation>
 </file>
 
@@ -137,234 +142,10 @@
           <a:chExt cx="0" cy="0"/>
         </a:xfrm>
       </p:grpSpPr>
-      <p:sp>
-        <p:nvSpPr>
-          <p:cNvPr id="2" name="Header Placeholder 1"/>
-          <p:cNvSpPr>
-            <a:spLocks noGrp="1"/>
-          </p:cNvSpPr>
-          <p:nvPr>
-            <p:ph type="hdr" sz="quarter"/>
-          </p:nvPr>
-        </p:nvSpPr>
-        <p:spPr>
-          <a:xfrm>
-            <a:off x="0" y="0"/>
-            <a:ext cx="2971800" cy="458788"/>
-          </a:xfrm>
-          <a:prstGeom prst="rect">
-            <a:avLst/>
-          </a:prstGeom>
-        </p:spPr>
-        <p:txBody>
-          <a:bodyPr vert="horz" lIns="91440" tIns="45720" rIns="91440" bIns="45720" rtlCol="0"/>
-          <a:lstStyle>
-            <a:lvl1pPr algn="l">
-              <a:defRPr sz="1200"/>
-            </a:lvl1pPr>
-          </a:lstStyle>
-          <a:p>
-            <a:endParaRPr lang="en-US"/>
-          </a:p>
-        </p:txBody>
-      </p:sp>
-      <p:sp>
-        <p:nvSpPr>
-          <p:cNvPr id="3" name="Date Placeholder 2"/>
-          <p:cNvSpPr>
-            <a:spLocks noGrp="1"/>
-          </p:cNvSpPr>
-          <p:nvPr>
-            <p:ph type="dt" idx="1"/>
-          </p:nvPr>
-        </p:nvSpPr>
-        <p:spPr>
-          <a:xfrm>
-            <a:off x="3884613" y="0"/>
-            <a:ext cx="2971800" cy="458788"/>
-          </a:xfrm>
-          <a:prstGeom prst="rect">
-            <a:avLst/>
-          </a:prstGeom>
-        </p:spPr>
-        <p:txBody>
-          <a:bodyPr vert="horz" lIns="91440" tIns="45720" rIns="91440" bIns="45720" rtlCol="0"/>
-          <a:lstStyle>
-            <a:lvl1pPr algn="r">
-              <a:defRPr sz="1200"/>
-            </a:lvl1pPr>
-          </a:lstStyle>
-          <a:p>
-            <a:fld id="{5282F153-3F37-0F45-9E97-73ACFA13230C}" type="datetimeFigureOut">
-              <a:rPr lang="en-US"/>
-              <a:t>7/23/19</a:t>
-            </a:fld>
-            <a:endParaRPr lang="en-US"/>
-          </a:p>
-        </p:txBody>
-      </p:sp>
-      <p:sp>
-        <p:nvSpPr>
-          <p:cNvPr id="4" name="Slide Image Placeholder 3"/>
-          <p:cNvSpPr>
-            <a:spLocks noGrp="1" noRot="1" noChangeAspect="1"/>
-          </p:cNvSpPr>
-          <p:nvPr>
-            <p:ph type="sldImg" idx="2"/>
-          </p:nvPr>
-        </p:nvSpPr>
-        <p:spPr>
-          <a:xfrm>
-            <a:off x="685800" y="1143000"/>
-            <a:ext cx="5486400" cy="3086100"/>
-          </a:xfrm>
-          <a:prstGeom prst="rect">
-            <a:avLst/>
-          </a:prstGeom>
-          <a:noFill/>
-          <a:ln w="12700">
-            <a:solidFill>
-              <a:prstClr val="black"/>
-            </a:solidFill>
-          </a:ln>
-        </p:spPr>
-        <p:txBody>
-          <a:bodyPr vert="horz" lIns="91440" tIns="45720" rIns="91440" bIns="45720" rtlCol="0" anchor="ctr"/>
-          <a:lstStyle/>
-          <a:p>
-            <a:endParaRPr lang="en-US"/>
-          </a:p>
-        </p:txBody>
-      </p:sp>
-      <p:sp>
-        <p:nvSpPr>
-          <p:cNvPr id="5" name="Notes Placeholder 4"/>
-          <p:cNvSpPr>
-            <a:spLocks noGrp="1"/>
-          </p:cNvSpPr>
-          <p:nvPr>
-            <p:ph type="body" sz="quarter" idx="3"/>
-          </p:nvPr>
-        </p:nvSpPr>
-        <p:spPr>
-          <a:xfrm>
-            <a:off x="685800" y="4400550"/>
-            <a:ext cx="5486400" cy="3600450"/>
-          </a:xfrm>
-          <a:prstGeom prst="rect">
-            <a:avLst/>
-          </a:prstGeom>
-        </p:spPr>
-        <p:txBody>
-          <a:bodyPr vert="horz" lIns="91440" tIns="45720" rIns="91440" bIns="45720" rtlCol="0"/>
-          <a:lstStyle/>
-          <a:p>
-            <a:pPr lvl="0"/>
-            <a:r>
-              <a:rPr lang="en-US"/>
-              <a:t>Click to edit Master text styles</a:t>
-            </a:r>
-          </a:p>
-          <a:p>
-            <a:pPr lvl="1"/>
-            <a:r>
-              <a:rPr lang="en-US"/>
-              <a:t>Second level</a:t>
-            </a:r>
-          </a:p>
-          <a:p>
-            <a:pPr lvl="2"/>
-            <a:r>
-              <a:rPr lang="en-US"/>
-              <a:t>Third level</a:t>
-            </a:r>
-          </a:p>
-          <a:p>
-            <a:pPr lvl="3"/>
-            <a:r>
-              <a:rPr lang="en-US"/>
-              <a:t>Fourth level</a:t>
-            </a:r>
-          </a:p>
-          <a:p>
-            <a:pPr lvl="4"/>
-            <a:r>
-              <a:rPr lang="en-US"/>
-              <a:t>Fifth level</a:t>
-            </a:r>
-          </a:p>
-        </p:txBody>
-      </p:sp>
-      <p:sp>
-        <p:nvSpPr>
-          <p:cNvPr id="6" name="Footer Placeholder 5"/>
-          <p:cNvSpPr>
-            <a:spLocks noGrp="1"/>
-          </p:cNvSpPr>
-          <p:nvPr>
-            <p:ph type="ftr" sz="quarter" idx="4"/>
-          </p:nvPr>
-        </p:nvSpPr>
-        <p:spPr>
-          <a:xfrm>
-            <a:off x="0" y="8685213"/>
-            <a:ext cx="2971800" cy="458787"/>
-          </a:xfrm>
-          <a:prstGeom prst="rect">
-            <a:avLst/>
-          </a:prstGeom>
-        </p:spPr>
-        <p:txBody>
-          <a:bodyPr vert="horz" lIns="91440" tIns="45720" rIns="91440" bIns="45720" rtlCol="0" anchor="b"/>
-          <a:lstStyle>
-            <a:lvl1pPr algn="l">
-              <a:defRPr sz="1200"/>
-            </a:lvl1pPr>
-          </a:lstStyle>
-          <a:p>
-            <a:endParaRPr lang="en-US"/>
-          </a:p>
-        </p:txBody>
-      </p:sp>
-      <p:sp>
-        <p:nvSpPr>
-          <p:cNvPr id="7" name="Slide Number Placeholder 6"/>
-          <p:cNvSpPr>
-            <a:spLocks noGrp="1"/>
-          </p:cNvSpPr>
-          <p:nvPr>
-            <p:ph type="sldNum" sz="quarter" idx="5"/>
-          </p:nvPr>
-        </p:nvSpPr>
-        <p:spPr>
-          <a:xfrm>
-            <a:off x="3884613" y="8685213"/>
-            <a:ext cx="2971800" cy="458787"/>
-          </a:xfrm>
-          <a:prstGeom prst="rect">
-            <a:avLst/>
-          </a:prstGeom>
-        </p:spPr>
-        <p:txBody>
-          <a:bodyPr vert="horz" lIns="91440" tIns="45720" rIns="91440" bIns="45720" rtlCol="0" anchor="b"/>
-          <a:lstStyle>
-            <a:lvl1pPr algn="r">
-              <a:defRPr sz="1200"/>
-            </a:lvl1pPr>
-          </a:lstStyle>
-          <a:p>
-            <a:fld id="{CE5E9CC1-C706-0F49-92D6-E571CC5EEA8F}" type="slidenum">
-              <a:rPr lang="en-US"/>
-              <a:t>‹#›</a:t>
-            </a:fld>
-            <a:endParaRPr lang="en-US"/>
-          </a:p>
-        </p:txBody>
-      </p:sp>
     </p:spTree>
     <p:extLst>
       <p:ext uri="{BB962C8B-B14F-4D97-AF65-F5344CB8AC3E}">
-        <p14:creationId xmlns:p14="http://schemas.microsoft.com/office/powerpoint/2010/main" val="1024086991"/>
+        <p14:creationId xmlns:p14="http://schemas.microsoft.com/office/powerpoint/2010/main" val="3960858110"/>
       </p:ext>
     </p:extLst>
   </p:cSld>
@@ -508,10 +289,6 @@
           <a:bodyPr/>
           <a:lstStyle/>
           <a:p>
-            <a:r>
-              <a:rPr lang="en-US" dirty="0"/>
-              <a:t/>
-            </a:r>
             <a:endParaRPr lang="en-US" dirty="0"/>
           </a:p>
         </p:txBody>
@@ -596,10 +373,6 @@
           <a:bodyPr/>
           <a:lstStyle/>
           <a:p>
-            <a:r>
-              <a:rPr lang="en-US" dirty="0"/>
-              <a:t/>
-            </a:r>
             <a:endParaRPr lang="en-US" dirty="0"/>
           </a:p>
         </p:txBody>
@@ -684,10 +457,6 @@
           <a:bodyPr/>
           <a:lstStyle/>
           <a:p>
-            <a:r>
-              <a:rPr lang="en-US" dirty="0"/>
-              <a:t/>
-            </a:r>
             <a:endParaRPr lang="en-US" dirty="0"/>
           </a:p>
         </p:txBody>
@@ -772,10 +541,6 @@
           <a:bodyPr/>
           <a:lstStyle/>
           <a:p>
-            <a:r>
-              <a:rPr lang="en-US" dirty="0"/>
-              <a:t/>
-            </a:r>
             <a:endParaRPr lang="en-US" dirty="0"/>
           </a:p>
         </p:txBody>
@@ -860,10 +625,6 @@
           <a:bodyPr/>
           <a:lstStyle/>
           <a:p>
-            <a:r>
-              <a:rPr lang="en-US" dirty="0"/>
-              <a:t/>
-            </a:r>
             <a:endParaRPr lang="en-US" dirty="0"/>
           </a:p>
         </p:txBody>
@@ -948,10 +709,6 @@
           <a:bodyPr/>
           <a:lstStyle/>
           <a:p>
-            <a:r>
-              <a:rPr lang="en-US" dirty="0"/>
-              <a:t/>
-            </a:r>
             <a:endParaRPr lang="en-US" dirty="0"/>
           </a:p>
         </p:txBody>
@@ -1036,10 +793,6 @@
           <a:bodyPr/>
           <a:lstStyle/>
           <a:p>
-            <a:r>
-              <a:rPr lang="en-US" dirty="0"/>
-              <a:t/>
-            </a:r>
             <a:endParaRPr lang="en-US" dirty="0"/>
           </a:p>
         </p:txBody>
@@ -1124,10 +877,6 @@
           <a:bodyPr/>
           <a:lstStyle/>
           <a:p>
-            <a:r>
-              <a:rPr lang="en-US" dirty="0"/>
-              <a:t/>
-            </a:r>
             <a:endParaRPr lang="en-US" dirty="0"/>
           </a:p>
         </p:txBody>
@@ -1212,10 +961,6 @@
           <a:bodyPr/>
           <a:lstStyle/>
           <a:p>
-            <a:r>
-              <a:rPr lang="en-US" dirty="0"/>
-              <a:t/>
-            </a:r>
             <a:endParaRPr lang="en-US" dirty="0"/>
           </a:p>
         </p:txBody>
@@ -1289,6 +1034,11 @@
 <file path=ppt/slideMasters/slideMaster1.xml><?xml version="1.0" encoding="utf-8"?>
 <p:sldMaster xmlns:a="http://schemas.openxmlformats.org/drawingml/2006/main" xmlns:r="http://schemas.openxmlformats.org/officeDocument/2006/relationships" xmlns:p="http://schemas.openxmlformats.org/presentationml/2006/main">
   <p:cSld>
+    <p:bg>
+      <p:bgRef idx="1001">
+        <a:schemeClr val="bg1"/>
+      </p:bgRef>
+    </p:bg>
     <p:spTree>
       <p:nvGrpSpPr>
         <p:cNvPr id="1" name=""/>
@@ -1571,6 +1321,7 @@
         <a:solidFill>
           <a:srgbClr val="0A2E2B"/>
         </a:solidFill>
+        <a:effectLst/>
       </p:bgPr>
     </p:bg>
     <p:spTree>
@@ -1608,6 +1359,13 @@
           </a:solidFill>
           <a:ln/>
         </p:spPr>
+        <p:txBody>
+          <a:bodyPr/>
+          <a:lstStyle/>
+          <a:p>
+            <a:endParaRPr lang="en-PH"/>
+          </a:p>
+        </p:txBody>
       </p:sp>
       <p:sp>
         <p:nvSpPr>
@@ -1630,17 +1388,24 @@
           </a:solidFill>
           <a:ln/>
         </p:spPr>
+        <p:txBody>
+          <a:bodyPr/>
+          <a:lstStyle/>
+          <a:p>
+            <a:endParaRPr lang="en-PH"/>
+          </a:p>
+        </p:txBody>
       </p:sp>
       <p:pic>
         <p:nvPicPr>
-          <p:cNvPr id="4" name="Image 0" descr="D:\PROJECTS\archon\client\public\web-app-manifest-512x512.png">    </p:cNvPr>
+          <p:cNvPr id="4" name="Image 0" descr="D:\PROJECTS\archon\client\public\web-app-manifest-512x512.png"/>
           <p:cNvPicPr>
             <a:picLocks noChangeAspect="1"/>
           </p:cNvPicPr>
           <p:nvPr/>
         </p:nvPicPr>
         <p:blipFill>
-          <a:blip r:embed="rId1"/>
+          <a:blip r:embed="rId3"/>
           <a:stretch>
             <a:fillRect/>
           </a:stretch>
@@ -1676,7 +1441,7 @@
           <a:bodyPr wrap="square" lIns="0" tIns="0" rIns="0" bIns="0" rtlCol="0" anchor="ctr"/>
           <a:lstStyle/>
           <a:p>
-            <a:pPr indent="0" marL="0">
+            <a:pPr marL="0" indent="0">
               <a:buNone/>
             </a:pPr>
             <a:r>
@@ -1715,7 +1480,7 @@
           <a:bodyPr wrap="square" lIns="0" tIns="0" rIns="0" bIns="0" rtlCol="0" anchor="ctr"/>
           <a:lstStyle/>
           <a:p>
-            <a:pPr indent="0" marL="0">
+            <a:pPr marL="0" indent="0">
               <a:buNone/>
             </a:pPr>
             <a:r>
@@ -1754,7 +1519,7 @@
           <a:bodyPr wrap="square" lIns="0" tIns="0" rIns="0" bIns="0" rtlCol="0" anchor="ctr"/>
           <a:lstStyle/>
           <a:p>
-            <a:pPr indent="0" marL="0">
+            <a:pPr marL="0" indent="0">
               <a:buNone/>
             </a:pPr>
             <a:r>
@@ -1793,6 +1558,13 @@
           </a:solidFill>
           <a:ln/>
         </p:spPr>
+        <p:txBody>
+          <a:bodyPr/>
+          <a:lstStyle/>
+          <a:p>
+            <a:endParaRPr lang="en-PH"/>
+          </a:p>
+        </p:txBody>
       </p:sp>
       <p:sp>
         <p:nvSpPr>
@@ -1815,11 +1587,11 @@
           <a:bodyPr wrap="square" lIns="0" tIns="0" rIns="0" bIns="0" rtlCol="0" anchor="ctr"/>
           <a:lstStyle/>
           <a:p>
-            <a:pPr algn="ctr" indent="0" marL="0">
-              <a:buNone/>
-            </a:pPr>
-            <a:r>
-              <a:rPr lang="en-US" sz="1050" b="1" spc="100" kern="0" dirty="0">
+            <a:pPr marL="0" indent="0" algn="ctr">
+              <a:buNone/>
+            </a:pPr>
+            <a:r>
+              <a:rPr lang="en-US" sz="1050" b="1" kern="0" spc="100" dirty="0">
                 <a:solidFill>
                   <a:srgbClr val="0A2E2B"/>
                 </a:solidFill>
@@ -1854,6 +1626,13 @@
           </a:solidFill>
           <a:ln/>
         </p:spPr>
+        <p:txBody>
+          <a:bodyPr/>
+          <a:lstStyle/>
+          <a:p>
+            <a:endParaRPr lang="en-PH"/>
+          </a:p>
+        </p:txBody>
       </p:sp>
       <p:sp>
         <p:nvSpPr>
@@ -1876,11 +1655,11 @@
           <a:bodyPr wrap="square" lIns="0" tIns="0" rIns="0" bIns="0" rtlCol="0" anchor="ctr"/>
           <a:lstStyle/>
           <a:p>
-            <a:pPr algn="ctr" indent="0" marL="0">
-              <a:buNone/>
-            </a:pPr>
-            <a:r>
-              <a:rPr lang="en-US" sz="1050" b="1" spc="100" kern="0" dirty="0">
+            <a:pPr marL="0" indent="0" algn="ctr">
+              <a:buNone/>
+            </a:pPr>
+            <a:r>
+              <a:rPr lang="en-US" sz="1050" b="1" kern="0" spc="100" dirty="0">
                 <a:solidFill>
                   <a:srgbClr val="FFFFFF"/>
                 </a:solidFill>
@@ -1915,7 +1694,7 @@
           <a:bodyPr wrap="square" lIns="0" tIns="0" rIns="0" bIns="0" rtlCol="0" anchor="ctr"/>
           <a:lstStyle/>
           <a:p>
-            <a:pPr indent="0" marL="0">
+            <a:pPr marL="0" indent="0">
               <a:buNone/>
             </a:pPr>
             <a:r>
@@ -1949,6 +1728,7 @@
         <a:solidFill>
           <a:srgbClr val="FFFFFF"/>
         </a:solidFill>
+        <a:effectLst/>
       </p:bgPr>
     </p:bg>
     <p:spTree>
@@ -1986,11 +1766,11 @@
           <a:bodyPr wrap="square" lIns="0" tIns="0" rIns="0" bIns="0" rtlCol="0" anchor="ctr"/>
           <a:lstStyle/>
           <a:p>
-            <a:pPr indent="0" marL="0">
-              <a:buNone/>
-            </a:pPr>
-            <a:r>
-              <a:rPr lang="en-US" sz="1250" b="1" spc="200" kern="0" dirty="0">
+            <a:pPr marL="0" indent="0">
+              <a:buNone/>
+            </a:pPr>
+            <a:r>
+              <a:rPr lang="en-US" sz="1250" b="1" kern="0" spc="200" dirty="0">
                 <a:solidFill>
                   <a:srgbClr val="1F8A7D"/>
                 </a:solidFill>
@@ -2025,7 +1805,7 @@
           <a:bodyPr wrap="square" lIns="0" tIns="0" rIns="0" bIns="0" rtlCol="0" anchor="ctr"/>
           <a:lstStyle/>
           <a:p>
-            <a:pPr indent="0" marL="0">
+            <a:pPr marL="0" indent="0">
               <a:buNone/>
             </a:pPr>
             <a:r>
@@ -2064,7 +1844,7 @@
           <a:bodyPr wrap="square" lIns="0" tIns="0" rIns="0" bIns="0" rtlCol="0" anchor="ctr"/>
           <a:lstStyle/>
           <a:p>
-            <a:pPr indent="0" marL="0">
+            <a:pPr marL="0" indent="0">
               <a:buNone/>
             </a:pPr>
             <a:r>
@@ -2108,6 +1888,13 @@
             <a:prstDash val="solid"/>
           </a:ln>
         </p:spPr>
+        <p:txBody>
+          <a:bodyPr/>
+          <a:lstStyle/>
+          <a:p>
+            <a:endParaRPr lang="en-PH"/>
+          </a:p>
+        </p:txBody>
       </p:sp>
       <p:sp>
         <p:nvSpPr>
@@ -2130,7 +1917,7 @@
           <a:bodyPr wrap="square" lIns="0" tIns="0" rIns="0" bIns="0" rtlCol="0" anchor="ctr"/>
           <a:lstStyle/>
           <a:p>
-            <a:pPr algn="ctr" indent="0" marL="0">
+            <a:pPr marL="0" indent="0" algn="ctr">
               <a:buNone/>
             </a:pPr>
             <a:r>
@@ -2150,14 +1937,14 @@
       </p:sp>
       <p:pic>
         <p:nvPicPr>
-          <p:cNvPr id="7" name="Image 0" descr="preencoded.png">    </p:cNvPr>
+          <p:cNvPr id="7" name="Image 0" descr="preencoded.png"/>
           <p:cNvPicPr>
             <a:picLocks noChangeAspect="1"/>
           </p:cNvPicPr>
           <p:nvPr/>
         </p:nvPicPr>
         <p:blipFill>
-          <a:blip r:embed="rId1"/>
+          <a:blip r:embed="rId3"/>
           <a:stretch>
             <a:fillRect/>
           </a:stretch>
@@ -2198,6 +1985,13 @@
             <a:prstDash val="solid"/>
           </a:ln>
         </p:spPr>
+        <p:txBody>
+          <a:bodyPr/>
+          <a:lstStyle/>
+          <a:p>
+            <a:endParaRPr lang="en-PH"/>
+          </a:p>
+        </p:txBody>
       </p:sp>
       <p:sp>
         <p:nvSpPr>
@@ -2220,7 +2014,7 @@
           <a:bodyPr wrap="square" lIns="0" tIns="0" rIns="0" bIns="0" rtlCol="0" anchor="ctr"/>
           <a:lstStyle/>
           <a:p>
-            <a:pPr algn="ctr" indent="0" marL="0">
+            <a:pPr marL="0" indent="0" algn="ctr">
               <a:buNone/>
             </a:pPr>
             <a:r>
@@ -2240,14 +2034,14 @@
       </p:sp>
       <p:pic>
         <p:nvPicPr>
-          <p:cNvPr id="10" name="Image 1" descr="preencoded.png">    </p:cNvPr>
+          <p:cNvPr id="10" name="Image 1" descr="preencoded.png"/>
           <p:cNvPicPr>
             <a:picLocks noChangeAspect="1"/>
           </p:cNvPicPr>
           <p:nvPr/>
         </p:nvPicPr>
         <p:blipFill>
-          <a:blip r:embed="rId2"/>
+          <a:blip r:embed="rId3"/>
           <a:stretch>
             <a:fillRect/>
           </a:stretch>
@@ -2288,6 +2082,13 @@
             <a:prstDash val="solid"/>
           </a:ln>
         </p:spPr>
+        <p:txBody>
+          <a:bodyPr/>
+          <a:lstStyle/>
+          <a:p>
+            <a:endParaRPr lang="en-PH"/>
+          </a:p>
+        </p:txBody>
       </p:sp>
       <p:sp>
         <p:nvSpPr>
@@ -2310,7 +2111,7 @@
           <a:bodyPr wrap="square" lIns="0" tIns="0" rIns="0" bIns="0" rtlCol="0" anchor="ctr"/>
           <a:lstStyle/>
           <a:p>
-            <a:pPr algn="ctr" indent="0" marL="0">
+            <a:pPr marL="0" indent="0" algn="ctr">
               <a:buNone/>
             </a:pPr>
             <a:r>
@@ -2349,6 +2150,13 @@
           </a:solidFill>
           <a:ln/>
         </p:spPr>
+        <p:txBody>
+          <a:bodyPr/>
+          <a:lstStyle/>
+          <a:p>
+            <a:endParaRPr lang="en-PH"/>
+          </a:p>
+        </p:txBody>
       </p:sp>
       <p:sp>
         <p:nvSpPr>
@@ -2371,7 +2179,7 @@
           <a:bodyPr wrap="square" lIns="0" tIns="0" rIns="0" bIns="0" rtlCol="0" anchor="ctr"/>
           <a:lstStyle/>
           <a:p>
-            <a:pPr algn="ctr" indent="0" marL="0">
+            <a:pPr marL="0" indent="0" algn="ctr">
               <a:buNone/>
             </a:pPr>
             <a:r>
@@ -2388,7 +2196,7 @@
             <a:endParaRPr lang="en-US" sz="1900" dirty="0"/>
           </a:p>
           <a:p>
-            <a:pPr algn="ctr" indent="0" marL="0">
+            <a:pPr marL="0" indent="0" algn="ctr">
               <a:buNone/>
             </a:pPr>
             <a:r>
@@ -2432,13 +2240,20 @@
             <a:prstDash val="solid"/>
           </a:ln>
           <a:effectLst>
-            <a:outerShdw sx="100000" sy="100000" kx="0" ky="0" algn="bl" rotWithShape="0" blurRad="114300" dist="38100" dir="5400000">
+            <a:outerShdw blurRad="114300" dist="38100" dir="5400000" algn="bl" rotWithShape="0">
               <a:srgbClr val="0A2E2B">
                 <a:alpha val="18000"/>
               </a:srgbClr>
             </a:outerShdw>
           </a:effectLst>
         </p:spPr>
+        <p:txBody>
+          <a:bodyPr/>
+          <a:lstStyle/>
+          <a:p>
+            <a:endParaRPr lang="en-PH"/>
+          </a:p>
+        </p:txBody>
       </p:sp>
       <p:sp>
         <p:nvSpPr>
@@ -2459,17 +2274,24 @@
           </a:solidFill>
           <a:ln/>
         </p:spPr>
+        <p:txBody>
+          <a:bodyPr/>
+          <a:lstStyle/>
+          <a:p>
+            <a:endParaRPr lang="en-PH"/>
+          </a:p>
+        </p:txBody>
       </p:sp>
       <p:pic>
         <p:nvPicPr>
-          <p:cNvPr id="17" name="Image 2" descr="preencoded.png">    </p:cNvPr>
+          <p:cNvPr id="17" name="Image 2" descr="preencoded.png"/>
           <p:cNvPicPr>
             <a:picLocks noChangeAspect="1"/>
           </p:cNvPicPr>
           <p:nvPr/>
         </p:nvPicPr>
         <p:blipFill>
-          <a:blip r:embed="rId3"/>
+          <a:blip r:embed="rId4"/>
           <a:stretch>
             <a:fillRect/>
           </a:stretch>
@@ -2505,7 +2327,7 @@
           <a:bodyPr wrap="square" lIns="0" tIns="0" rIns="0" bIns="0" rtlCol="0" anchor="ctr"/>
           <a:lstStyle/>
           <a:p>
-            <a:pPr indent="0" marL="0">
+            <a:pPr marL="0" indent="0">
               <a:buNone/>
             </a:pPr>
             <a:r>
@@ -2544,7 +2366,7 @@
           <a:bodyPr wrap="square" lIns="0" tIns="0" rIns="0" bIns="0" rtlCol="0" anchor="ctr"/>
           <a:lstStyle/>
           <a:p>
-            <a:pPr indent="0" marL="0">
+            <a:pPr marL="0" indent="0">
               <a:buNone/>
             </a:pPr>
             <a:r>
@@ -2588,13 +2410,20 @@
             <a:prstDash val="solid"/>
           </a:ln>
           <a:effectLst>
-            <a:outerShdw sx="100000" sy="100000" kx="0" ky="0" algn="bl" rotWithShape="0" blurRad="114300" dist="38100" dir="5400000">
+            <a:outerShdw blurRad="114300" dist="38100" dir="5400000" algn="bl" rotWithShape="0">
               <a:srgbClr val="0A2E2B">
                 <a:alpha val="18000"/>
               </a:srgbClr>
             </a:outerShdw>
           </a:effectLst>
         </p:spPr>
+        <p:txBody>
+          <a:bodyPr/>
+          <a:lstStyle/>
+          <a:p>
+            <a:endParaRPr lang="en-PH"/>
+          </a:p>
+        </p:txBody>
       </p:sp>
       <p:sp>
         <p:nvSpPr>
@@ -2615,17 +2444,24 @@
           </a:solidFill>
           <a:ln/>
         </p:spPr>
+        <p:txBody>
+          <a:bodyPr/>
+          <a:lstStyle/>
+          <a:p>
+            <a:endParaRPr lang="en-PH"/>
+          </a:p>
+        </p:txBody>
       </p:sp>
       <p:pic>
         <p:nvPicPr>
-          <p:cNvPr id="22" name="Image 3" descr="preencoded.png">    </p:cNvPr>
+          <p:cNvPr id="22" name="Image 3" descr="preencoded.png"/>
           <p:cNvPicPr>
             <a:picLocks noChangeAspect="1"/>
           </p:cNvPicPr>
           <p:nvPr/>
         </p:nvPicPr>
         <p:blipFill>
-          <a:blip r:embed="rId4"/>
+          <a:blip r:embed="rId5"/>
           <a:stretch>
             <a:fillRect/>
           </a:stretch>
@@ -2661,7 +2497,7 @@
           <a:bodyPr wrap="square" lIns="0" tIns="0" rIns="0" bIns="0" rtlCol="0" anchor="ctr"/>
           <a:lstStyle/>
           <a:p>
-            <a:pPr indent="0" marL="0">
+            <a:pPr marL="0" indent="0">
               <a:buNone/>
             </a:pPr>
             <a:r>
@@ -2700,7 +2536,7 @@
           <a:bodyPr wrap="square" lIns="0" tIns="0" rIns="0" bIns="0" rtlCol="0" anchor="ctr"/>
           <a:lstStyle/>
           <a:p>
-            <a:pPr indent="0" marL="0">
+            <a:pPr marL="0" indent="0">
               <a:buNone/>
             </a:pPr>
             <a:r>
@@ -2744,13 +2580,20 @@
             <a:prstDash val="solid"/>
           </a:ln>
           <a:effectLst>
-            <a:outerShdw sx="100000" sy="100000" kx="0" ky="0" algn="bl" rotWithShape="0" blurRad="114300" dist="38100" dir="5400000">
+            <a:outerShdw blurRad="114300" dist="38100" dir="5400000" algn="bl" rotWithShape="0">
               <a:srgbClr val="0A2E2B">
                 <a:alpha val="18000"/>
               </a:srgbClr>
             </a:outerShdw>
           </a:effectLst>
         </p:spPr>
+        <p:txBody>
+          <a:bodyPr/>
+          <a:lstStyle/>
+          <a:p>
+            <a:endParaRPr lang="en-PH"/>
+          </a:p>
+        </p:txBody>
       </p:sp>
       <p:sp>
         <p:nvSpPr>
@@ -2771,17 +2614,24 @@
           </a:solidFill>
           <a:ln/>
         </p:spPr>
+        <p:txBody>
+          <a:bodyPr/>
+          <a:lstStyle/>
+          <a:p>
+            <a:endParaRPr lang="en-PH"/>
+          </a:p>
+        </p:txBody>
       </p:sp>
       <p:pic>
         <p:nvPicPr>
-          <p:cNvPr id="27" name="Image 4" descr="preencoded.png">    </p:cNvPr>
+          <p:cNvPr id="27" name="Image 4" descr="preencoded.png"/>
           <p:cNvPicPr>
             <a:picLocks noChangeAspect="1"/>
           </p:cNvPicPr>
           <p:nvPr/>
         </p:nvPicPr>
         <p:blipFill>
-          <a:blip r:embed="rId5"/>
+          <a:blip r:embed="rId6"/>
           <a:stretch>
             <a:fillRect/>
           </a:stretch>
@@ -2817,7 +2667,7 @@
           <a:bodyPr wrap="square" lIns="0" tIns="0" rIns="0" bIns="0" rtlCol="0" anchor="ctr"/>
           <a:lstStyle/>
           <a:p>
-            <a:pPr indent="0" marL="0">
+            <a:pPr marL="0" indent="0">
               <a:buNone/>
             </a:pPr>
             <a:r>
@@ -2856,7 +2706,7 @@
           <a:bodyPr wrap="square" lIns="0" tIns="0" rIns="0" bIns="0" rtlCol="0" anchor="ctr"/>
           <a:lstStyle/>
           <a:p>
-            <a:pPr indent="0" marL="0">
+            <a:pPr marL="0" indent="0">
               <a:buNone/>
             </a:pPr>
             <a:r>
@@ -2895,11 +2745,11 @@
           <a:bodyPr wrap="square" lIns="0" tIns="0" rIns="0" bIns="0" rtlCol="0" anchor="ctr"/>
           <a:lstStyle/>
           <a:p>
-            <a:pPr indent="0" marL="0">
-              <a:buNone/>
-            </a:pPr>
-            <a:r>
-              <a:rPr lang="en-US" sz="950" b="1" spc="100" kern="0" dirty="0">
+            <a:pPr marL="0" indent="0">
+              <a:buNone/>
+            </a:pPr>
+            <a:r>
+              <a:rPr lang="en-US" sz="950" b="1" kern="0" spc="100" dirty="0">
                 <a:solidFill>
                   <a:srgbClr val="0A2E2B"/>
                 </a:solidFill>
@@ -2909,11 +2759,8 @@
               </a:rPr>
               <a:t>ARCHON</a:t>
             </a:r>
-            <a:pPr indent="0" marL="0">
-              <a:buNone/>
-            </a:pPr>
-            <a:r>
-              <a:rPr lang="en-US" sz="950" spc="100" kern="0" dirty="0">
+            <a:r>
+              <a:rPr lang="en-US" sz="950" kern="0" spc="100" dirty="0">
                 <a:solidFill>
                   <a:srgbClr val="7C938E"/>
                 </a:solidFill>
@@ -2948,7 +2795,7 @@
           <a:bodyPr wrap="square" lIns="0" tIns="0" rIns="0" bIns="0" rtlCol="0" anchor="ctr"/>
           <a:lstStyle/>
           <a:p>
-            <a:pPr algn="r" indent="0" marL="0">
+            <a:pPr marL="0" indent="0" algn="r">
               <a:buNone/>
             </a:pPr>
             <a:r>
@@ -2982,6 +2829,7 @@
         <a:solidFill>
           <a:srgbClr val="0A2E2B"/>
         </a:solidFill>
+        <a:effectLst/>
       </p:bgPr>
     </p:bg>
     <p:spTree>
@@ -3019,6 +2867,13 @@
           </a:solidFill>
           <a:ln/>
         </p:spPr>
+        <p:txBody>
+          <a:bodyPr/>
+          <a:lstStyle/>
+          <a:p>
+            <a:endParaRPr lang="en-PH"/>
+          </a:p>
+        </p:txBody>
       </p:sp>
       <p:sp>
         <p:nvSpPr>
@@ -3041,11 +2896,11 @@
           <a:bodyPr wrap="square" lIns="0" tIns="0" rIns="0" bIns="0" rtlCol="0" anchor="ctr"/>
           <a:lstStyle/>
           <a:p>
-            <a:pPr indent="0" marL="0">
-              <a:buNone/>
-            </a:pPr>
-            <a:r>
-              <a:rPr lang="en-US" sz="1250" b="1" spc="200" kern="0" dirty="0">
+            <a:pPr marL="0" indent="0">
+              <a:buNone/>
+            </a:pPr>
+            <a:r>
+              <a:rPr lang="en-US" sz="1250" b="1" kern="0" spc="200" dirty="0">
                 <a:solidFill>
                   <a:srgbClr val="2DD4BF"/>
                 </a:solidFill>
@@ -3080,7 +2935,7 @@
           <a:bodyPr wrap="square" lIns="0" tIns="0" rIns="0" bIns="0" rtlCol="0" anchor="ctr"/>
           <a:lstStyle/>
           <a:p>
-            <a:pPr indent="0" marL="0">
+            <a:pPr marL="0" indent="0">
               <a:buNone/>
             </a:pPr>
             <a:r>
@@ -3119,7 +2974,7 @@
           <a:bodyPr wrap="square" lIns="0" tIns="0" rIns="0" bIns="0" rtlCol="0" anchor="ctr"/>
           <a:lstStyle/>
           <a:p>
-            <a:pPr indent="0" marL="0">
+            <a:pPr marL="0" indent="0">
               <a:buNone/>
             </a:pPr>
             <a:r>
@@ -3139,7 +2994,7 @@
       </p:sp>
       <p:sp>
         <p:nvSpPr>
-          <p:cNvPr id="6" name="Shape 4"/>
+          <p:cNvPr id="7" name="Text 5"/>
           <p:cNvSpPr/>
           <p:nvPr/>
         </p:nvSpPr>
@@ -3148,52 +3003,19 @@
             <a:off x="548640" y="2286000"/>
             <a:ext cx="3763670" cy="310896"/>
           </a:xfrm>
-          <a:prstGeom prst="roundRect">
-            <a:avLst>
-              <a:gd name="adj" fmla="val 50000"/>
-            </a:avLst>
-          </a:prstGeom>
-          <a:solidFill>
-            <a:srgbClr val="2DD4BF"/>
-          </a:solidFill>
-          <a:ln/>
-        </p:spPr>
-      </p:sp>
-      <p:sp>
-        <p:nvSpPr>
-          <p:cNvPr id="7" name="Text 5"/>
-          <p:cNvSpPr/>
-          <p:nvPr/>
-        </p:nvSpPr>
-        <p:spPr>
-          <a:xfrm>
-            <a:off x="548640" y="2286000"/>
-            <a:ext cx="3763670" cy="310896"/>
-          </a:xfrm>
-          <a:prstGeom prst="rect">
-            <a:avLst/>
-          </a:prstGeom>
-          <a:noFill/>
-          <a:ln/>
-        </p:spPr>
-        <p:txBody>
-          <a:bodyPr wrap="square" lIns="0" tIns="0" rIns="0" bIns="0" rtlCol="0" anchor="ctr"/>
-          <a:lstStyle/>
-          <a:p>
-            <a:pPr algn="ctr" indent="0" marL="0">
-              <a:buNone/>
-            </a:pPr>
-            <a:r>
-              <a:rPr lang="en-US" sz="1050" b="1" spc="100" kern="0" dirty="0">
-                <a:solidFill>
-                  <a:srgbClr val="0A2E2B"/>
-                </a:solidFill>
-                <a:latin typeface="Trebuchet MS" pitchFamily="34" charset="0"/>
-                <a:ea typeface="Trebuchet MS" pitchFamily="34" charset="-122"/>
-                <a:cs typeface="Trebuchet MS" pitchFamily="34" charset="-120"/>
-              </a:rPr>
-              <a:t>SCORED: CREATIVITY OF THE APPLICATION — 25%</a:t>
-            </a:r>
+          <a:prstGeom prst="rect">
+            <a:avLst/>
+          </a:prstGeom>
+          <a:noFill/>
+          <a:ln/>
+        </p:spPr>
+        <p:txBody>
+          <a:bodyPr wrap="square" lIns="0" tIns="0" rIns="0" bIns="0" rtlCol="0" anchor="ctr"/>
+          <a:lstStyle/>
+          <a:p>
+            <a:pPr marL="0" indent="0" algn="ctr">
+              <a:buNone/>
+            </a:pPr>
             <a:endParaRPr lang="en-US" sz="1050" dirty="0"/>
           </a:p>
         </p:txBody>
@@ -3224,6 +3046,13 @@
             <a:prstDash val="solid"/>
           </a:ln>
         </p:spPr>
+        <p:txBody>
+          <a:bodyPr/>
+          <a:lstStyle/>
+          <a:p>
+            <a:endParaRPr lang="en-PH"/>
+          </a:p>
+        </p:txBody>
       </p:sp>
       <p:sp>
         <p:nvSpPr>
@@ -3244,17 +3073,24 @@
           </a:solidFill>
           <a:ln/>
         </p:spPr>
+        <p:txBody>
+          <a:bodyPr/>
+          <a:lstStyle/>
+          <a:p>
+            <a:endParaRPr lang="en-PH"/>
+          </a:p>
+        </p:txBody>
       </p:sp>
       <p:pic>
         <p:nvPicPr>
-          <p:cNvPr id="10" name="Image 0" descr="preencoded.png">    </p:cNvPr>
+          <p:cNvPr id="10" name="Image 0" descr="preencoded.png"/>
           <p:cNvPicPr>
             <a:picLocks noChangeAspect="1"/>
           </p:cNvPicPr>
           <p:nvPr/>
         </p:nvPicPr>
         <p:blipFill>
-          <a:blip r:embed="rId1"/>
+          <a:blip r:embed="rId3"/>
           <a:stretch>
             <a:fillRect/>
           </a:stretch>
@@ -3290,7 +3126,7 @@
           <a:bodyPr wrap="square" lIns="0" tIns="0" rIns="0" bIns="0" rtlCol="0" anchor="ctr"/>
           <a:lstStyle/>
           <a:p>
-            <a:pPr indent="0" marL="0">
+            <a:pPr marL="0" indent="0">
               <a:buNone/>
             </a:pPr>
             <a:r>
@@ -3329,7 +3165,7 @@
           <a:bodyPr wrap="square" lIns="0" tIns="0" rIns="0" bIns="0" rtlCol="0" anchor="ctr"/>
           <a:lstStyle/>
           <a:p>
-            <a:pPr indent="0" marL="0">
+            <a:pPr marL="0" indent="0">
               <a:buNone/>
             </a:pPr>
             <a:r>
@@ -3373,6 +3209,13 @@
             <a:prstDash val="solid"/>
           </a:ln>
         </p:spPr>
+        <p:txBody>
+          <a:bodyPr/>
+          <a:lstStyle/>
+          <a:p>
+            <a:endParaRPr lang="en-PH"/>
+          </a:p>
+        </p:txBody>
       </p:sp>
       <p:sp>
         <p:nvSpPr>
@@ -3393,17 +3236,24 @@
           </a:solidFill>
           <a:ln/>
         </p:spPr>
+        <p:txBody>
+          <a:bodyPr/>
+          <a:lstStyle/>
+          <a:p>
+            <a:endParaRPr lang="en-PH"/>
+          </a:p>
+        </p:txBody>
       </p:sp>
       <p:pic>
         <p:nvPicPr>
-          <p:cNvPr id="15" name="Image 1" descr="preencoded.png">    </p:cNvPr>
+          <p:cNvPr id="15" name="Image 1" descr="preencoded.png"/>
           <p:cNvPicPr>
             <a:picLocks noChangeAspect="1"/>
           </p:cNvPicPr>
           <p:nvPr/>
         </p:nvPicPr>
         <p:blipFill>
-          <a:blip r:embed="rId2"/>
+          <a:blip r:embed="rId4"/>
           <a:stretch>
             <a:fillRect/>
           </a:stretch>
@@ -3439,7 +3289,7 @@
           <a:bodyPr wrap="square" lIns="0" tIns="0" rIns="0" bIns="0" rtlCol="0" anchor="ctr"/>
           <a:lstStyle/>
           <a:p>
-            <a:pPr indent="0" marL="0">
+            <a:pPr marL="0" indent="0">
               <a:buNone/>
             </a:pPr>
             <a:r>
@@ -3478,7 +3328,7 @@
           <a:bodyPr wrap="square" lIns="0" tIns="0" rIns="0" bIns="0" rtlCol="0" anchor="ctr"/>
           <a:lstStyle/>
           <a:p>
-            <a:pPr indent="0" marL="0">
+            <a:pPr marL="0" indent="0">
               <a:buNone/>
             </a:pPr>
             <a:r>
@@ -3522,6 +3372,13 @@
             <a:prstDash val="solid"/>
           </a:ln>
         </p:spPr>
+        <p:txBody>
+          <a:bodyPr/>
+          <a:lstStyle/>
+          <a:p>
+            <a:endParaRPr lang="en-PH"/>
+          </a:p>
+        </p:txBody>
       </p:sp>
       <p:sp>
         <p:nvSpPr>
@@ -3542,17 +3399,24 @@
           </a:solidFill>
           <a:ln/>
         </p:spPr>
+        <p:txBody>
+          <a:bodyPr/>
+          <a:lstStyle/>
+          <a:p>
+            <a:endParaRPr lang="en-PH"/>
+          </a:p>
+        </p:txBody>
       </p:sp>
       <p:pic>
         <p:nvPicPr>
-          <p:cNvPr id="20" name="Image 2" descr="preencoded.png">    </p:cNvPr>
+          <p:cNvPr id="20" name="Image 2" descr="preencoded.png"/>
           <p:cNvPicPr>
             <a:picLocks noChangeAspect="1"/>
           </p:cNvPicPr>
           <p:nvPr/>
         </p:nvPicPr>
         <p:blipFill>
-          <a:blip r:embed="rId3"/>
+          <a:blip r:embed="rId5"/>
           <a:stretch>
             <a:fillRect/>
           </a:stretch>
@@ -3588,7 +3452,7 @@
           <a:bodyPr wrap="square" lIns="0" tIns="0" rIns="0" bIns="0" rtlCol="0" anchor="ctr"/>
           <a:lstStyle/>
           <a:p>
-            <a:pPr indent="0" marL="0">
+            <a:pPr marL="0" indent="0">
               <a:buNone/>
             </a:pPr>
             <a:r>
@@ -3627,7 +3491,7 @@
           <a:bodyPr wrap="square" lIns="0" tIns="0" rIns="0" bIns="0" rtlCol="0" anchor="ctr"/>
           <a:lstStyle/>
           <a:p>
-            <a:pPr indent="0" marL="0">
+            <a:pPr marL="0" indent="0">
               <a:buNone/>
             </a:pPr>
             <a:r>
@@ -3671,6 +3535,13 @@
             <a:prstDash val="solid"/>
           </a:ln>
         </p:spPr>
+        <p:txBody>
+          <a:bodyPr/>
+          <a:lstStyle/>
+          <a:p>
+            <a:endParaRPr lang="en-PH"/>
+          </a:p>
+        </p:txBody>
       </p:sp>
       <p:sp>
         <p:nvSpPr>
@@ -3691,17 +3562,24 @@
           </a:solidFill>
           <a:ln/>
         </p:spPr>
+        <p:txBody>
+          <a:bodyPr/>
+          <a:lstStyle/>
+          <a:p>
+            <a:endParaRPr lang="en-PH"/>
+          </a:p>
+        </p:txBody>
       </p:sp>
       <p:pic>
         <p:nvPicPr>
-          <p:cNvPr id="25" name="Image 3" descr="preencoded.png">    </p:cNvPr>
+          <p:cNvPr id="25" name="Image 3" descr="preencoded.png"/>
           <p:cNvPicPr>
             <a:picLocks noChangeAspect="1"/>
           </p:cNvPicPr>
           <p:nvPr/>
         </p:nvPicPr>
         <p:blipFill>
-          <a:blip r:embed="rId4"/>
+          <a:blip r:embed="rId6"/>
           <a:stretch>
             <a:fillRect/>
           </a:stretch>
@@ -3737,7 +3615,7 @@
           <a:bodyPr wrap="square" lIns="0" tIns="0" rIns="0" bIns="0" rtlCol="0" anchor="ctr"/>
           <a:lstStyle/>
           <a:p>
-            <a:pPr indent="0" marL="0">
+            <a:pPr marL="0" indent="0">
               <a:buNone/>
             </a:pPr>
             <a:r>
@@ -3776,7 +3654,7 @@
           <a:bodyPr wrap="square" lIns="0" tIns="0" rIns="0" bIns="0" rtlCol="0" anchor="ctr"/>
           <a:lstStyle/>
           <a:p>
-            <a:pPr indent="0" marL="0">
+            <a:pPr marL="0" indent="0">
               <a:buNone/>
             </a:pPr>
             <a:r>
@@ -3815,11 +3693,11 @@
           <a:bodyPr wrap="square" lIns="0" tIns="0" rIns="0" bIns="0" rtlCol="0" anchor="ctr"/>
           <a:lstStyle/>
           <a:p>
-            <a:pPr indent="0" marL="0">
-              <a:buNone/>
-            </a:pPr>
-            <a:r>
-              <a:rPr lang="en-US" sz="950" b="1" spc="100" kern="0" dirty="0">
+            <a:pPr marL="0" indent="0">
+              <a:buNone/>
+            </a:pPr>
+            <a:r>
+              <a:rPr lang="en-US" sz="950" b="1" kern="0" spc="100" dirty="0">
                 <a:solidFill>
                   <a:srgbClr val="FFFFFF"/>
                 </a:solidFill>
@@ -3829,11 +3707,8 @@
               </a:rPr>
               <a:t>ARCHON</a:t>
             </a:r>
-            <a:pPr indent="0" marL="0">
-              <a:buNone/>
-            </a:pPr>
-            <a:r>
-              <a:rPr lang="en-US" sz="950" spc="100" kern="0" dirty="0">
+            <a:r>
+              <a:rPr lang="en-US" sz="950" kern="0" spc="100" dirty="0">
                 <a:solidFill>
                   <a:srgbClr val="BFE9E2"/>
                 </a:solidFill>
@@ -3868,7 +3743,7 @@
           <a:bodyPr wrap="square" lIns="0" tIns="0" rIns="0" bIns="0" rtlCol="0" anchor="ctr"/>
           <a:lstStyle/>
           <a:p>
-            <a:pPr algn="r" indent="0" marL="0">
+            <a:pPr marL="0" indent="0" algn="r">
               <a:buNone/>
             </a:pPr>
             <a:r>
@@ -3902,6 +3777,7 @@
         <a:solidFill>
           <a:srgbClr val="FFFFFF"/>
         </a:solidFill>
+        <a:effectLst/>
       </p:bgPr>
     </p:bg>
     <p:spTree>
@@ -3939,11 +3815,11 @@
           <a:bodyPr wrap="square" lIns="0" tIns="0" rIns="0" bIns="0" rtlCol="0" anchor="ctr"/>
           <a:lstStyle/>
           <a:p>
-            <a:pPr indent="0" marL="0">
-              <a:buNone/>
-            </a:pPr>
-            <a:r>
-              <a:rPr lang="en-US" sz="1250" b="1" spc="200" kern="0" dirty="0">
+            <a:pPr marL="0" indent="0">
+              <a:buNone/>
+            </a:pPr>
+            <a:r>
+              <a:rPr lang="en-US" sz="1250" b="1" kern="0" spc="200" dirty="0">
                 <a:solidFill>
                   <a:srgbClr val="1F8A7D"/>
                 </a:solidFill>
@@ -3978,7 +3854,7 @@
           <a:bodyPr wrap="square" lIns="0" tIns="0" rIns="0" bIns="0" rtlCol="0" anchor="ctr"/>
           <a:lstStyle/>
           <a:p>
-            <a:pPr indent="0" marL="0">
+            <a:pPr marL="0" indent="0">
               <a:buNone/>
             </a:pPr>
             <a:r>
@@ -3998,7 +3874,7 @@
       </p:sp>
       <p:sp>
         <p:nvSpPr>
-          <p:cNvPr id="4" name="Shape 2"/>
+          <p:cNvPr id="5" name="Text 3"/>
           <p:cNvSpPr/>
           <p:nvPr/>
         </p:nvSpPr>
@@ -4007,43 +3883,21 @@
             <a:off x="548640" y="1664208"/>
             <a:ext cx="2501798" cy="310896"/>
           </a:xfrm>
-          <a:prstGeom prst="roundRect">
-            <a:avLst>
-              <a:gd name="adj" fmla="val 50000"/>
-            </a:avLst>
-          </a:prstGeom>
-          <a:solidFill>
-            <a:srgbClr val="1F8A7D"/>
-          </a:solidFill>
-          <a:ln/>
-        </p:spPr>
-      </p:sp>
-      <p:sp>
-        <p:nvSpPr>
-          <p:cNvPr id="5" name="Text 3"/>
-          <p:cNvSpPr/>
-          <p:nvPr/>
-        </p:nvSpPr>
-        <p:spPr>
-          <a:xfrm>
-            <a:off x="548640" y="1664208"/>
-            <a:ext cx="2501798" cy="310896"/>
-          </a:xfrm>
-          <a:prstGeom prst="rect">
-            <a:avLst/>
-          </a:prstGeom>
-          <a:noFill/>
-          <a:ln/>
-        </p:spPr>
-        <p:txBody>
-          <a:bodyPr wrap="square" lIns="0" tIns="0" rIns="0" bIns="0" rtlCol="0" anchor="ctr"/>
-          <a:lstStyle/>
-          <a:p>
-            <a:pPr algn="ctr" indent="0" marL="0">
-              <a:buNone/>
-            </a:pPr>
-            <a:r>
-              <a:rPr lang="en-US" sz="1050" b="1" spc="100" kern="0" dirty="0">
+          <a:prstGeom prst="rect">
+            <a:avLst/>
+          </a:prstGeom>
+          <a:noFill/>
+          <a:ln/>
+        </p:spPr>
+        <p:txBody>
+          <a:bodyPr wrap="square" lIns="0" tIns="0" rIns="0" bIns="0" rtlCol="0" anchor="ctr"/>
+          <a:lstStyle/>
+          <a:p>
+            <a:pPr marL="0" indent="0" algn="ctr">
+              <a:buNone/>
+            </a:pPr>
+            <a:r>
+              <a:rPr lang="en-US" sz="1050" b="1" kern="0" spc="100" dirty="0">
                 <a:solidFill>
                   <a:srgbClr val="FFFFFF"/>
                 </a:solidFill>
@@ -4078,13 +3932,20 @@
           </a:solidFill>
           <a:ln/>
           <a:effectLst>
-            <a:outerShdw sx="100000" sy="100000" kx="0" ky="0" algn="bl" rotWithShape="0" blurRad="114300" dist="38100" dir="5400000">
+            <a:outerShdw blurRad="114300" dist="38100" dir="5400000" algn="bl" rotWithShape="0">
               <a:srgbClr val="0A2E2B">
                 <a:alpha val="18000"/>
               </a:srgbClr>
             </a:outerShdw>
           </a:effectLst>
         </p:spPr>
+        <p:txBody>
+          <a:bodyPr/>
+          <a:lstStyle/>
+          <a:p>
+            <a:endParaRPr lang="en-PH"/>
+          </a:p>
+        </p:txBody>
       </p:sp>
       <p:sp>
         <p:nvSpPr>
@@ -4107,6 +3968,13 @@
           </a:solidFill>
           <a:ln/>
         </p:spPr>
+        <p:txBody>
+          <a:bodyPr/>
+          <a:lstStyle/>
+          <a:p>
+            <a:endParaRPr lang="en-PH"/>
+          </a:p>
+        </p:txBody>
       </p:sp>
       <p:sp>
         <p:nvSpPr>
@@ -4127,6 +3995,13 @@
           </a:solidFill>
           <a:ln/>
         </p:spPr>
+        <p:txBody>
+          <a:bodyPr/>
+          <a:lstStyle/>
+          <a:p>
+            <a:endParaRPr lang="en-PH"/>
+          </a:p>
+        </p:txBody>
       </p:sp>
       <p:sp>
         <p:nvSpPr>
@@ -4149,7 +4024,7 @@
           <a:bodyPr wrap="square" lIns="0" tIns="0" rIns="0" bIns="0" rtlCol="0" anchor="ctr"/>
           <a:lstStyle/>
           <a:p>
-            <a:pPr indent="0" marL="0">
+            <a:pPr marL="0" indent="0">
               <a:buNone/>
             </a:pPr>
             <a:r>
@@ -4188,6 +4063,13 @@
           </a:solidFill>
           <a:ln/>
         </p:spPr>
+        <p:txBody>
+          <a:bodyPr/>
+          <a:lstStyle/>
+          <a:p>
+            <a:endParaRPr lang="en-PH"/>
+          </a:p>
+        </p:txBody>
       </p:sp>
       <p:sp>
         <p:nvSpPr>
@@ -4210,6 +4092,13 @@
           </a:solidFill>
           <a:ln/>
         </p:spPr>
+        <p:txBody>
+          <a:bodyPr/>
+          <a:lstStyle/>
+          <a:p>
+            <a:endParaRPr lang="en-PH"/>
+          </a:p>
+        </p:txBody>
       </p:sp>
       <p:sp>
         <p:nvSpPr>
@@ -4237,17 +4126,24 @@
             <a:prstDash val="solid"/>
           </a:ln>
         </p:spPr>
+        <p:txBody>
+          <a:bodyPr/>
+          <a:lstStyle/>
+          <a:p>
+            <a:endParaRPr lang="en-PH"/>
+          </a:p>
+        </p:txBody>
       </p:sp>
       <p:pic>
         <p:nvPicPr>
-          <p:cNvPr id="13" name="Image 0" descr="preencoded.png">    </p:cNvPr>
+          <p:cNvPr id="13" name="Image 0" descr="preencoded.png"/>
           <p:cNvPicPr>
             <a:picLocks noChangeAspect="1"/>
           </p:cNvPicPr>
           <p:nvPr/>
         </p:nvPicPr>
         <p:blipFill>
-          <a:blip r:embed="rId1"/>
+          <a:blip r:embed="rId3"/>
           <a:stretch>
             <a:fillRect/>
           </a:stretch>
@@ -4283,7 +4179,7 @@
           <a:bodyPr wrap="square" lIns="0" tIns="0" rIns="0" bIns="0" rtlCol="0" anchor="ctr"/>
           <a:lstStyle/>
           <a:p>
-            <a:pPr indent="0" marL="0">
+            <a:pPr marL="0" indent="0">
               <a:buNone/>
             </a:pPr>
             <a:r>
@@ -4322,7 +4218,7 @@
           <a:bodyPr wrap="square" lIns="0" tIns="0" rIns="0" bIns="0" rtlCol="0" anchor="ctr"/>
           <a:lstStyle/>
           <a:p>
-            <a:pPr indent="0" marL="0">
+            <a:pPr marL="0" indent="0">
               <a:buNone/>
             </a:pPr>
             <a:r>
@@ -4339,7 +4235,7 @@
             <a:endParaRPr lang="en-US" sz="850" dirty="0"/>
           </a:p>
           <a:p>
-            <a:pPr indent="0" marL="0">
+            <a:pPr marL="0" indent="0">
               <a:buNone/>
             </a:pPr>
             <a:r>
@@ -4378,6 +4274,13 @@
           </a:solidFill>
           <a:ln/>
         </p:spPr>
+        <p:txBody>
+          <a:bodyPr/>
+          <a:lstStyle/>
+          <a:p>
+            <a:endParaRPr lang="en-PH"/>
+          </a:p>
+        </p:txBody>
       </p:sp>
       <p:sp>
         <p:nvSpPr>
@@ -4400,7 +4303,7 @@
           <a:bodyPr wrap="square" lIns="0" tIns="0" rIns="0" bIns="0" rtlCol="0" anchor="ctr"/>
           <a:lstStyle/>
           <a:p>
-            <a:pPr algn="ctr" indent="0" marL="0">
+            <a:pPr marL="0" indent="0" algn="ctr">
               <a:buNone/>
             </a:pPr>
             <a:r>
@@ -4439,13 +4342,20 @@
           </a:solidFill>
           <a:ln/>
           <a:effectLst>
-            <a:outerShdw sx="100000" sy="100000" kx="0" ky="0" algn="bl" rotWithShape="0" blurRad="114300" dist="38100" dir="5400000">
+            <a:outerShdw blurRad="114300" dist="38100" dir="5400000" algn="bl" rotWithShape="0">
               <a:srgbClr val="0A2E2B">
                 <a:alpha val="18000"/>
               </a:srgbClr>
             </a:outerShdw>
           </a:effectLst>
         </p:spPr>
+        <p:txBody>
+          <a:bodyPr/>
+          <a:lstStyle/>
+          <a:p>
+            <a:endParaRPr lang="en-PH"/>
+          </a:p>
+        </p:txBody>
       </p:sp>
       <p:sp>
         <p:nvSpPr>
@@ -4468,6 +4378,13 @@
           </a:solidFill>
           <a:ln/>
         </p:spPr>
+        <p:txBody>
+          <a:bodyPr/>
+          <a:lstStyle/>
+          <a:p>
+            <a:endParaRPr lang="en-PH"/>
+          </a:p>
+        </p:txBody>
       </p:sp>
       <p:sp>
         <p:nvSpPr>
@@ -4488,6 +4405,13 @@
           </a:solidFill>
           <a:ln/>
         </p:spPr>
+        <p:txBody>
+          <a:bodyPr/>
+          <a:lstStyle/>
+          <a:p>
+            <a:endParaRPr lang="en-PH"/>
+          </a:p>
+        </p:txBody>
       </p:sp>
       <p:sp>
         <p:nvSpPr>
@@ -4510,7 +4434,7 @@
           <a:bodyPr wrap="square" lIns="0" tIns="0" rIns="0" bIns="0" rtlCol="0" anchor="ctr"/>
           <a:lstStyle/>
           <a:p>
-            <a:pPr indent="0" marL="0">
+            <a:pPr marL="0" indent="0">
               <a:buNone/>
             </a:pPr>
             <a:r>
@@ -4549,17 +4473,24 @@
           </a:solidFill>
           <a:ln/>
         </p:spPr>
+        <p:txBody>
+          <a:bodyPr/>
+          <a:lstStyle/>
+          <a:p>
+            <a:endParaRPr lang="en-PH"/>
+          </a:p>
+        </p:txBody>
       </p:sp>
       <p:pic>
         <p:nvPicPr>
-          <p:cNvPr id="23" name="Image 1" descr="preencoded.png">    </p:cNvPr>
+          <p:cNvPr id="23" name="Image 1" descr="preencoded.png"/>
           <p:cNvPicPr>
             <a:picLocks noChangeAspect="1"/>
           </p:cNvPicPr>
           <p:nvPr/>
         </p:nvPicPr>
         <p:blipFill>
-          <a:blip r:embed="rId2"/>
+          <a:blip r:embed="rId4"/>
           <a:stretch>
             <a:fillRect/>
           </a:stretch>
@@ -4595,7 +4526,7 @@
           <a:bodyPr wrap="square" lIns="0" tIns="0" rIns="0" bIns="0" rtlCol="0" anchor="ctr"/>
           <a:lstStyle/>
           <a:p>
-            <a:pPr indent="0" marL="0">
+            <a:pPr marL="0" indent="0">
               <a:buNone/>
             </a:pPr>
             <a:r>
@@ -4634,7 +4565,7 @@
           <a:bodyPr wrap="square" lIns="0" tIns="0" rIns="0" bIns="0" rtlCol="0" anchor="ctr"/>
           <a:lstStyle/>
           <a:p>
-            <a:pPr indent="0" marL="0">
+            <a:pPr marL="0" indent="0">
               <a:buNone/>
             </a:pPr>
             <a:r>
@@ -4651,7 +4582,7 @@
             <a:endParaRPr lang="en-US" sz="850" dirty="0"/>
           </a:p>
           <a:p>
-            <a:pPr indent="0" marL="0">
+            <a:pPr marL="0" indent="0">
               <a:buNone/>
             </a:pPr>
             <a:r>
@@ -4690,6 +4621,13 @@
           </a:solidFill>
           <a:ln/>
         </p:spPr>
+        <p:txBody>
+          <a:bodyPr/>
+          <a:lstStyle/>
+          <a:p>
+            <a:endParaRPr lang="en-PH"/>
+          </a:p>
+        </p:txBody>
       </p:sp>
       <p:sp>
         <p:nvSpPr>
@@ -4712,7 +4650,7 @@
           <a:bodyPr wrap="square" lIns="0" tIns="0" rIns="0" bIns="0" rtlCol="0" anchor="ctr"/>
           <a:lstStyle/>
           <a:p>
-            <a:pPr indent="0" marL="0">
+            <a:pPr marL="0" indent="0">
               <a:buNone/>
             </a:pPr>
             <a:r>
@@ -4751,6 +4689,13 @@
           </a:solidFill>
           <a:ln/>
         </p:spPr>
+        <p:txBody>
+          <a:bodyPr/>
+          <a:lstStyle/>
+          <a:p>
+            <a:endParaRPr lang="en-PH"/>
+          </a:p>
+        </p:txBody>
       </p:sp>
       <p:sp>
         <p:nvSpPr>
@@ -4773,7 +4718,7 @@
           <a:bodyPr wrap="square" lIns="0" tIns="0" rIns="0" bIns="0" rtlCol="0" anchor="ctr"/>
           <a:lstStyle/>
           <a:p>
-            <a:pPr algn="ctr" indent="0" marL="0">
+            <a:pPr marL="0" indent="0" algn="ctr">
               <a:buNone/>
             </a:pPr>
             <a:r>
@@ -4812,7 +4757,7 @@
           <a:bodyPr wrap="square" lIns="0" tIns="0" rIns="0" bIns="0" rtlCol="0" anchor="ctr"/>
           <a:lstStyle/>
           <a:p>
-            <a:pPr algn="ctr" indent="0" marL="0">
+            <a:pPr marL="0" indent="0" algn="ctr">
               <a:buNone/>
             </a:pPr>
             <a:r>
@@ -4849,6 +4794,13 @@
           </a:solidFill>
           <a:ln/>
         </p:spPr>
+        <p:txBody>
+          <a:bodyPr/>
+          <a:lstStyle/>
+          <a:p>
+            <a:endParaRPr lang="en-PH"/>
+          </a:p>
+        </p:txBody>
       </p:sp>
       <p:sp>
         <p:nvSpPr>
@@ -4871,7 +4823,7 @@
           <a:bodyPr wrap="square" lIns="0" tIns="0" rIns="0" bIns="0" rtlCol="0" anchor="ctr"/>
           <a:lstStyle/>
           <a:p>
-            <a:pPr indent="0" marL="0">
+            <a:pPr marL="0" indent="0">
               <a:buNone/>
             </a:pPr>
             <a:r>
@@ -4910,7 +4862,7 @@
           <a:bodyPr wrap="square" lIns="0" tIns="0" rIns="0" bIns="0" rtlCol="0" anchor="ctr"/>
           <a:lstStyle/>
           <a:p>
-            <a:pPr indent="0" marL="0">
+            <a:pPr marL="0" indent="0">
               <a:buNone/>
             </a:pPr>
             <a:r>
@@ -4947,6 +4899,13 @@
           </a:solidFill>
           <a:ln/>
         </p:spPr>
+        <p:txBody>
+          <a:bodyPr/>
+          <a:lstStyle/>
+          <a:p>
+            <a:endParaRPr lang="en-PH"/>
+          </a:p>
+        </p:txBody>
       </p:sp>
       <p:sp>
         <p:nvSpPr>
@@ -4969,7 +4928,7 @@
           <a:bodyPr wrap="square" lIns="0" tIns="0" rIns="0" bIns="0" rtlCol="0" anchor="ctr"/>
           <a:lstStyle/>
           <a:p>
-            <a:pPr indent="0" marL="0">
+            <a:pPr marL="0" indent="0">
               <a:buNone/>
             </a:pPr>
             <a:r>
@@ -5008,7 +4967,7 @@
           <a:bodyPr wrap="square" lIns="0" tIns="0" rIns="0" bIns="0" rtlCol="0" anchor="ctr"/>
           <a:lstStyle/>
           <a:p>
-            <a:pPr indent="0" marL="0">
+            <a:pPr marL="0" indent="0">
               <a:buNone/>
             </a:pPr>
             <a:r>
@@ -5045,6 +5004,13 @@
           </a:solidFill>
           <a:ln/>
         </p:spPr>
+        <p:txBody>
+          <a:bodyPr/>
+          <a:lstStyle/>
+          <a:p>
+            <a:endParaRPr lang="en-PH"/>
+          </a:p>
+        </p:txBody>
       </p:sp>
       <p:sp>
         <p:nvSpPr>
@@ -5067,7 +5033,7 @@
           <a:bodyPr wrap="square" lIns="0" tIns="0" rIns="0" bIns="0" rtlCol="0" anchor="ctr"/>
           <a:lstStyle/>
           <a:p>
-            <a:pPr indent="0" marL="0">
+            <a:pPr marL="0" indent="0">
               <a:buNone/>
             </a:pPr>
             <a:r>
@@ -5106,7 +5072,7 @@
           <a:bodyPr wrap="square" lIns="0" tIns="0" rIns="0" bIns="0" rtlCol="0" anchor="ctr"/>
           <a:lstStyle/>
           <a:p>
-            <a:pPr indent="0" marL="0">
+            <a:pPr marL="0" indent="0">
               <a:buNone/>
             </a:pPr>
             <a:r>
@@ -5143,6 +5109,13 @@
           </a:solidFill>
           <a:ln/>
         </p:spPr>
+        <p:txBody>
+          <a:bodyPr/>
+          <a:lstStyle/>
+          <a:p>
+            <a:endParaRPr lang="en-PH"/>
+          </a:p>
+        </p:txBody>
       </p:sp>
       <p:sp>
         <p:nvSpPr>
@@ -5165,7 +5138,7 @@
           <a:bodyPr wrap="square" lIns="0" tIns="0" rIns="0" bIns="0" rtlCol="0" anchor="ctr"/>
           <a:lstStyle/>
           <a:p>
-            <a:pPr indent="0" marL="0">
+            <a:pPr marL="0" indent="0">
               <a:buNone/>
             </a:pPr>
             <a:r>
@@ -5204,7 +5177,7 @@
           <a:bodyPr wrap="square" lIns="0" tIns="0" rIns="0" bIns="0" rtlCol="0" anchor="ctr"/>
           <a:lstStyle/>
           <a:p>
-            <a:pPr indent="0" marL="0">
+            <a:pPr marL="0" indent="0">
               <a:buNone/>
             </a:pPr>
             <a:r>
@@ -5243,11 +5216,11 @@
           <a:bodyPr wrap="square" lIns="0" tIns="0" rIns="0" bIns="0" rtlCol="0" anchor="ctr"/>
           <a:lstStyle/>
           <a:p>
-            <a:pPr indent="0" marL="0">
-              <a:buNone/>
-            </a:pPr>
-            <a:r>
-              <a:rPr lang="en-US" sz="950" b="1" spc="100" kern="0" dirty="0">
+            <a:pPr marL="0" indent="0">
+              <a:buNone/>
+            </a:pPr>
+            <a:r>
+              <a:rPr lang="en-US" sz="950" b="1" kern="0" spc="100" dirty="0">
                 <a:solidFill>
                   <a:srgbClr val="0A2E2B"/>
                 </a:solidFill>
@@ -5257,11 +5230,8 @@
               </a:rPr>
               <a:t>ARCHON</a:t>
             </a:r>
-            <a:pPr indent="0" marL="0">
-              <a:buNone/>
-            </a:pPr>
-            <a:r>
-              <a:rPr lang="en-US" sz="950" spc="100" kern="0" dirty="0">
+            <a:r>
+              <a:rPr lang="en-US" sz="950" kern="0" spc="100" dirty="0">
                 <a:solidFill>
                   <a:srgbClr val="7C938E"/>
                 </a:solidFill>
@@ -5296,7 +5266,7 @@
           <a:bodyPr wrap="square" lIns="0" tIns="0" rIns="0" bIns="0" rtlCol="0" anchor="ctr"/>
           <a:lstStyle/>
           <a:p>
-            <a:pPr algn="r" indent="0" marL="0">
+            <a:pPr marL="0" indent="0" algn="r">
               <a:buNone/>
             </a:pPr>
             <a:r>
@@ -5330,6 +5300,7 @@
         <a:solidFill>
           <a:srgbClr val="FFFFFF"/>
         </a:solidFill>
+        <a:effectLst/>
       </p:bgPr>
     </p:bg>
     <p:spTree>
@@ -5367,11 +5338,11 @@
           <a:bodyPr wrap="square" lIns="0" tIns="0" rIns="0" bIns="0" rtlCol="0" anchor="ctr"/>
           <a:lstStyle/>
           <a:p>
-            <a:pPr indent="0" marL="0">
-              <a:buNone/>
-            </a:pPr>
-            <a:r>
-              <a:rPr lang="en-US" sz="1250" b="1" spc="200" kern="0" dirty="0">
+            <a:pPr marL="0" indent="0">
+              <a:buNone/>
+            </a:pPr>
+            <a:r>
+              <a:rPr lang="en-US" sz="1250" b="1" kern="0" spc="200" dirty="0">
                 <a:solidFill>
                   <a:srgbClr val="1F8A7D"/>
                 </a:solidFill>
@@ -5406,7 +5377,7 @@
           <a:bodyPr wrap="square" lIns="0" tIns="0" rIns="0" bIns="0" rtlCol="0" anchor="ctr"/>
           <a:lstStyle/>
           <a:p>
-            <a:pPr indent="0" marL="0">
+            <a:pPr marL="0" indent="0">
               <a:buNone/>
             </a:pPr>
             <a:r>
@@ -5445,7 +5416,7 @@
           <a:bodyPr wrap="square" lIns="0" tIns="0" rIns="0" bIns="0" rtlCol="0" anchor="ctr"/>
           <a:lstStyle/>
           <a:p>
-            <a:pPr indent="0" marL="0">
+            <a:pPr marL="0" indent="0">
               <a:buNone/>
             </a:pPr>
             <a:r>
@@ -5489,13 +5460,20 @@
             <a:prstDash val="solid"/>
           </a:ln>
           <a:effectLst>
-            <a:outerShdw sx="100000" sy="100000" kx="0" ky="0" algn="bl" rotWithShape="0" blurRad="114300" dist="38100" dir="5400000">
+            <a:outerShdw blurRad="114300" dist="38100" dir="5400000" algn="bl" rotWithShape="0">
               <a:srgbClr val="0A2E2B">
                 <a:alpha val="18000"/>
               </a:srgbClr>
             </a:outerShdw>
           </a:effectLst>
         </p:spPr>
+        <p:txBody>
+          <a:bodyPr/>
+          <a:lstStyle/>
+          <a:p>
+            <a:endParaRPr lang="en-PH"/>
+          </a:p>
+        </p:txBody>
       </p:sp>
       <p:sp>
         <p:nvSpPr>
@@ -5516,6 +5494,13 @@
           </a:solidFill>
           <a:ln/>
         </p:spPr>
+        <p:txBody>
+          <a:bodyPr/>
+          <a:lstStyle/>
+          <a:p>
+            <a:endParaRPr lang="en-PH"/>
+          </a:p>
+        </p:txBody>
       </p:sp>
       <p:sp>
         <p:nvSpPr>
@@ -5536,6 +5521,13 @@
           </a:solidFill>
           <a:ln/>
         </p:spPr>
+        <p:txBody>
+          <a:bodyPr/>
+          <a:lstStyle/>
+          <a:p>
+            <a:endParaRPr lang="en-PH"/>
+          </a:p>
+        </p:txBody>
       </p:sp>
       <p:sp>
         <p:nvSpPr>
@@ -5556,6 +5548,13 @@
           </a:solidFill>
           <a:ln/>
         </p:spPr>
+        <p:txBody>
+          <a:bodyPr/>
+          <a:lstStyle/>
+          <a:p>
+            <a:endParaRPr lang="en-PH"/>
+          </a:p>
+        </p:txBody>
       </p:sp>
       <p:sp>
         <p:nvSpPr>
@@ -5576,6 +5575,13 @@
           </a:solidFill>
           <a:ln/>
         </p:spPr>
+        <p:txBody>
+          <a:bodyPr/>
+          <a:lstStyle/>
+          <a:p>
+            <a:endParaRPr lang="en-PH"/>
+          </a:p>
+        </p:txBody>
       </p:sp>
       <p:sp>
         <p:nvSpPr>
@@ -5598,7 +5604,7 @@
           <a:bodyPr wrap="square" lIns="0" tIns="0" rIns="0" bIns="0" rtlCol="0" anchor="ctr"/>
           <a:lstStyle/>
           <a:p>
-            <a:pPr indent="0" marL="0">
+            <a:pPr marL="0" indent="0">
               <a:buNone/>
             </a:pPr>
             <a:r>
@@ -5635,6 +5641,13 @@
           </a:solidFill>
           <a:ln/>
         </p:spPr>
+        <p:txBody>
+          <a:bodyPr/>
+          <a:lstStyle/>
+          <a:p>
+            <a:endParaRPr lang="en-PH"/>
+          </a:p>
+        </p:txBody>
       </p:sp>
       <p:sp>
         <p:nvSpPr>
@@ -5657,7 +5670,7 @@
           <a:bodyPr wrap="square" lIns="0" tIns="0" rIns="0" bIns="0" rtlCol="0" anchor="ctr"/>
           <a:lstStyle/>
           <a:p>
-            <a:pPr indent="0" marL="0">
+            <a:pPr marL="0" indent="0">
               <a:buNone/>
             </a:pPr>
             <a:r>
@@ -5696,7 +5709,7 @@
           <a:bodyPr wrap="square" lIns="0" tIns="0" rIns="0" bIns="0" rtlCol="0" anchor="ctr"/>
           <a:lstStyle/>
           <a:p>
-            <a:pPr indent="0" marL="0">
+            <a:pPr marL="0" indent="0">
               <a:buNone/>
             </a:pPr>
             <a:r>
@@ -5735,7 +5748,7 @@
           <a:bodyPr wrap="square" lIns="0" tIns="0" rIns="0" bIns="0" rtlCol="0" anchor="ctr"/>
           <a:lstStyle/>
           <a:p>
-            <a:pPr indent="0" marL="0">
+            <a:pPr marL="0" indent="0">
               <a:buNone/>
             </a:pPr>
             <a:r>
@@ -5774,7 +5787,7 @@
           <a:bodyPr wrap="square" lIns="0" tIns="0" rIns="0" bIns="0" rtlCol="0" anchor="ctr"/>
           <a:lstStyle/>
           <a:p>
-            <a:pPr indent="0" marL="0">
+            <a:pPr marL="0" indent="0">
               <a:buNone/>
             </a:pPr>
             <a:r>
@@ -5813,6 +5826,13 @@
           </a:solidFill>
           <a:ln/>
         </p:spPr>
+        <p:txBody>
+          <a:bodyPr/>
+          <a:lstStyle/>
+          <a:p>
+            <a:endParaRPr lang="en-PH"/>
+          </a:p>
+        </p:txBody>
       </p:sp>
       <p:sp>
         <p:nvSpPr>
@@ -5835,7 +5855,7 @@
           <a:bodyPr wrap="square" lIns="0" tIns="0" rIns="0" bIns="0" rtlCol="0" anchor="ctr"/>
           <a:lstStyle/>
           <a:p>
-            <a:pPr indent="0" marL="0">
+            <a:pPr marL="0" indent="0">
               <a:buNone/>
             </a:pPr>
             <a:r>
@@ -5874,7 +5894,7 @@
           <a:bodyPr wrap="square" lIns="0" tIns="0" rIns="0" bIns="0" rtlCol="0" anchor="ctr"/>
           <a:lstStyle/>
           <a:p>
-            <a:pPr indent="0" marL="0">
+            <a:pPr marL="0" indent="0">
               <a:buNone/>
             </a:pPr>
             <a:r>
@@ -5913,6 +5933,13 @@
           </a:solidFill>
           <a:ln/>
         </p:spPr>
+        <p:txBody>
+          <a:bodyPr/>
+          <a:lstStyle/>
+          <a:p>
+            <a:endParaRPr lang="en-PH"/>
+          </a:p>
+        </p:txBody>
       </p:sp>
       <p:sp>
         <p:nvSpPr>
@@ -5935,7 +5962,7 @@
           <a:bodyPr wrap="square" lIns="0" tIns="0" rIns="0" bIns="0" rtlCol="0" anchor="ctr"/>
           <a:lstStyle/>
           <a:p>
-            <a:pPr algn="ctr" indent="0" marL="0">
+            <a:pPr marL="0" indent="0" algn="ctr">
               <a:buNone/>
             </a:pPr>
             <a:r>
@@ -5974,6 +6001,13 @@
           </a:solidFill>
           <a:ln/>
         </p:spPr>
+        <p:txBody>
+          <a:bodyPr/>
+          <a:lstStyle/>
+          <a:p>
+            <a:endParaRPr lang="en-PH"/>
+          </a:p>
+        </p:txBody>
       </p:sp>
       <p:sp>
         <p:nvSpPr>
@@ -5996,7 +6030,7 @@
           <a:bodyPr wrap="square" lIns="0" tIns="0" rIns="0" bIns="0" rtlCol="0" anchor="ctr"/>
           <a:lstStyle/>
           <a:p>
-            <a:pPr indent="0" marL="0">
+            <a:pPr marL="0" indent="0">
               <a:buNone/>
             </a:pPr>
             <a:r>
@@ -6035,7 +6069,7 @@
           <a:bodyPr wrap="square" lIns="0" tIns="0" rIns="0" bIns="0" rtlCol="0" anchor="ctr"/>
           <a:lstStyle/>
           <a:p>
-            <a:pPr indent="0" marL="0">
+            <a:pPr marL="0" indent="0">
               <a:buNone/>
             </a:pPr>
             <a:r>
@@ -6074,6 +6108,13 @@
           </a:solidFill>
           <a:ln/>
         </p:spPr>
+        <p:txBody>
+          <a:bodyPr/>
+          <a:lstStyle/>
+          <a:p>
+            <a:endParaRPr lang="en-PH"/>
+          </a:p>
+        </p:txBody>
       </p:sp>
       <p:sp>
         <p:nvSpPr>
@@ -6096,7 +6137,7 @@
           <a:bodyPr wrap="square" lIns="0" tIns="0" rIns="0" bIns="0" rtlCol="0" anchor="ctr"/>
           <a:lstStyle/>
           <a:p>
-            <a:pPr algn="ctr" indent="0" marL="0">
+            <a:pPr marL="0" indent="0" algn="ctr">
               <a:buNone/>
             </a:pPr>
             <a:r>
@@ -6135,6 +6176,13 @@
           </a:solidFill>
           <a:ln/>
         </p:spPr>
+        <p:txBody>
+          <a:bodyPr/>
+          <a:lstStyle/>
+          <a:p>
+            <a:endParaRPr lang="en-PH"/>
+          </a:p>
+        </p:txBody>
       </p:sp>
       <p:sp>
         <p:nvSpPr>
@@ -6157,7 +6205,7 @@
           <a:bodyPr wrap="square" lIns="0" tIns="0" rIns="0" bIns="0" rtlCol="0" anchor="ctr"/>
           <a:lstStyle/>
           <a:p>
-            <a:pPr indent="0" marL="0">
+            <a:pPr marL="0" indent="0">
               <a:buNone/>
             </a:pPr>
             <a:r>
@@ -6196,7 +6244,7 @@
           <a:bodyPr wrap="square" lIns="0" tIns="0" rIns="0" bIns="0" rtlCol="0" anchor="ctr"/>
           <a:lstStyle/>
           <a:p>
-            <a:pPr indent="0" marL="0">
+            <a:pPr marL="0" indent="0">
               <a:buNone/>
             </a:pPr>
             <a:r>
@@ -6235,6 +6283,13 @@
           </a:solidFill>
           <a:ln/>
         </p:spPr>
+        <p:txBody>
+          <a:bodyPr/>
+          <a:lstStyle/>
+          <a:p>
+            <a:endParaRPr lang="en-PH"/>
+          </a:p>
+        </p:txBody>
       </p:sp>
       <p:sp>
         <p:nvSpPr>
@@ -6257,7 +6312,7 @@
           <a:bodyPr wrap="square" lIns="0" tIns="0" rIns="0" bIns="0" rtlCol="0" anchor="ctr"/>
           <a:lstStyle/>
           <a:p>
-            <a:pPr algn="ctr" indent="0" marL="0">
+            <a:pPr marL="0" indent="0" algn="ctr">
               <a:buNone/>
             </a:pPr>
             <a:r>
@@ -6296,7 +6351,7 @@
           <a:bodyPr wrap="square" lIns="0" tIns="0" rIns="0" bIns="0" rtlCol="0" anchor="ctr"/>
           <a:lstStyle/>
           <a:p>
-            <a:pPr algn="ctr" indent="0" marL="0">
+            <a:pPr marL="0" indent="0" algn="ctr">
               <a:buNone/>
             </a:pPr>
             <a:r>
@@ -6333,254 +6388,17 @@
           </a:solidFill>
           <a:ln/>
         </p:spPr>
+        <p:txBody>
+          <a:bodyPr/>
+          <a:lstStyle/>
+          <a:p>
+            <a:endParaRPr lang="en-PH"/>
+          </a:p>
+        </p:txBody>
       </p:sp>
       <p:pic>
         <p:nvPicPr>
-          <p:cNvPr id="33" name="Image 0" descr="preencoded.png">    </p:cNvPr>
-          <p:cNvPicPr>
-            <a:picLocks noChangeAspect="1"/>
-          </p:cNvPicPr>
-          <p:nvPr/>
-        </p:nvPicPr>
-        <p:blipFill>
-          <a:blip r:embed="rId1"/>
-          <a:stretch>
-            <a:fillRect/>
-          </a:stretch>
-        </p:blipFill>
-        <p:spPr>
-          <a:xfrm>
-            <a:off x="8101584" y="2523744"/>
-            <a:ext cx="347472" cy="347472"/>
-          </a:xfrm>
-          <a:prstGeom prst="rect">
-            <a:avLst/>
-          </a:prstGeom>
-        </p:spPr>
-      </p:pic>
-      <p:sp>
-        <p:nvSpPr>
-          <p:cNvPr id="34" name="Text 31"/>
-          <p:cNvSpPr/>
-          <p:nvPr/>
-        </p:nvSpPr>
-        <p:spPr>
-          <a:xfrm>
-            <a:off x="8732520" y="2359152"/>
-            <a:ext cx="3108960" cy="365760"/>
-          </a:xfrm>
-          <a:prstGeom prst="rect">
-            <a:avLst/>
-          </a:prstGeom>
-          <a:noFill/>
-          <a:ln/>
-        </p:spPr>
-        <p:txBody>
-          <a:bodyPr wrap="square" lIns="0" tIns="0" rIns="0" bIns="0" rtlCol="0" anchor="ctr"/>
-          <a:lstStyle/>
-          <a:p>
-            <a:pPr indent="0" marL="0">
-              <a:buNone/>
-            </a:pPr>
-            <a:r>
-              <a:rPr lang="en-US" sz="1500" b="1" dirty="0">
-                <a:solidFill>
-                  <a:srgbClr val="0A2E2B"/>
-                </a:solidFill>
-                <a:latin typeface="Trebuchet MS" pitchFamily="34" charset="0"/>
-                <a:ea typeface="Trebuchet MS" pitchFamily="34" charset="-122"/>
-                <a:cs typeface="Trebuchet MS" pitchFamily="34" charset="-120"/>
-              </a:rPr>
-              <a:t>AI-suggested replies</a:t>
-            </a:r>
-            <a:endParaRPr lang="en-US" sz="1500" dirty="0"/>
-          </a:p>
-        </p:txBody>
-      </p:sp>
-      <p:sp>
-        <p:nvSpPr>
-          <p:cNvPr id="35" name="Text 32"/>
-          <p:cNvSpPr/>
-          <p:nvPr/>
-        </p:nvSpPr>
-        <p:spPr>
-          <a:xfrm>
-            <a:off x="8732520" y="2724912"/>
-            <a:ext cx="3154680" cy="731520"/>
-          </a:xfrm>
-          <a:prstGeom prst="rect">
-            <a:avLst/>
-          </a:prstGeom>
-          <a:noFill/>
-          <a:ln/>
-        </p:spPr>
-        <p:txBody>
-          <a:bodyPr wrap="square" lIns="0" tIns="0" rIns="0" bIns="0" rtlCol="0" anchor="ctr"/>
-          <a:lstStyle/>
-          <a:p>
-            <a:pPr indent="0" marL="0">
-              <a:buNone/>
-            </a:pPr>
-            <a:r>
-              <a:rPr lang="en-US" sz="1200" dirty="0">
-                <a:solidFill>
-                  <a:srgbClr val="3C5A56"/>
-                </a:solidFill>
-                <a:latin typeface="Calibri" pitchFamily="34" charset="0"/>
-                <a:ea typeface="Calibri" pitchFamily="34" charset="-122"/>
-                <a:cs typeface="Calibri" pitchFamily="34" charset="-120"/>
-              </a:rPr>
-              <a:t>Each ticket arrives with a confidence score and an editable, one-click response.</a:t>
-            </a:r>
-            <a:endParaRPr lang="en-US" sz="1200" dirty="0"/>
-          </a:p>
-        </p:txBody>
-      </p:sp>
-      <p:sp>
-        <p:nvSpPr>
-          <p:cNvPr id="36" name="Shape 33"/>
-          <p:cNvSpPr/>
-          <p:nvPr/>
-        </p:nvSpPr>
-        <p:spPr>
-          <a:xfrm>
-            <a:off x="7955280" y="3611880"/>
-            <a:ext cx="640080" cy="640080"/>
-          </a:xfrm>
-          <a:prstGeom prst="ellipse">
-            <a:avLst/>
-          </a:prstGeom>
-          <a:solidFill>
-            <a:srgbClr val="F1F6F5"/>
-          </a:solidFill>
-          <a:ln/>
-        </p:spPr>
-      </p:sp>
-      <p:pic>
-        <p:nvPicPr>
-          <p:cNvPr id="37" name="Image 1" descr="preencoded.png">    </p:cNvPr>
-          <p:cNvPicPr>
-            <a:picLocks noChangeAspect="1"/>
-          </p:cNvPicPr>
-          <p:nvPr/>
-        </p:nvPicPr>
-        <p:blipFill>
-          <a:blip r:embed="rId2"/>
-          <a:stretch>
-            <a:fillRect/>
-          </a:stretch>
-        </p:blipFill>
-        <p:spPr>
-          <a:xfrm>
-            <a:off x="8101584" y="3758184"/>
-            <a:ext cx="347472" cy="347472"/>
-          </a:xfrm>
-          <a:prstGeom prst="rect">
-            <a:avLst/>
-          </a:prstGeom>
-        </p:spPr>
-      </p:pic>
-      <p:sp>
-        <p:nvSpPr>
-          <p:cNvPr id="38" name="Text 34"/>
-          <p:cNvSpPr/>
-          <p:nvPr/>
-        </p:nvSpPr>
-        <p:spPr>
-          <a:xfrm>
-            <a:off x="8732520" y="3593592"/>
-            <a:ext cx="3108960" cy="365760"/>
-          </a:xfrm>
-          <a:prstGeom prst="rect">
-            <a:avLst/>
-          </a:prstGeom>
-          <a:noFill/>
-          <a:ln/>
-        </p:spPr>
-        <p:txBody>
-          <a:bodyPr wrap="square" lIns="0" tIns="0" rIns="0" bIns="0" rtlCol="0" anchor="ctr"/>
-          <a:lstStyle/>
-          <a:p>
-            <a:pPr indent="0" marL="0">
-              <a:buNone/>
-            </a:pPr>
-            <a:r>
-              <a:rPr lang="en-US" sz="1500" b="1" dirty="0">
-                <a:solidFill>
-                  <a:srgbClr val="0A2E2B"/>
-                </a:solidFill>
-                <a:latin typeface="Trebuchet MS" pitchFamily="34" charset="0"/>
-                <a:ea typeface="Trebuchet MS" pitchFamily="34" charset="-122"/>
-                <a:cs typeface="Trebuchet MS" pitchFamily="34" charset="-120"/>
-              </a:rPr>
-              <a:t>Context-preserving handoff</a:t>
-            </a:r>
-            <a:endParaRPr lang="en-US" sz="1500" dirty="0"/>
-          </a:p>
-        </p:txBody>
-      </p:sp>
-      <p:sp>
-        <p:nvSpPr>
-          <p:cNvPr id="39" name="Text 35"/>
-          <p:cNvSpPr/>
-          <p:nvPr/>
-        </p:nvSpPr>
-        <p:spPr>
-          <a:xfrm>
-            <a:off x="8732520" y="3959352"/>
-            <a:ext cx="3154680" cy="731520"/>
-          </a:xfrm>
-          <a:prstGeom prst="rect">
-            <a:avLst/>
-          </a:prstGeom>
-          <a:noFill/>
-          <a:ln/>
-        </p:spPr>
-        <p:txBody>
-          <a:bodyPr wrap="square" lIns="0" tIns="0" rIns="0" bIns="0" rtlCol="0" anchor="ctr"/>
-          <a:lstStyle/>
-          <a:p>
-            <a:pPr indent="0" marL="0">
-              <a:buNone/>
-            </a:pPr>
-            <a:r>
-              <a:rPr lang="en-US" sz="1200" dirty="0">
-                <a:solidFill>
-                  <a:srgbClr val="3C5A56"/>
-                </a:solidFill>
-                <a:latin typeface="Calibri" pitchFamily="34" charset="0"/>
-                <a:ea typeface="Calibri" pitchFamily="34" charset="-122"/>
-                <a:cs typeface="Calibri" pitchFamily="34" charset="-120"/>
-              </a:rPr>
-              <a:t>The student never repeats their story — the full packet travels with the ticket.</a:t>
-            </a:r>
-            <a:endParaRPr lang="en-US" sz="1200" dirty="0"/>
-          </a:p>
-        </p:txBody>
-      </p:sp>
-      <p:sp>
-        <p:nvSpPr>
-          <p:cNvPr id="40" name="Shape 36"/>
-          <p:cNvSpPr/>
-          <p:nvPr/>
-        </p:nvSpPr>
-        <p:spPr>
-          <a:xfrm>
-            <a:off x="7955280" y="4846320"/>
-            <a:ext cx="640080" cy="640080"/>
-          </a:xfrm>
-          <a:prstGeom prst="ellipse">
-            <a:avLst/>
-          </a:prstGeom>
-          <a:solidFill>
-            <a:srgbClr val="F1F6F5"/>
-          </a:solidFill>
-          <a:ln/>
-        </p:spPr>
-      </p:sp>
-      <p:pic>
-        <p:nvPicPr>
-          <p:cNvPr id="41" name="Image 2" descr="preencoded.png">    </p:cNvPr>
+          <p:cNvPr id="33" name="Image 0" descr="preencoded.png"/>
           <p:cNvPicPr>
             <a:picLocks noChangeAspect="1"/>
           </p:cNvPicPr>
@@ -6594,7 +6412,7 @@
         </p:blipFill>
         <p:spPr>
           <a:xfrm>
-            <a:off x="8101584" y="4992624"/>
+            <a:off x="8101584" y="2523744"/>
             <a:ext cx="347472" cy="347472"/>
           </a:xfrm>
           <a:prstGeom prst="rect">
@@ -6604,13 +6422,13 @@
       </p:pic>
       <p:sp>
         <p:nvSpPr>
-          <p:cNvPr id="42" name="Text 37"/>
-          <p:cNvSpPr/>
-          <p:nvPr/>
-        </p:nvSpPr>
-        <p:spPr>
-          <a:xfrm>
-            <a:off x="8732520" y="4828032"/>
+          <p:cNvPr id="34" name="Text 31"/>
+          <p:cNvSpPr/>
+          <p:nvPr/>
+        </p:nvSpPr>
+        <p:spPr>
+          <a:xfrm>
+            <a:off x="8732520" y="2359152"/>
             <a:ext cx="3108960" cy="365760"/>
           </a:xfrm>
           <a:prstGeom prst="rect">
@@ -6623,7 +6441,7 @@
           <a:bodyPr wrap="square" lIns="0" tIns="0" rIns="0" bIns="0" rtlCol="0" anchor="ctr"/>
           <a:lstStyle/>
           <a:p>
-            <a:pPr indent="0" marL="0">
+            <a:pPr marL="0" indent="0">
               <a:buNone/>
             </a:pPr>
             <a:r>
@@ -6635,7 +6453,7 @@
                 <a:ea typeface="Trebuchet MS" pitchFamily="34" charset="-122"/>
                 <a:cs typeface="Trebuchet MS" pitchFamily="34" charset="-120"/>
               </a:rPr>
-              <a:t>Admin analytics</a:t>
+              <a:t>AI-suggested replies</a:t>
             </a:r>
             <a:endParaRPr lang="en-US" sz="1500" dirty="0"/>
           </a:p>
@@ -6643,13 +6461,13 @@
       </p:sp>
       <p:sp>
         <p:nvSpPr>
-          <p:cNvPr id="43" name="Text 38"/>
-          <p:cNvSpPr/>
-          <p:nvPr/>
-        </p:nvSpPr>
-        <p:spPr>
-          <a:xfrm>
-            <a:off x="8732520" y="5193792"/>
+          <p:cNvPr id="35" name="Text 32"/>
+          <p:cNvSpPr/>
+          <p:nvPr/>
+        </p:nvSpPr>
+        <p:spPr>
+          <a:xfrm>
+            <a:off x="8732520" y="2724912"/>
             <a:ext cx="3154680" cy="731520"/>
           </a:xfrm>
           <a:prstGeom prst="rect">
@@ -6662,7 +6480,7 @@
           <a:bodyPr wrap="square" lIns="0" tIns="0" rIns="0" bIns="0" rtlCol="0" anchor="ctr"/>
           <a:lstStyle/>
           <a:p>
-            <a:pPr indent="0" marL="0">
+            <a:pPr marL="0" indent="0">
               <a:buNone/>
             </a:pPr>
             <a:r>
@@ -6674,7 +6492,7 @@
                 <a:ea typeface="Calibri" pitchFamily="34" charset="-122"/>
                 <a:cs typeface="Calibri" pitchFamily="34" charset="-120"/>
               </a:rPr>
-              <a:t>Cost-per-ticket, deflection rate, and CSAT — the numbers leaders ask for.</a:t>
+              <a:t>Each ticket arrives with a confidence score and an editable, one-click response.</a:t>
             </a:r>
             <a:endParaRPr lang="en-US" sz="1200" dirty="0"/>
           </a:p>
@@ -6682,30 +6500,81 @@
       </p:sp>
       <p:sp>
         <p:nvSpPr>
-          <p:cNvPr id="44" name="Text 39"/>
-          <p:cNvSpPr/>
-          <p:nvPr/>
-        </p:nvSpPr>
-        <p:spPr>
-          <a:xfrm>
-            <a:off x="502920" y="6400800"/>
-            <a:ext cx="5486400" cy="274320"/>
-          </a:xfrm>
-          <a:prstGeom prst="rect">
-            <a:avLst/>
-          </a:prstGeom>
-          <a:noFill/>
-          <a:ln/>
-        </p:spPr>
-        <p:txBody>
-          <a:bodyPr wrap="square" lIns="0" tIns="0" rIns="0" bIns="0" rtlCol="0" anchor="ctr"/>
-          <a:lstStyle/>
-          <a:p>
-            <a:pPr indent="0" marL="0">
-              <a:buNone/>
-            </a:pPr>
-            <a:r>
-              <a:rPr lang="en-US" sz="950" b="1" spc="100" kern="0" dirty="0">
+          <p:cNvPr id="36" name="Shape 33"/>
+          <p:cNvSpPr/>
+          <p:nvPr/>
+        </p:nvSpPr>
+        <p:spPr>
+          <a:xfrm>
+            <a:off x="7955280" y="3611880"/>
+            <a:ext cx="640080" cy="640080"/>
+          </a:xfrm>
+          <a:prstGeom prst="ellipse">
+            <a:avLst/>
+          </a:prstGeom>
+          <a:solidFill>
+            <a:srgbClr val="F1F6F5"/>
+          </a:solidFill>
+          <a:ln/>
+        </p:spPr>
+        <p:txBody>
+          <a:bodyPr/>
+          <a:lstStyle/>
+          <a:p>
+            <a:endParaRPr lang="en-PH"/>
+          </a:p>
+        </p:txBody>
+      </p:sp>
+      <p:pic>
+        <p:nvPicPr>
+          <p:cNvPr id="37" name="Image 1" descr="preencoded.png"/>
+          <p:cNvPicPr>
+            <a:picLocks noChangeAspect="1"/>
+          </p:cNvPicPr>
+          <p:nvPr/>
+        </p:nvPicPr>
+        <p:blipFill>
+          <a:blip r:embed="rId4"/>
+          <a:stretch>
+            <a:fillRect/>
+          </a:stretch>
+        </p:blipFill>
+        <p:spPr>
+          <a:xfrm>
+            <a:off x="8101584" y="3758184"/>
+            <a:ext cx="347472" cy="347472"/>
+          </a:xfrm>
+          <a:prstGeom prst="rect">
+            <a:avLst/>
+          </a:prstGeom>
+        </p:spPr>
+      </p:pic>
+      <p:sp>
+        <p:nvSpPr>
+          <p:cNvPr id="38" name="Text 34"/>
+          <p:cNvSpPr/>
+          <p:nvPr/>
+        </p:nvSpPr>
+        <p:spPr>
+          <a:xfrm>
+            <a:off x="8732520" y="3593592"/>
+            <a:ext cx="3108960" cy="365760"/>
+          </a:xfrm>
+          <a:prstGeom prst="rect">
+            <a:avLst/>
+          </a:prstGeom>
+          <a:noFill/>
+          <a:ln/>
+        </p:spPr>
+        <p:txBody>
+          <a:bodyPr wrap="square" lIns="0" tIns="0" rIns="0" bIns="0" rtlCol="0" anchor="ctr"/>
+          <a:lstStyle/>
+          <a:p>
+            <a:pPr marL="0" indent="0">
+              <a:buNone/>
+            </a:pPr>
+            <a:r>
+              <a:rPr lang="en-US" sz="1500" b="1" dirty="0">
                 <a:solidFill>
                   <a:srgbClr val="0A2E2B"/>
                 </a:solidFill>
@@ -6713,20 +6582,224 @@
                 <a:ea typeface="Trebuchet MS" pitchFamily="34" charset="-122"/>
                 <a:cs typeface="Trebuchet MS" pitchFamily="34" charset="-120"/>
               </a:rPr>
-              <a:t>ARCHON</a:t>
-            </a:r>
-            <a:pPr indent="0" marL="0">
-              <a:buNone/>
-            </a:pPr>
-            <a:r>
-              <a:rPr lang="en-US" sz="950" spc="100" kern="0" dirty="0">
-                <a:solidFill>
-                  <a:srgbClr val="7C938E"/>
+              <a:t>Context-preserving handoff</a:t>
+            </a:r>
+            <a:endParaRPr lang="en-US" sz="1500" dirty="0"/>
+          </a:p>
+        </p:txBody>
+      </p:sp>
+      <p:sp>
+        <p:nvSpPr>
+          <p:cNvPr id="39" name="Text 35"/>
+          <p:cNvSpPr/>
+          <p:nvPr/>
+        </p:nvSpPr>
+        <p:spPr>
+          <a:xfrm>
+            <a:off x="8732520" y="3959352"/>
+            <a:ext cx="3154680" cy="731520"/>
+          </a:xfrm>
+          <a:prstGeom prst="rect">
+            <a:avLst/>
+          </a:prstGeom>
+          <a:noFill/>
+          <a:ln/>
+        </p:spPr>
+        <p:txBody>
+          <a:bodyPr wrap="square" lIns="0" tIns="0" rIns="0" bIns="0" rtlCol="0" anchor="ctr"/>
+          <a:lstStyle/>
+          <a:p>
+            <a:pPr marL="0" indent="0">
+              <a:buNone/>
+            </a:pPr>
+            <a:r>
+              <a:rPr lang="en-US" sz="1200" dirty="0">
+                <a:solidFill>
+                  <a:srgbClr val="3C5A56"/>
+                </a:solidFill>
+                <a:latin typeface="Calibri" pitchFamily="34" charset="0"/>
+                <a:ea typeface="Calibri" pitchFamily="34" charset="-122"/>
+                <a:cs typeface="Calibri" pitchFamily="34" charset="-120"/>
+              </a:rPr>
+              <a:t>The student never repeats their story — the full packet travels with the ticket.</a:t>
+            </a:r>
+            <a:endParaRPr lang="en-US" sz="1200" dirty="0"/>
+          </a:p>
+        </p:txBody>
+      </p:sp>
+      <p:sp>
+        <p:nvSpPr>
+          <p:cNvPr id="40" name="Shape 36"/>
+          <p:cNvSpPr/>
+          <p:nvPr/>
+        </p:nvSpPr>
+        <p:spPr>
+          <a:xfrm>
+            <a:off x="7955280" y="4846320"/>
+            <a:ext cx="640080" cy="640080"/>
+          </a:xfrm>
+          <a:prstGeom prst="ellipse">
+            <a:avLst/>
+          </a:prstGeom>
+          <a:solidFill>
+            <a:srgbClr val="F1F6F5"/>
+          </a:solidFill>
+          <a:ln/>
+        </p:spPr>
+        <p:txBody>
+          <a:bodyPr/>
+          <a:lstStyle/>
+          <a:p>
+            <a:endParaRPr lang="en-PH"/>
+          </a:p>
+        </p:txBody>
+      </p:sp>
+      <p:pic>
+        <p:nvPicPr>
+          <p:cNvPr id="41" name="Image 2" descr="preencoded.png"/>
+          <p:cNvPicPr>
+            <a:picLocks noChangeAspect="1"/>
+          </p:cNvPicPr>
+          <p:nvPr/>
+        </p:nvPicPr>
+        <p:blipFill>
+          <a:blip r:embed="rId5"/>
+          <a:stretch>
+            <a:fillRect/>
+          </a:stretch>
+        </p:blipFill>
+        <p:spPr>
+          <a:xfrm>
+            <a:off x="8101584" y="4992624"/>
+            <a:ext cx="347472" cy="347472"/>
+          </a:xfrm>
+          <a:prstGeom prst="rect">
+            <a:avLst/>
+          </a:prstGeom>
+        </p:spPr>
+      </p:pic>
+      <p:sp>
+        <p:nvSpPr>
+          <p:cNvPr id="42" name="Text 37"/>
+          <p:cNvSpPr/>
+          <p:nvPr/>
+        </p:nvSpPr>
+        <p:spPr>
+          <a:xfrm>
+            <a:off x="8732520" y="4828032"/>
+            <a:ext cx="3108960" cy="365760"/>
+          </a:xfrm>
+          <a:prstGeom prst="rect">
+            <a:avLst/>
+          </a:prstGeom>
+          <a:noFill/>
+          <a:ln/>
+        </p:spPr>
+        <p:txBody>
+          <a:bodyPr wrap="square" lIns="0" tIns="0" rIns="0" bIns="0" rtlCol="0" anchor="ctr"/>
+          <a:lstStyle/>
+          <a:p>
+            <a:pPr marL="0" indent="0">
+              <a:buNone/>
+            </a:pPr>
+            <a:r>
+              <a:rPr lang="en-US" sz="1500" b="1" dirty="0">
+                <a:solidFill>
+                  <a:srgbClr val="0A2E2B"/>
                 </a:solidFill>
                 <a:latin typeface="Trebuchet MS" pitchFamily="34" charset="0"/>
                 <a:ea typeface="Trebuchet MS" pitchFamily="34" charset="-122"/>
                 <a:cs typeface="Trebuchet MS" pitchFamily="34" charset="-120"/>
               </a:rPr>
+              <a:t>Admin analytics</a:t>
+            </a:r>
+            <a:endParaRPr lang="en-US" sz="1500" dirty="0"/>
+          </a:p>
+        </p:txBody>
+      </p:sp>
+      <p:sp>
+        <p:nvSpPr>
+          <p:cNvPr id="43" name="Text 38"/>
+          <p:cNvSpPr/>
+          <p:nvPr/>
+        </p:nvSpPr>
+        <p:spPr>
+          <a:xfrm>
+            <a:off x="8732520" y="5193792"/>
+            <a:ext cx="3154680" cy="731520"/>
+          </a:xfrm>
+          <a:prstGeom prst="rect">
+            <a:avLst/>
+          </a:prstGeom>
+          <a:noFill/>
+          <a:ln/>
+        </p:spPr>
+        <p:txBody>
+          <a:bodyPr wrap="square" lIns="0" tIns="0" rIns="0" bIns="0" rtlCol="0" anchor="ctr"/>
+          <a:lstStyle/>
+          <a:p>
+            <a:pPr marL="0" indent="0">
+              <a:buNone/>
+            </a:pPr>
+            <a:r>
+              <a:rPr lang="en-US" sz="1200" dirty="0">
+                <a:solidFill>
+                  <a:srgbClr val="3C5A56"/>
+                </a:solidFill>
+                <a:latin typeface="Calibri" pitchFamily="34" charset="0"/>
+                <a:ea typeface="Calibri" pitchFamily="34" charset="-122"/>
+                <a:cs typeface="Calibri" pitchFamily="34" charset="-120"/>
+              </a:rPr>
+              <a:t>Cost-per-ticket, deflection rate, and CSAT — the numbers leaders ask for.</a:t>
+            </a:r>
+            <a:endParaRPr lang="en-US" sz="1200" dirty="0"/>
+          </a:p>
+        </p:txBody>
+      </p:sp>
+      <p:sp>
+        <p:nvSpPr>
+          <p:cNvPr id="44" name="Text 39"/>
+          <p:cNvSpPr/>
+          <p:nvPr/>
+        </p:nvSpPr>
+        <p:spPr>
+          <a:xfrm>
+            <a:off x="502920" y="6400800"/>
+            <a:ext cx="5486400" cy="274320"/>
+          </a:xfrm>
+          <a:prstGeom prst="rect">
+            <a:avLst/>
+          </a:prstGeom>
+          <a:noFill/>
+          <a:ln/>
+        </p:spPr>
+        <p:txBody>
+          <a:bodyPr wrap="square" lIns="0" tIns="0" rIns="0" bIns="0" rtlCol="0" anchor="ctr"/>
+          <a:lstStyle/>
+          <a:p>
+            <a:pPr marL="0" indent="0">
+              <a:buNone/>
+            </a:pPr>
+            <a:r>
+              <a:rPr lang="en-US" sz="950" b="1" kern="0" spc="100" dirty="0">
+                <a:solidFill>
+                  <a:srgbClr val="0A2E2B"/>
+                </a:solidFill>
+                <a:latin typeface="Trebuchet MS" pitchFamily="34" charset="0"/>
+                <a:ea typeface="Trebuchet MS" pitchFamily="34" charset="-122"/>
+                <a:cs typeface="Trebuchet MS" pitchFamily="34" charset="-120"/>
+              </a:rPr>
+              <a:t>ARCHON</a:t>
+            </a:r>
+            <a:r>
+              <a:rPr lang="en-US" sz="950" kern="0" spc="100" dirty="0">
+                <a:solidFill>
+                  <a:srgbClr val="7C938E"/>
+                </a:solidFill>
+                <a:latin typeface="Trebuchet MS" pitchFamily="34" charset="0"/>
+                <a:ea typeface="Trebuchet MS" pitchFamily="34" charset="-122"/>
+                <a:cs typeface="Trebuchet MS" pitchFamily="34" charset="-120"/>
+              </a:rPr>
               <a:t>   ·   Axon Enjin</a:t>
             </a:r>
             <a:endParaRPr lang="en-US" sz="950" dirty="0"/>
@@ -6754,7 +6827,7 @@
           <a:bodyPr wrap="square" lIns="0" tIns="0" rIns="0" bIns="0" rtlCol="0" anchor="ctr"/>
           <a:lstStyle/>
           <a:p>
-            <a:pPr algn="r" indent="0" marL="0">
+            <a:pPr marL="0" indent="0" algn="r">
               <a:buNone/>
             </a:pPr>
             <a:r>
@@ -6788,6 +6861,7 @@
         <a:solidFill>
           <a:srgbClr val="FFFFFF"/>
         </a:solidFill>
+        <a:effectLst/>
       </p:bgPr>
     </p:bg>
     <p:spTree>
@@ -6825,11 +6899,11 @@
           <a:bodyPr wrap="square" lIns="0" tIns="0" rIns="0" bIns="0" rtlCol="0" anchor="ctr"/>
           <a:lstStyle/>
           <a:p>
-            <a:pPr indent="0" marL="0">
-              <a:buNone/>
-            </a:pPr>
-            <a:r>
-              <a:rPr lang="en-US" sz="1250" b="1" spc="200" kern="0" dirty="0">
+            <a:pPr marL="0" indent="0">
+              <a:buNone/>
+            </a:pPr>
+            <a:r>
+              <a:rPr lang="en-US" sz="1250" b="1" kern="0" spc="200" dirty="0">
                 <a:solidFill>
                   <a:srgbClr val="1F8A7D"/>
                 </a:solidFill>
@@ -6864,7 +6938,7 @@
           <a:bodyPr wrap="square" lIns="0" tIns="0" rIns="0" bIns="0" rtlCol="0" anchor="ctr"/>
           <a:lstStyle/>
           <a:p>
-            <a:pPr indent="0" marL="0">
+            <a:pPr marL="0" indent="0">
               <a:buNone/>
             </a:pPr>
             <a:r>
@@ -6879,67 +6953,6 @@
               <a:t>From question to resolution — autonomously.</a:t>
             </a:r>
             <a:endParaRPr lang="en-US" sz="3300" dirty="0"/>
-          </a:p>
-        </p:txBody>
-      </p:sp>
-      <p:sp>
-        <p:nvSpPr>
-          <p:cNvPr id="4" name="Shape 2"/>
-          <p:cNvSpPr/>
-          <p:nvPr/>
-        </p:nvSpPr>
-        <p:spPr>
-          <a:xfrm>
-            <a:off x="548640" y="1664208"/>
-            <a:ext cx="3931920" cy="310896"/>
-          </a:xfrm>
-          <a:prstGeom prst="roundRect">
-            <a:avLst>
-              <a:gd name="adj" fmla="val 50000"/>
-            </a:avLst>
-          </a:prstGeom>
-          <a:solidFill>
-            <a:srgbClr val="1F8A7D"/>
-          </a:solidFill>
-          <a:ln/>
-        </p:spPr>
-      </p:sp>
-      <p:sp>
-        <p:nvSpPr>
-          <p:cNvPr id="5" name="Text 3"/>
-          <p:cNvSpPr/>
-          <p:nvPr/>
-        </p:nvSpPr>
-        <p:spPr>
-          <a:xfrm>
-            <a:off x="548640" y="1664208"/>
-            <a:ext cx="3931920" cy="310896"/>
-          </a:xfrm>
-          <a:prstGeom prst="rect">
-            <a:avLst/>
-          </a:prstGeom>
-          <a:noFill/>
-          <a:ln/>
-        </p:spPr>
-        <p:txBody>
-          <a:bodyPr wrap="square" lIns="0" tIns="0" rIns="0" bIns="0" rtlCol="0" anchor="ctr"/>
-          <a:lstStyle/>
-          <a:p>
-            <a:pPr algn="ctr" indent="0" marL="0">
-              <a:buNone/>
-            </a:pPr>
-            <a:r>
-              <a:rPr lang="en-US" sz="1050" b="1" spc="100" kern="0" dirty="0">
-                <a:solidFill>
-                  <a:srgbClr val="FFFFFF"/>
-                </a:solidFill>
-                <a:latin typeface="Trebuchet MS" pitchFamily="34" charset="0"/>
-                <a:ea typeface="Trebuchet MS" pitchFamily="34" charset="-122"/>
-                <a:cs typeface="Trebuchet MS" pitchFamily="34" charset="-120"/>
-              </a:rPr>
-              <a:t>SCORED: FUNCTIONALITY &amp; USER EXPERIENCE — 20%</a:t>
-            </a:r>
-            <a:endParaRPr lang="en-US" sz="1050" dirty="0"/>
           </a:p>
         </p:txBody>
       </p:sp>
@@ -6964,6 +6977,13 @@
           </a:solidFill>
           <a:ln/>
         </p:spPr>
+        <p:txBody>
+          <a:bodyPr/>
+          <a:lstStyle/>
+          <a:p>
+            <a:endParaRPr lang="en-PH"/>
+          </a:p>
+        </p:txBody>
       </p:sp>
       <p:sp>
         <p:nvSpPr>
@@ -6984,178 +7004,17 @@
           </a:solidFill>
           <a:ln/>
         </p:spPr>
+        <p:txBody>
+          <a:bodyPr/>
+          <a:lstStyle/>
+          <a:p>
+            <a:endParaRPr lang="en-PH"/>
+          </a:p>
+        </p:txBody>
       </p:sp>
       <p:pic>
         <p:nvPicPr>
-          <p:cNvPr id="8" name="Image 0" descr="preencoded.png">    </p:cNvPr>
-          <p:cNvPicPr>
-            <a:picLocks noChangeAspect="1"/>
-          </p:cNvPicPr>
-          <p:nvPr/>
-        </p:nvPicPr>
-        <p:blipFill>
-          <a:blip r:embed="rId1"/>
-          <a:stretch>
-            <a:fillRect/>
-          </a:stretch>
-        </p:blipFill>
-        <p:spPr>
-          <a:xfrm>
-            <a:off x="1801368" y="2852928"/>
-            <a:ext cx="329184" cy="329184"/>
-          </a:xfrm>
-          <a:prstGeom prst="rect">
-            <a:avLst/>
-          </a:prstGeom>
-        </p:spPr>
-      </p:pic>
-      <p:sp>
-        <p:nvSpPr>
-          <p:cNvPr id="9" name="Text 6"/>
-          <p:cNvSpPr/>
-          <p:nvPr/>
-        </p:nvSpPr>
-        <p:spPr>
-          <a:xfrm>
-            <a:off x="914400" y="3474720"/>
-            <a:ext cx="2103120" cy="365760"/>
-          </a:xfrm>
-          <a:prstGeom prst="rect">
-            <a:avLst/>
-          </a:prstGeom>
-          <a:noFill/>
-          <a:ln/>
-        </p:spPr>
-        <p:txBody>
-          <a:bodyPr wrap="square" lIns="0" tIns="0" rIns="0" bIns="0" rtlCol="0" anchor="ctr"/>
-          <a:lstStyle/>
-          <a:p>
-            <a:pPr algn="ctr" indent="0" marL="0">
-              <a:buNone/>
-            </a:pPr>
-            <a:r>
-              <a:rPr lang="en-US" sz="1500" b="1" dirty="0">
-                <a:solidFill>
-                  <a:srgbClr val="0A2E2B"/>
-                </a:solidFill>
-                <a:latin typeface="Trebuchet MS" pitchFamily="34" charset="0"/>
-                <a:ea typeface="Trebuchet MS" pitchFamily="34" charset="-122"/>
-                <a:cs typeface="Trebuchet MS" pitchFamily="34" charset="-120"/>
-              </a:rPr>
-              <a:t>1 · Ask</a:t>
-            </a:r>
-            <a:endParaRPr lang="en-US" sz="1500" dirty="0"/>
-          </a:p>
-        </p:txBody>
-      </p:sp>
-      <p:sp>
-        <p:nvSpPr>
-          <p:cNvPr id="10" name="Text 7"/>
-          <p:cNvSpPr/>
-          <p:nvPr/>
-        </p:nvSpPr>
-        <p:spPr>
-          <a:xfrm>
-            <a:off x="960120" y="3840480"/>
-            <a:ext cx="2011680" cy="685800"/>
-          </a:xfrm>
-          <a:prstGeom prst="rect">
-            <a:avLst/>
-          </a:prstGeom>
-          <a:noFill/>
-          <a:ln/>
-        </p:spPr>
-        <p:txBody>
-          <a:bodyPr wrap="square" lIns="0" tIns="0" rIns="0" bIns="0" rtlCol="0" anchor="ctr"/>
-          <a:lstStyle/>
-          <a:p>
-            <a:pPr algn="ctr" indent="0" marL="0">
-              <a:buNone/>
-            </a:pPr>
-            <a:r>
-              <a:rPr lang="en-US" sz="1150" dirty="0">
-                <a:solidFill>
-                  <a:srgbClr val="3C5A56"/>
-                </a:solidFill>
-                <a:latin typeface="Calibri" pitchFamily="34" charset="0"/>
-                <a:ea typeface="Calibri" pitchFamily="34" charset="-122"/>
-                <a:cs typeface="Calibri" pitchFamily="34" charset="-120"/>
-              </a:rPr>
-              <a:t>Student types in Filipino, English, or Cebuano.</a:t>
-            </a:r>
-            <a:endParaRPr lang="en-US" sz="1150" dirty="0"/>
-          </a:p>
-        </p:txBody>
-      </p:sp>
-      <p:pic>
-        <p:nvPicPr>
-          <p:cNvPr id="11" name="Image 1" descr="preencoded.png">    </p:cNvPr>
-          <p:cNvPicPr>
-            <a:picLocks noChangeAspect="1"/>
-          </p:cNvPicPr>
-          <p:nvPr/>
-        </p:nvPicPr>
-        <p:blipFill>
-          <a:blip r:embed="rId2"/>
-          <a:stretch>
-            <a:fillRect/>
-          </a:stretch>
-        </p:blipFill>
-        <p:spPr>
-          <a:xfrm>
-            <a:off x="3209544" y="3401568"/>
-            <a:ext cx="310896" cy="310896"/>
-          </a:xfrm>
-          <a:prstGeom prst="rect">
-            <a:avLst/>
-          </a:prstGeom>
-        </p:spPr>
-      </p:pic>
-      <p:sp>
-        <p:nvSpPr>
-          <p:cNvPr id="12" name="Shape 8"/>
-          <p:cNvSpPr/>
-          <p:nvPr/>
-        </p:nvSpPr>
-        <p:spPr>
-          <a:xfrm>
-            <a:off x="3566160" y="2468880"/>
-            <a:ext cx="2377440" cy="2103120"/>
-          </a:xfrm>
-          <a:prstGeom prst="roundRect">
-            <a:avLst>
-              <a:gd name="adj" fmla="val 4348"/>
-            </a:avLst>
-          </a:prstGeom>
-          <a:solidFill>
-            <a:srgbClr val="F1F6F5"/>
-          </a:solidFill>
-          <a:ln/>
-        </p:spPr>
-      </p:sp>
-      <p:sp>
-        <p:nvSpPr>
-          <p:cNvPr id="13" name="Shape 9"/>
-          <p:cNvSpPr/>
-          <p:nvPr/>
-        </p:nvSpPr>
-        <p:spPr>
-          <a:xfrm>
-            <a:off x="4434840" y="2697480"/>
-            <a:ext cx="640080" cy="640080"/>
-          </a:xfrm>
-          <a:prstGeom prst="ellipse">
-            <a:avLst/>
-          </a:prstGeom>
-          <a:solidFill>
-            <a:srgbClr val="1F8A7D"/>
-          </a:solidFill>
-          <a:ln/>
-        </p:spPr>
-      </p:sp>
-      <p:pic>
-        <p:nvPicPr>
-          <p:cNvPr id="14" name="Image 2" descr="preencoded.png">    </p:cNvPr>
+          <p:cNvPr id="8" name="Image 0" descr="preencoded.png"/>
           <p:cNvPicPr>
             <a:picLocks noChangeAspect="1"/>
           </p:cNvPicPr>
@@ -7169,7 +7028,7 @@
         </p:blipFill>
         <p:spPr>
           <a:xfrm>
-            <a:off x="4590288" y="2852928"/>
+            <a:off x="1801368" y="2852928"/>
             <a:ext cx="329184" cy="329184"/>
           </a:xfrm>
           <a:prstGeom prst="rect">
@@ -7179,13 +7038,13 @@
       </p:pic>
       <p:sp>
         <p:nvSpPr>
-          <p:cNvPr id="15" name="Text 10"/>
-          <p:cNvSpPr/>
-          <p:nvPr/>
-        </p:nvSpPr>
-        <p:spPr>
-          <a:xfrm>
-            <a:off x="3703320" y="3474720"/>
+          <p:cNvPr id="9" name="Text 6"/>
+          <p:cNvSpPr/>
+          <p:nvPr/>
+        </p:nvSpPr>
+        <p:spPr>
+          <a:xfrm>
+            <a:off x="914400" y="3474720"/>
             <a:ext cx="2103120" cy="365760"/>
           </a:xfrm>
           <a:prstGeom prst="rect">
@@ -7198,7 +7057,7 @@
           <a:bodyPr wrap="square" lIns="0" tIns="0" rIns="0" bIns="0" rtlCol="0" anchor="ctr"/>
           <a:lstStyle/>
           <a:p>
-            <a:pPr algn="ctr" indent="0" marL="0">
+            <a:pPr marL="0" indent="0" algn="ctr">
               <a:buNone/>
             </a:pPr>
             <a:r>
@@ -7210,7 +7069,7 @@
                 <a:ea typeface="Trebuchet MS" pitchFamily="34" charset="-122"/>
                 <a:cs typeface="Trebuchet MS" pitchFamily="34" charset="-120"/>
               </a:rPr>
-              <a:t>2 · Orchestrate</a:t>
+              <a:t>1 · Ask</a:t>
             </a:r>
             <a:endParaRPr lang="en-US" sz="1500" dirty="0"/>
           </a:p>
@@ -7218,13 +7077,13 @@
       </p:sp>
       <p:sp>
         <p:nvSpPr>
-          <p:cNvPr id="16" name="Text 11"/>
-          <p:cNvSpPr/>
-          <p:nvPr/>
-        </p:nvSpPr>
-        <p:spPr>
-          <a:xfrm>
-            <a:off x="3749040" y="3840480"/>
+          <p:cNvPr id="10" name="Text 7"/>
+          <p:cNvSpPr/>
+          <p:nvPr/>
+        </p:nvSpPr>
+        <p:spPr>
+          <a:xfrm>
+            <a:off x="960120" y="3840480"/>
             <a:ext cx="2011680" cy="685800"/>
           </a:xfrm>
           <a:prstGeom prst="rect">
@@ -7237,7 +7096,7 @@
           <a:bodyPr wrap="square" lIns="0" tIns="0" rIns="0" bIns="0" rtlCol="0" anchor="ctr"/>
           <a:lstStyle/>
           <a:p>
-            <a:pPr algn="ctr" indent="0" marL="0">
+            <a:pPr marL="0" indent="0" algn="ctr">
               <a:buNone/>
             </a:pPr>
             <a:r>
@@ -7249,7 +7108,7 @@
                 <a:ea typeface="Calibri" pitchFamily="34" charset="-122"/>
                 <a:cs typeface="Calibri" pitchFamily="34" charset="-120"/>
               </a:rPr>
-              <a:t>Azure AI Foundry plans which systems to query.</a:t>
+              <a:t>Student types in Filipino, English, or Cebuano.</a:t>
             </a:r>
             <a:endParaRPr lang="en-US" sz="1150" dirty="0"/>
           </a:p>
@@ -7257,7 +7116,7 @@
       </p:sp>
       <p:pic>
         <p:nvPicPr>
-          <p:cNvPr id="17" name="Image 3" descr="preencoded.png">    </p:cNvPr>
+          <p:cNvPr id="11" name="Image 1" descr="preencoded.png"/>
           <p:cNvPicPr>
             <a:picLocks noChangeAspect="1"/>
           </p:cNvPicPr>
@@ -7271,7 +7130,7 @@
         </p:blipFill>
         <p:spPr>
           <a:xfrm>
-            <a:off x="5998464" y="3401568"/>
+            <a:off x="3209544" y="3401568"/>
             <a:ext cx="310896" cy="310896"/>
           </a:xfrm>
           <a:prstGeom prst="rect">
@@ -7281,13 +7140,13 @@
       </p:pic>
       <p:sp>
         <p:nvSpPr>
-          <p:cNvPr id="18" name="Shape 12"/>
-          <p:cNvSpPr/>
-          <p:nvPr/>
-        </p:nvSpPr>
-        <p:spPr>
-          <a:xfrm>
-            <a:off x="6355080" y="2468880"/>
+          <p:cNvPr id="12" name="Shape 8"/>
+          <p:cNvSpPr/>
+          <p:nvPr/>
+        </p:nvSpPr>
+        <p:spPr>
+          <a:xfrm>
+            <a:off x="3566160" y="2468880"/>
             <a:ext cx="2377440" cy="2103120"/>
           </a:xfrm>
           <a:prstGeom prst="roundRect">
@@ -7300,16 +7159,23 @@
           </a:solidFill>
           <a:ln/>
         </p:spPr>
-      </p:sp>
-      <p:sp>
-        <p:nvSpPr>
-          <p:cNvPr id="19" name="Shape 13"/>
-          <p:cNvSpPr/>
-          <p:nvPr/>
-        </p:nvSpPr>
-        <p:spPr>
-          <a:xfrm>
-            <a:off x="7223760" y="2697480"/>
+        <p:txBody>
+          <a:bodyPr/>
+          <a:lstStyle/>
+          <a:p>
+            <a:endParaRPr lang="en-PH"/>
+          </a:p>
+        </p:txBody>
+      </p:sp>
+      <p:sp>
+        <p:nvSpPr>
+          <p:cNvPr id="13" name="Shape 9"/>
+          <p:cNvSpPr/>
+          <p:nvPr/>
+        </p:nvSpPr>
+        <p:spPr>
+          <a:xfrm>
+            <a:off x="4434840" y="2697480"/>
             <a:ext cx="640080" cy="640080"/>
           </a:xfrm>
           <a:prstGeom prst="ellipse">
@@ -7320,10 +7186,17 @@
           </a:solidFill>
           <a:ln/>
         </p:spPr>
+        <p:txBody>
+          <a:bodyPr/>
+          <a:lstStyle/>
+          <a:p>
+            <a:endParaRPr lang="en-PH"/>
+          </a:p>
+        </p:txBody>
       </p:sp>
       <p:pic>
         <p:nvPicPr>
-          <p:cNvPr id="20" name="Image 4" descr="preencoded.png">    </p:cNvPr>
+          <p:cNvPr id="14" name="Image 2" descr="preencoded.png"/>
           <p:cNvPicPr>
             <a:picLocks noChangeAspect="1"/>
           </p:cNvPicPr>
@@ -7337,7 +7210,7 @@
         </p:blipFill>
         <p:spPr>
           <a:xfrm>
-            <a:off x="7379208" y="2852928"/>
+            <a:off x="4590288" y="2852928"/>
             <a:ext cx="329184" cy="329184"/>
           </a:xfrm>
           <a:prstGeom prst="rect">
@@ -7347,13 +7220,13 @@
       </p:pic>
       <p:sp>
         <p:nvSpPr>
-          <p:cNvPr id="21" name="Text 14"/>
-          <p:cNvSpPr/>
-          <p:nvPr/>
-        </p:nvSpPr>
-        <p:spPr>
-          <a:xfrm>
-            <a:off x="6492240" y="3474720"/>
+          <p:cNvPr id="15" name="Text 10"/>
+          <p:cNvSpPr/>
+          <p:nvPr/>
+        </p:nvSpPr>
+        <p:spPr>
+          <a:xfrm>
+            <a:off x="3703320" y="3474720"/>
             <a:ext cx="2103120" cy="365760"/>
           </a:xfrm>
           <a:prstGeom prst="rect">
@@ -7366,7 +7239,7 @@
           <a:bodyPr wrap="square" lIns="0" tIns="0" rIns="0" bIns="0" rtlCol="0" anchor="ctr"/>
           <a:lstStyle/>
           <a:p>
-            <a:pPr algn="ctr" indent="0" marL="0">
+            <a:pPr marL="0" indent="0" algn="ctr">
               <a:buNone/>
             </a:pPr>
             <a:r>
@@ -7378,7 +7251,7 @@
                 <a:ea typeface="Trebuchet MS" pitchFamily="34" charset="-122"/>
                 <a:cs typeface="Trebuchet MS" pitchFamily="34" charset="-120"/>
               </a:rPr>
-              <a:t>3 · Pull data</a:t>
+              <a:t>2 · Orchestrate</a:t>
             </a:r>
             <a:endParaRPr lang="en-US" sz="1500" dirty="0"/>
           </a:p>
@@ -7386,13 +7259,13 @@
       </p:sp>
       <p:sp>
         <p:nvSpPr>
-          <p:cNvPr id="22" name="Text 15"/>
-          <p:cNvSpPr/>
-          <p:nvPr/>
-        </p:nvSpPr>
-        <p:spPr>
-          <a:xfrm>
-            <a:off x="6537960" y="3840480"/>
+          <p:cNvPr id="16" name="Text 11"/>
+          <p:cNvSpPr/>
+          <p:nvPr/>
+        </p:nvSpPr>
+        <p:spPr>
+          <a:xfrm>
+            <a:off x="3749040" y="3840480"/>
             <a:ext cx="2011680" cy="685800"/>
           </a:xfrm>
           <a:prstGeom prst="rect">
@@ -7405,7 +7278,7 @@
           <a:bodyPr wrap="square" lIns="0" tIns="0" rIns="0" bIns="0" rtlCol="0" anchor="ctr"/>
           <a:lstStyle/>
           <a:p>
-            <a:pPr algn="ctr" indent="0" marL="0">
+            <a:pPr marL="0" indent="0" algn="ctr">
               <a:buNone/>
             </a:pPr>
             <a:r>
@@ -7417,7 +7290,7 @@
                 <a:ea typeface="Calibri" pitchFamily="34" charset="-122"/>
                 <a:cs typeface="Calibri" pitchFamily="34" charset="-120"/>
               </a:rPr>
-              <a:t>Adapters read Registrar, Bursar, FA &amp; Advising.</a:t>
+              <a:t>Azure AI Foundry plans which systems to query.</a:t>
             </a:r>
             <a:endParaRPr lang="en-US" sz="1150" dirty="0"/>
           </a:p>
@@ -7425,7 +7298,87 @@
       </p:sp>
       <p:pic>
         <p:nvPicPr>
-          <p:cNvPr id="23" name="Image 5" descr="preencoded.png">    </p:cNvPr>
+          <p:cNvPr id="17" name="Image 3" descr="preencoded.png"/>
+          <p:cNvPicPr>
+            <a:picLocks noChangeAspect="1"/>
+          </p:cNvPicPr>
+          <p:nvPr/>
+        </p:nvPicPr>
+        <p:blipFill>
+          <a:blip r:embed="rId4"/>
+          <a:stretch>
+            <a:fillRect/>
+          </a:stretch>
+        </p:blipFill>
+        <p:spPr>
+          <a:xfrm>
+            <a:off x="5998464" y="3401568"/>
+            <a:ext cx="310896" cy="310896"/>
+          </a:xfrm>
+          <a:prstGeom prst="rect">
+            <a:avLst/>
+          </a:prstGeom>
+        </p:spPr>
+      </p:pic>
+      <p:sp>
+        <p:nvSpPr>
+          <p:cNvPr id="18" name="Shape 12"/>
+          <p:cNvSpPr/>
+          <p:nvPr/>
+        </p:nvSpPr>
+        <p:spPr>
+          <a:xfrm>
+            <a:off x="6355080" y="2468880"/>
+            <a:ext cx="2377440" cy="2103120"/>
+          </a:xfrm>
+          <a:prstGeom prst="roundRect">
+            <a:avLst>
+              <a:gd name="adj" fmla="val 4348"/>
+            </a:avLst>
+          </a:prstGeom>
+          <a:solidFill>
+            <a:srgbClr val="F1F6F5"/>
+          </a:solidFill>
+          <a:ln/>
+        </p:spPr>
+        <p:txBody>
+          <a:bodyPr/>
+          <a:lstStyle/>
+          <a:p>
+            <a:endParaRPr lang="en-PH"/>
+          </a:p>
+        </p:txBody>
+      </p:sp>
+      <p:sp>
+        <p:nvSpPr>
+          <p:cNvPr id="19" name="Shape 13"/>
+          <p:cNvSpPr/>
+          <p:nvPr/>
+        </p:nvSpPr>
+        <p:spPr>
+          <a:xfrm>
+            <a:off x="7223760" y="2697480"/>
+            <a:ext cx="640080" cy="640080"/>
+          </a:xfrm>
+          <a:prstGeom prst="ellipse">
+            <a:avLst/>
+          </a:prstGeom>
+          <a:solidFill>
+            <a:srgbClr val="1F8A7D"/>
+          </a:solidFill>
+          <a:ln/>
+        </p:spPr>
+        <p:txBody>
+          <a:bodyPr/>
+          <a:lstStyle/>
+          <a:p>
+            <a:endParaRPr lang="en-PH"/>
+          </a:p>
+        </p:txBody>
+      </p:sp>
+      <p:pic>
+        <p:nvPicPr>
+          <p:cNvPr id="20" name="Image 4" descr="preencoded.png"/>
           <p:cNvPicPr>
             <a:picLocks noChangeAspect="1"/>
           </p:cNvPicPr>
@@ -7439,6 +7392,108 @@
         </p:blipFill>
         <p:spPr>
           <a:xfrm>
+            <a:off x="7379208" y="2852928"/>
+            <a:ext cx="329184" cy="329184"/>
+          </a:xfrm>
+          <a:prstGeom prst="rect">
+            <a:avLst/>
+          </a:prstGeom>
+        </p:spPr>
+      </p:pic>
+      <p:sp>
+        <p:nvSpPr>
+          <p:cNvPr id="21" name="Text 14"/>
+          <p:cNvSpPr/>
+          <p:nvPr/>
+        </p:nvSpPr>
+        <p:spPr>
+          <a:xfrm>
+            <a:off x="6492240" y="3474720"/>
+            <a:ext cx="2103120" cy="365760"/>
+          </a:xfrm>
+          <a:prstGeom prst="rect">
+            <a:avLst/>
+          </a:prstGeom>
+          <a:noFill/>
+          <a:ln/>
+        </p:spPr>
+        <p:txBody>
+          <a:bodyPr wrap="square" lIns="0" tIns="0" rIns="0" bIns="0" rtlCol="0" anchor="ctr"/>
+          <a:lstStyle/>
+          <a:p>
+            <a:pPr marL="0" indent="0" algn="ctr">
+              <a:buNone/>
+            </a:pPr>
+            <a:r>
+              <a:rPr lang="en-US" sz="1500" b="1" dirty="0">
+                <a:solidFill>
+                  <a:srgbClr val="0A2E2B"/>
+                </a:solidFill>
+                <a:latin typeface="Trebuchet MS" pitchFamily="34" charset="0"/>
+                <a:ea typeface="Trebuchet MS" pitchFamily="34" charset="-122"/>
+                <a:cs typeface="Trebuchet MS" pitchFamily="34" charset="-120"/>
+              </a:rPr>
+              <a:t>3 · Pull data</a:t>
+            </a:r>
+            <a:endParaRPr lang="en-US" sz="1500" dirty="0"/>
+          </a:p>
+        </p:txBody>
+      </p:sp>
+      <p:sp>
+        <p:nvSpPr>
+          <p:cNvPr id="22" name="Text 15"/>
+          <p:cNvSpPr/>
+          <p:nvPr/>
+        </p:nvSpPr>
+        <p:spPr>
+          <a:xfrm>
+            <a:off x="6537960" y="3840480"/>
+            <a:ext cx="2011680" cy="685800"/>
+          </a:xfrm>
+          <a:prstGeom prst="rect">
+            <a:avLst/>
+          </a:prstGeom>
+          <a:noFill/>
+          <a:ln/>
+        </p:spPr>
+        <p:txBody>
+          <a:bodyPr wrap="square" lIns="0" tIns="0" rIns="0" bIns="0" rtlCol="0" anchor="ctr"/>
+          <a:lstStyle/>
+          <a:p>
+            <a:pPr marL="0" indent="0" algn="ctr">
+              <a:buNone/>
+            </a:pPr>
+            <a:r>
+              <a:rPr lang="en-US" sz="1150" dirty="0">
+                <a:solidFill>
+                  <a:srgbClr val="3C5A56"/>
+                </a:solidFill>
+                <a:latin typeface="Calibri" pitchFamily="34" charset="0"/>
+                <a:ea typeface="Calibri" pitchFamily="34" charset="-122"/>
+                <a:cs typeface="Calibri" pitchFamily="34" charset="-120"/>
+              </a:rPr>
+              <a:t>Adapters read Registrar, Bursar, FA &amp; Advising.</a:t>
+            </a:r>
+            <a:endParaRPr lang="en-US" sz="1150" dirty="0"/>
+          </a:p>
+        </p:txBody>
+      </p:sp>
+      <p:pic>
+        <p:nvPicPr>
+          <p:cNvPr id="23" name="Image 5" descr="preencoded.png"/>
+          <p:cNvPicPr>
+            <a:picLocks noChangeAspect="1"/>
+          </p:cNvPicPr>
+          <p:nvPr/>
+        </p:nvPicPr>
+        <p:blipFill>
+          <a:blip r:embed="rId4"/>
+          <a:stretch>
+            <a:fillRect/>
+          </a:stretch>
+        </p:blipFill>
+        <p:spPr>
+          <a:xfrm>
             <a:off x="8787384" y="3401568"/>
             <a:ext cx="310896" cy="310896"/>
           </a:xfrm>
@@ -7468,6 +7523,13 @@
           </a:solidFill>
           <a:ln/>
         </p:spPr>
+        <p:txBody>
+          <a:bodyPr/>
+          <a:lstStyle/>
+          <a:p>
+            <a:endParaRPr lang="en-PH"/>
+          </a:p>
+        </p:txBody>
       </p:sp>
       <p:sp>
         <p:nvSpPr>
@@ -7488,10 +7550,17 @@
           </a:solidFill>
           <a:ln/>
         </p:spPr>
+        <p:txBody>
+          <a:bodyPr/>
+          <a:lstStyle/>
+          <a:p>
+            <a:endParaRPr lang="en-PH"/>
+          </a:p>
+        </p:txBody>
       </p:sp>
       <p:pic>
         <p:nvPicPr>
-          <p:cNvPr id="26" name="Image 6" descr="preencoded.png">    </p:cNvPr>
+          <p:cNvPr id="26" name="Image 6" descr="preencoded.png"/>
           <p:cNvPicPr>
             <a:picLocks noChangeAspect="1"/>
           </p:cNvPicPr>
@@ -7534,7 +7603,7 @@
           <a:bodyPr wrap="square" lIns="0" tIns="0" rIns="0" bIns="0" rtlCol="0" anchor="ctr"/>
           <a:lstStyle/>
           <a:p>
-            <a:pPr algn="ctr" indent="0" marL="0">
+            <a:pPr marL="0" indent="0" algn="ctr">
               <a:buNone/>
             </a:pPr>
             <a:r>
@@ -7573,7 +7642,7 @@
           <a:bodyPr wrap="square" lIns="0" tIns="0" rIns="0" bIns="0" rtlCol="0" anchor="ctr"/>
           <a:lstStyle/>
           <a:p>
-            <a:pPr algn="ctr" indent="0" marL="0">
+            <a:pPr marL="0" indent="0" algn="ctr">
               <a:buNone/>
             </a:pPr>
             <a:r>
@@ -7612,10 +7681,17 @@
           </a:solidFill>
           <a:ln/>
         </p:spPr>
+        <p:txBody>
+          <a:bodyPr/>
+          <a:lstStyle/>
+          <a:p>
+            <a:endParaRPr lang="en-PH"/>
+          </a:p>
+        </p:txBody>
       </p:sp>
       <p:pic>
         <p:nvPicPr>
-          <p:cNvPr id="30" name="Image 7" descr="preencoded.png">    </p:cNvPr>
+          <p:cNvPr id="30" name="Image 7" descr="preencoded.png"/>
           <p:cNvPicPr>
             <a:picLocks noChangeAspect="1"/>
           </p:cNvPicPr>
@@ -7658,7 +7734,7 @@
           <a:bodyPr wrap="square" lIns="0" tIns="0" rIns="0" bIns="0" rtlCol="0" anchor="ctr"/>
           <a:lstStyle/>
           <a:p>
-            <a:pPr indent="0" marL="0">
+            <a:pPr marL="0" indent="0">
               <a:buNone/>
             </a:pPr>
             <a:r>
@@ -7675,7 +7751,7 @@
             <a:endParaRPr lang="en-US" sz="1500" dirty="0"/>
           </a:p>
           <a:p>
-            <a:pPr indent="0" marL="0">
+            <a:pPr marL="0" indent="0">
               <a:buNone/>
             </a:pPr>
             <a:r>
@@ -7714,10 +7790,17 @@
           </a:solidFill>
           <a:ln/>
         </p:spPr>
+        <p:txBody>
+          <a:bodyPr/>
+          <a:lstStyle/>
+          <a:p>
+            <a:endParaRPr lang="en-PH"/>
+          </a:p>
+        </p:txBody>
       </p:sp>
       <p:pic>
         <p:nvPicPr>
-          <p:cNvPr id="33" name="Image 8" descr="preencoded.png">    </p:cNvPr>
+          <p:cNvPr id="33" name="Image 8" descr="preencoded.png"/>
           <p:cNvPicPr>
             <a:picLocks noChangeAspect="1"/>
           </p:cNvPicPr>
@@ -7760,7 +7843,7 @@
           <a:bodyPr wrap="square" lIns="0" tIns="0" rIns="0" bIns="0" rtlCol="0" anchor="ctr"/>
           <a:lstStyle/>
           <a:p>
-            <a:pPr indent="0" marL="0">
+            <a:pPr marL="0" indent="0">
               <a:buNone/>
             </a:pPr>
             <a:r>
@@ -7777,7 +7860,7 @@
             <a:endParaRPr lang="en-US" sz="1500" dirty="0"/>
           </a:p>
           <a:p>
-            <a:pPr indent="0" marL="0">
+            <a:pPr marL="0" indent="0">
               <a:buNone/>
             </a:pPr>
             <a:r>
@@ -7816,11 +7899,11 @@
           <a:bodyPr wrap="square" lIns="0" tIns="0" rIns="0" bIns="0" rtlCol="0" anchor="ctr"/>
           <a:lstStyle/>
           <a:p>
-            <a:pPr indent="0" marL="0">
-              <a:buNone/>
-            </a:pPr>
-            <a:r>
-              <a:rPr lang="en-US" sz="950" b="1" spc="100" kern="0" dirty="0">
+            <a:pPr marL="0" indent="0">
+              <a:buNone/>
+            </a:pPr>
+            <a:r>
+              <a:rPr lang="en-US" sz="950" b="1" kern="0" spc="100" dirty="0">
                 <a:solidFill>
                   <a:srgbClr val="0A2E2B"/>
                 </a:solidFill>
@@ -7830,11 +7913,8 @@
               </a:rPr>
               <a:t>ARCHON</a:t>
             </a:r>
-            <a:pPr indent="0" marL="0">
-              <a:buNone/>
-            </a:pPr>
-            <a:r>
-              <a:rPr lang="en-US" sz="950" spc="100" kern="0" dirty="0">
+            <a:r>
+              <a:rPr lang="en-US" sz="950" kern="0" spc="100" dirty="0">
                 <a:solidFill>
                   <a:srgbClr val="7C938E"/>
                 </a:solidFill>
@@ -7869,7 +7949,7 @@
           <a:bodyPr wrap="square" lIns="0" tIns="0" rIns="0" bIns="0" rtlCol="0" anchor="ctr"/>
           <a:lstStyle/>
           <a:p>
-            <a:pPr algn="r" indent="0" marL="0">
+            <a:pPr marL="0" indent="0" algn="r">
               <a:buNone/>
             </a:pPr>
             <a:r>
@@ -7903,6 +7983,7 @@
         <a:solidFill>
           <a:srgbClr val="0A2E2B"/>
         </a:solidFill>
+        <a:effectLst/>
       </p:bgPr>
     </p:bg>
     <p:spTree>
@@ -7940,11 +8021,11 @@
           <a:bodyPr wrap="square" lIns="0" tIns="0" rIns="0" bIns="0" rtlCol="0" anchor="ctr"/>
           <a:lstStyle/>
           <a:p>
-            <a:pPr indent="0" marL="0">
-              <a:buNone/>
-            </a:pPr>
-            <a:r>
-              <a:rPr lang="en-US" sz="1250" b="1" spc="200" kern="0" dirty="0">
+            <a:pPr marL="0" indent="0">
+              <a:buNone/>
+            </a:pPr>
+            <a:r>
+              <a:rPr lang="en-US" sz="1250" b="1" kern="0" spc="200" dirty="0">
                 <a:solidFill>
                   <a:srgbClr val="2DD4BF"/>
                 </a:solidFill>
@@ -7979,7 +8060,7 @@
           <a:bodyPr wrap="square" lIns="0" tIns="0" rIns="0" bIns="0" rtlCol="0" anchor="ctr"/>
           <a:lstStyle/>
           <a:p>
-            <a:pPr indent="0" marL="0">
+            <a:pPr marL="0" indent="0">
               <a:buNone/>
             </a:pPr>
             <a:r>
@@ -7999,7 +8080,7 @@
       </p:sp>
       <p:sp>
         <p:nvSpPr>
-          <p:cNvPr id="4" name="Shape 2"/>
+          <p:cNvPr id="5" name="Text 3"/>
           <p:cNvSpPr/>
           <p:nvPr/>
         </p:nvSpPr>
@@ -8008,43 +8089,21 @@
             <a:off x="548640" y="1664208"/>
             <a:ext cx="2754173" cy="310896"/>
           </a:xfrm>
-          <a:prstGeom prst="roundRect">
-            <a:avLst>
-              <a:gd name="adj" fmla="val 50000"/>
-            </a:avLst>
-          </a:prstGeom>
-          <a:solidFill>
-            <a:srgbClr val="2DD4BF"/>
-          </a:solidFill>
-          <a:ln/>
-        </p:spPr>
-      </p:sp>
-      <p:sp>
-        <p:nvSpPr>
-          <p:cNvPr id="5" name="Text 3"/>
-          <p:cNvSpPr/>
-          <p:nvPr/>
-        </p:nvSpPr>
-        <p:spPr>
-          <a:xfrm>
-            <a:off x="548640" y="1664208"/>
-            <a:ext cx="2754173" cy="310896"/>
-          </a:xfrm>
-          <a:prstGeom prst="rect">
-            <a:avLst/>
-          </a:prstGeom>
-          <a:noFill/>
-          <a:ln/>
-        </p:spPr>
-        <p:txBody>
-          <a:bodyPr wrap="square" lIns="0" tIns="0" rIns="0" bIns="0" rtlCol="0" anchor="ctr"/>
-          <a:lstStyle/>
-          <a:p>
-            <a:pPr algn="ctr" indent="0" marL="0">
-              <a:buNone/>
-            </a:pPr>
-            <a:r>
-              <a:rPr lang="en-US" sz="1050" b="1" spc="100" kern="0" dirty="0">
+          <a:prstGeom prst="rect">
+            <a:avLst/>
+          </a:prstGeom>
+          <a:noFill/>
+          <a:ln/>
+        </p:spPr>
+        <p:txBody>
+          <a:bodyPr wrap="square" lIns="0" tIns="0" rIns="0" bIns="0" rtlCol="0" anchor="ctr"/>
+          <a:lstStyle/>
+          <a:p>
+            <a:pPr marL="0" indent="0" algn="ctr">
+              <a:buNone/>
+            </a:pPr>
+            <a:r>
+              <a:rPr lang="en-US" sz="1050" b="1" kern="0" spc="100" dirty="0">
                 <a:solidFill>
                   <a:srgbClr val="0A2E2B"/>
                 </a:solidFill>
@@ -8052,7 +8111,7 @@
                 <a:ea typeface="Trebuchet MS" pitchFamily="34" charset="-122"/>
                 <a:cs typeface="Trebuchet MS" pitchFamily="34" charset="-120"/>
               </a:rPr>
-              <a:t>SCORED: DATA MODEL DESIGN — 25%</a:t>
+              <a:t>SCORED: DATA MODL DESIGN — 25%</a:t>
             </a:r>
             <a:endParaRPr lang="en-US" sz="1050" dirty="0"/>
           </a:p>
@@ -8079,11 +8138,11 @@
           <a:bodyPr wrap="square" lIns="0" tIns="0" rIns="0" bIns="0" rtlCol="0" anchor="ctr"/>
           <a:lstStyle/>
           <a:p>
-            <a:pPr indent="0" marL="0">
-              <a:buNone/>
-            </a:pPr>
-            <a:r>
-              <a:rPr lang="en-US" sz="1300" b="1" spc="100" kern="0" dirty="0">
+            <a:pPr marL="0" indent="0">
+              <a:buNone/>
+            </a:pPr>
+            <a:r>
+              <a:rPr lang="en-US" sz="1300" b="1" kern="0" spc="100" dirty="0">
                 <a:solidFill>
                   <a:srgbClr val="BFE9E2"/>
                 </a:solidFill>
@@ -8123,17 +8182,24 @@
             <a:prstDash val="solid"/>
           </a:ln>
         </p:spPr>
+        <p:txBody>
+          <a:bodyPr/>
+          <a:lstStyle/>
+          <a:p>
+            <a:endParaRPr lang="en-PH"/>
+          </a:p>
+        </p:txBody>
       </p:sp>
       <p:pic>
         <p:nvPicPr>
-          <p:cNvPr id="8" name="Image 0" descr="preencoded.png">    </p:cNvPr>
+          <p:cNvPr id="8" name="Image 0" descr="preencoded.png"/>
           <p:cNvPicPr>
             <a:picLocks noChangeAspect="1"/>
           </p:cNvPicPr>
           <p:nvPr/>
         </p:nvPicPr>
         <p:blipFill>
-          <a:blip r:embed="rId1"/>
+          <a:blip r:embed="rId3"/>
           <a:stretch>
             <a:fillRect/>
           </a:stretch>
@@ -8169,7 +8235,7 @@
           <a:bodyPr wrap="square" lIns="0" tIns="0" rIns="0" bIns="0" rtlCol="0" anchor="ctr"/>
           <a:lstStyle/>
           <a:p>
-            <a:pPr indent="0" marL="0">
+            <a:pPr marL="0" indent="0">
               <a:buNone/>
             </a:pPr>
             <a:r>
@@ -8213,17 +8279,24 @@
             <a:prstDash val="solid"/>
           </a:ln>
         </p:spPr>
+        <p:txBody>
+          <a:bodyPr/>
+          <a:lstStyle/>
+          <a:p>
+            <a:endParaRPr lang="en-PH"/>
+          </a:p>
+        </p:txBody>
       </p:sp>
       <p:pic>
         <p:nvPicPr>
-          <p:cNvPr id="11" name="Image 1" descr="preencoded.png">    </p:cNvPr>
+          <p:cNvPr id="11" name="Image 1" descr="preencoded.png"/>
           <p:cNvPicPr>
             <a:picLocks noChangeAspect="1"/>
           </p:cNvPicPr>
           <p:nvPr/>
         </p:nvPicPr>
         <p:blipFill>
-          <a:blip r:embed="rId2"/>
+          <a:blip r:embed="rId4"/>
           <a:stretch>
             <a:fillRect/>
           </a:stretch>
@@ -8259,7 +8332,7 @@
           <a:bodyPr wrap="square" lIns="0" tIns="0" rIns="0" bIns="0" rtlCol="0" anchor="ctr"/>
           <a:lstStyle/>
           <a:p>
-            <a:pPr indent="0" marL="0">
+            <a:pPr marL="0" indent="0">
               <a:buNone/>
             </a:pPr>
             <a:r>
@@ -8303,17 +8376,24 @@
             <a:prstDash val="solid"/>
           </a:ln>
         </p:spPr>
+        <p:txBody>
+          <a:bodyPr/>
+          <a:lstStyle/>
+          <a:p>
+            <a:endParaRPr lang="en-PH"/>
+          </a:p>
+        </p:txBody>
       </p:sp>
       <p:pic>
         <p:nvPicPr>
-          <p:cNvPr id="14" name="Image 2" descr="preencoded.png">    </p:cNvPr>
+          <p:cNvPr id="14" name="Image 2" descr="preencoded.png"/>
           <p:cNvPicPr>
             <a:picLocks noChangeAspect="1"/>
           </p:cNvPicPr>
           <p:nvPr/>
         </p:nvPicPr>
         <p:blipFill>
-          <a:blip r:embed="rId3"/>
+          <a:blip r:embed="rId5"/>
           <a:stretch>
             <a:fillRect/>
           </a:stretch>
@@ -8349,7 +8429,7 @@
           <a:bodyPr wrap="square" lIns="0" tIns="0" rIns="0" bIns="0" rtlCol="0" anchor="ctr"/>
           <a:lstStyle/>
           <a:p>
-            <a:pPr indent="0" marL="0">
+            <a:pPr marL="0" indent="0">
               <a:buNone/>
             </a:pPr>
             <a:r>
@@ -8393,17 +8473,24 @@
             <a:prstDash val="solid"/>
           </a:ln>
         </p:spPr>
+        <p:txBody>
+          <a:bodyPr/>
+          <a:lstStyle/>
+          <a:p>
+            <a:endParaRPr lang="en-PH"/>
+          </a:p>
+        </p:txBody>
       </p:sp>
       <p:pic>
         <p:nvPicPr>
-          <p:cNvPr id="17" name="Image 3" descr="preencoded.png">    </p:cNvPr>
+          <p:cNvPr id="17" name="Image 3" descr="preencoded.png"/>
           <p:cNvPicPr>
             <a:picLocks noChangeAspect="1"/>
           </p:cNvPicPr>
           <p:nvPr/>
         </p:nvPicPr>
         <p:blipFill>
-          <a:blip r:embed="rId4"/>
+          <a:blip r:embed="rId6"/>
           <a:stretch>
             <a:fillRect/>
           </a:stretch>
@@ -8439,7 +8526,7 @@
           <a:bodyPr wrap="square" lIns="0" tIns="0" rIns="0" bIns="0" rtlCol="0" anchor="ctr"/>
           <a:lstStyle/>
           <a:p>
-            <a:pPr indent="0" marL="0">
+            <a:pPr marL="0" indent="0">
               <a:buNone/>
             </a:pPr>
             <a:r>
@@ -8483,17 +8570,24 @@
             <a:prstDash val="solid"/>
           </a:ln>
         </p:spPr>
+        <p:txBody>
+          <a:bodyPr/>
+          <a:lstStyle/>
+          <a:p>
+            <a:endParaRPr lang="en-PH"/>
+          </a:p>
+        </p:txBody>
       </p:sp>
       <p:pic>
         <p:nvPicPr>
-          <p:cNvPr id="20" name="Image 4" descr="preencoded.png">    </p:cNvPr>
+          <p:cNvPr id="20" name="Image 4" descr="preencoded.png"/>
           <p:cNvPicPr>
             <a:picLocks noChangeAspect="1"/>
           </p:cNvPicPr>
           <p:nvPr/>
         </p:nvPicPr>
         <p:blipFill>
-          <a:blip r:embed="rId5"/>
+          <a:blip r:embed="rId7"/>
           <a:stretch>
             <a:fillRect/>
           </a:stretch>
@@ -8529,7 +8623,7 @@
           <a:bodyPr wrap="square" lIns="0" tIns="0" rIns="0" bIns="0" rtlCol="0" anchor="ctr"/>
           <a:lstStyle/>
           <a:p>
-            <a:pPr indent="0" marL="0">
+            <a:pPr marL="0" indent="0">
               <a:buNone/>
             </a:pPr>
             <a:r>
@@ -8573,254 +8667,17 @@
             <a:prstDash val="solid"/>
           </a:ln>
         </p:spPr>
+        <p:txBody>
+          <a:bodyPr/>
+          <a:lstStyle/>
+          <a:p>
+            <a:endParaRPr lang="en-PH"/>
+          </a:p>
+        </p:txBody>
       </p:sp>
       <p:pic>
         <p:nvPicPr>
-          <p:cNvPr id="23" name="Image 5" descr="preencoded.png">    </p:cNvPr>
-          <p:cNvPicPr>
-            <a:picLocks noChangeAspect="1"/>
-          </p:cNvPicPr>
-          <p:nvPr/>
-        </p:nvPicPr>
-        <p:blipFill>
-          <a:blip r:embed="rId6"/>
-          <a:stretch>
-            <a:fillRect/>
-          </a:stretch>
-        </p:blipFill>
-        <p:spPr>
-          <a:xfrm>
-            <a:off x="3703320" y="4105656"/>
-            <a:ext cx="274320" cy="274320"/>
-          </a:xfrm>
-          <a:prstGeom prst="rect">
-            <a:avLst/>
-          </a:prstGeom>
-        </p:spPr>
-      </p:pic>
-      <p:sp>
-        <p:nvSpPr>
-          <p:cNvPr id="24" name="Text 16"/>
-          <p:cNvSpPr/>
-          <p:nvPr/>
-        </p:nvSpPr>
-        <p:spPr>
-          <a:xfrm>
-            <a:off x="4087368" y="3959352"/>
-            <a:ext cx="2194560" cy="566928"/>
-          </a:xfrm>
-          <a:prstGeom prst="rect">
-            <a:avLst/>
-          </a:prstGeom>
-          <a:noFill/>
-          <a:ln/>
-        </p:spPr>
-        <p:txBody>
-          <a:bodyPr wrap="square" lIns="0" tIns="0" rIns="0" bIns="0" rtlCol="0" anchor="ctr"/>
-          <a:lstStyle/>
-          <a:p>
-            <a:pPr indent="0" marL="0">
-              <a:buNone/>
-            </a:pPr>
-            <a:r>
-              <a:rPr lang="en-US" sz="1250" dirty="0">
-                <a:solidFill>
-                  <a:srgbClr val="FFFFFF"/>
-                </a:solidFill>
-                <a:latin typeface="Consolas" pitchFamily="34" charset="0"/>
-                <a:ea typeface="Consolas" pitchFamily="34" charset="-122"/>
-                <a:cs typeface="Consolas" pitchFamily="34" charset="-120"/>
-              </a:rPr>
-              <a:t>cache_university_data</a:t>
-            </a:r>
-            <a:endParaRPr lang="en-US" sz="1250" dirty="0"/>
-          </a:p>
-        </p:txBody>
-      </p:sp>
-      <p:sp>
-        <p:nvSpPr>
-          <p:cNvPr id="25" name="Text 17"/>
-          <p:cNvSpPr/>
-          <p:nvPr/>
-        </p:nvSpPr>
-        <p:spPr>
-          <a:xfrm>
-            <a:off x="548640" y="4709160"/>
-            <a:ext cx="6035040" cy="320040"/>
-          </a:xfrm>
-          <a:prstGeom prst="rect">
-            <a:avLst/>
-          </a:prstGeom>
-          <a:noFill/>
-          <a:ln/>
-        </p:spPr>
-        <p:txBody>
-          <a:bodyPr wrap="square" lIns="0" tIns="0" rIns="0" bIns="0" rtlCol="0" anchor="ctr"/>
-          <a:lstStyle/>
-          <a:p>
-            <a:pPr indent="0" marL="0">
-              <a:buNone/>
-            </a:pPr>
-            <a:r>
-              <a:rPr lang="en-US" sz="1150" dirty="0">
-                <a:solidFill>
-                  <a:srgbClr val="2DD4BF"/>
-                </a:solidFill>
-                <a:latin typeface="Consolas" pitchFamily="34" charset="0"/>
-                <a:ea typeface="Consolas" pitchFamily="34" charset="-122"/>
-                <a:cs typeface="Consolas" pitchFamily="34" charset="-120"/>
-              </a:rPr>
-              <a:t>Partition key  /institution_id  on every container</a:t>
-            </a:r>
-            <a:endParaRPr lang="en-US" sz="1150" dirty="0"/>
-          </a:p>
-        </p:txBody>
-      </p:sp>
-      <p:sp>
-        <p:nvSpPr>
-          <p:cNvPr id="26" name="Shape 18"/>
-          <p:cNvSpPr/>
-          <p:nvPr/>
-        </p:nvSpPr>
-        <p:spPr>
-          <a:xfrm>
-            <a:off x="6583680" y="2331720"/>
-            <a:ext cx="603504" cy="603504"/>
-          </a:xfrm>
-          <a:prstGeom prst="ellipse">
-            <a:avLst/>
-          </a:prstGeom>
-          <a:solidFill>
-            <a:srgbClr val="2DD4BF"/>
-          </a:solidFill>
-          <a:ln/>
-        </p:spPr>
-      </p:sp>
-      <p:pic>
-        <p:nvPicPr>
-          <p:cNvPr id="27" name="Image 6" descr="preencoded.png">    </p:cNvPr>
-          <p:cNvPicPr>
-            <a:picLocks noChangeAspect="1"/>
-          </p:cNvPicPr>
-          <p:nvPr/>
-        </p:nvPicPr>
-        <p:blipFill>
-          <a:blip r:embed="rId7"/>
-          <a:stretch>
-            <a:fillRect/>
-          </a:stretch>
-        </p:blipFill>
-        <p:spPr>
-          <a:xfrm>
-            <a:off x="6729984" y="2478024"/>
-            <a:ext cx="310896" cy="310896"/>
-          </a:xfrm>
-          <a:prstGeom prst="rect">
-            <a:avLst/>
-          </a:prstGeom>
-        </p:spPr>
-      </p:pic>
-      <p:sp>
-        <p:nvSpPr>
-          <p:cNvPr id="28" name="Text 19"/>
-          <p:cNvSpPr/>
-          <p:nvPr/>
-        </p:nvSpPr>
-        <p:spPr>
-          <a:xfrm>
-            <a:off x="7360920" y="2295144"/>
-            <a:ext cx="4754880" cy="329184"/>
-          </a:xfrm>
-          <a:prstGeom prst="rect">
-            <a:avLst/>
-          </a:prstGeom>
-          <a:noFill/>
-          <a:ln/>
-        </p:spPr>
-        <p:txBody>
-          <a:bodyPr wrap="square" lIns="0" tIns="0" rIns="0" bIns="0" rtlCol="0" anchor="ctr"/>
-          <a:lstStyle/>
-          <a:p>
-            <a:pPr indent="0" marL="0">
-              <a:buNone/>
-            </a:pPr>
-            <a:r>
-              <a:rPr lang="en-US" sz="1450" b="1" dirty="0">
-                <a:solidFill>
-                  <a:srgbClr val="FFFFFF"/>
-                </a:solidFill>
-                <a:latin typeface="Trebuchet MS" pitchFamily="34" charset="0"/>
-                <a:ea typeface="Trebuchet MS" pitchFamily="34" charset="-122"/>
-                <a:cs typeface="Trebuchet MS" pitchFamily="34" charset="-120"/>
-              </a:rPr>
-              <a:t>Isolation by design</a:t>
-            </a:r>
-            <a:endParaRPr lang="en-US" sz="1450" dirty="0"/>
-          </a:p>
-        </p:txBody>
-      </p:sp>
-      <p:sp>
-        <p:nvSpPr>
-          <p:cNvPr id="29" name="Text 20"/>
-          <p:cNvSpPr/>
-          <p:nvPr/>
-        </p:nvSpPr>
-        <p:spPr>
-          <a:xfrm>
-            <a:off x="7360920" y="2642616"/>
-            <a:ext cx="4800600" cy="594360"/>
-          </a:xfrm>
-          <a:prstGeom prst="rect">
-            <a:avLst/>
-          </a:prstGeom>
-          <a:noFill/>
-          <a:ln/>
-        </p:spPr>
-        <p:txBody>
-          <a:bodyPr wrap="square" lIns="0" tIns="0" rIns="0" bIns="0" rtlCol="0" anchor="ctr"/>
-          <a:lstStyle/>
-          <a:p>
-            <a:pPr indent="0" marL="0">
-              <a:buNone/>
-            </a:pPr>
-            <a:r>
-              <a:rPr lang="en-US" sz="1130" dirty="0">
-                <a:solidFill>
-                  <a:srgbClr val="BFE9E2"/>
-                </a:solidFill>
-                <a:latin typeface="Calibri" pitchFamily="34" charset="0"/>
-                <a:ea typeface="Calibri" pitchFamily="34" charset="-122"/>
-                <a:cs typeface="Calibri" pitchFamily="34" charset="-120"/>
-              </a:rPr>
-              <a:t>/institution_id partition → multi-tenant data separation + DPA 2012 compliance.</a:t>
-            </a:r>
-            <a:endParaRPr lang="en-US" sz="1130" dirty="0"/>
-          </a:p>
-        </p:txBody>
-      </p:sp>
-      <p:sp>
-        <p:nvSpPr>
-          <p:cNvPr id="30" name="Shape 21"/>
-          <p:cNvSpPr/>
-          <p:nvPr/>
-        </p:nvSpPr>
-        <p:spPr>
-          <a:xfrm>
-            <a:off x="6583680" y="3291840"/>
-            <a:ext cx="603504" cy="603504"/>
-          </a:xfrm>
-          <a:prstGeom prst="ellipse">
-            <a:avLst/>
-          </a:prstGeom>
-          <a:solidFill>
-            <a:srgbClr val="2DD4BF"/>
-          </a:solidFill>
-          <a:ln/>
-        </p:spPr>
-      </p:sp>
-      <p:pic>
-        <p:nvPicPr>
-          <p:cNvPr id="31" name="Image 7" descr="preencoded.png">    </p:cNvPr>
+          <p:cNvPr id="23" name="Image 5" descr="preencoded.png"/>
           <p:cNvPicPr>
             <a:picLocks noChangeAspect="1"/>
           </p:cNvPicPr>
@@ -8834,8 +8691,8 @@
         </p:blipFill>
         <p:spPr>
           <a:xfrm>
-            <a:off x="6729984" y="3438144"/>
-            <a:ext cx="310896" cy="310896"/>
+            <a:off x="3703320" y="4105656"/>
+            <a:ext cx="274320" cy="274320"/>
           </a:xfrm>
           <a:prstGeom prst="rect">
             <a:avLst/>
@@ -8844,91 +8701,91 @@
       </p:pic>
       <p:sp>
         <p:nvSpPr>
-          <p:cNvPr id="32" name="Text 22"/>
-          <p:cNvSpPr/>
-          <p:nvPr/>
-        </p:nvSpPr>
-        <p:spPr>
-          <a:xfrm>
-            <a:off x="7360920" y="3255264"/>
-            <a:ext cx="4754880" cy="329184"/>
-          </a:xfrm>
-          <a:prstGeom prst="rect">
-            <a:avLst/>
-          </a:prstGeom>
-          <a:noFill/>
-          <a:ln/>
-        </p:spPr>
-        <p:txBody>
-          <a:bodyPr wrap="square" lIns="0" tIns="0" rIns="0" bIns="0" rtlCol="0" anchor="ctr"/>
-          <a:lstStyle/>
-          <a:p>
-            <a:pPr indent="0" marL="0">
-              <a:buNone/>
-            </a:pPr>
-            <a:r>
-              <a:rPr lang="en-US" sz="1450" b="1" dirty="0">
+          <p:cNvPr id="24" name="Text 16"/>
+          <p:cNvSpPr/>
+          <p:nvPr/>
+        </p:nvSpPr>
+        <p:spPr>
+          <a:xfrm>
+            <a:off x="4087368" y="3959352"/>
+            <a:ext cx="2194560" cy="566928"/>
+          </a:xfrm>
+          <a:prstGeom prst="rect">
+            <a:avLst/>
+          </a:prstGeom>
+          <a:noFill/>
+          <a:ln/>
+        </p:spPr>
+        <p:txBody>
+          <a:bodyPr wrap="square" lIns="0" tIns="0" rIns="0" bIns="0" rtlCol="0" anchor="ctr"/>
+          <a:lstStyle/>
+          <a:p>
+            <a:pPr marL="0" indent="0">
+              <a:buNone/>
+            </a:pPr>
+            <a:r>
+              <a:rPr lang="en-US" sz="1250" dirty="0">
                 <a:solidFill>
                   <a:srgbClr val="FFFFFF"/>
                 </a:solidFill>
-                <a:latin typeface="Trebuchet MS" pitchFamily="34" charset="0"/>
-                <a:ea typeface="Trebuchet MS" pitchFamily="34" charset="-122"/>
-                <a:cs typeface="Trebuchet MS" pitchFamily="34" charset="-120"/>
-              </a:rPr>
-              <a:t>Lifecycle built in</a:t>
-            </a:r>
-            <a:endParaRPr lang="en-US" sz="1450" dirty="0"/>
-          </a:p>
-        </p:txBody>
-      </p:sp>
-      <p:sp>
-        <p:nvSpPr>
-          <p:cNvPr id="33" name="Text 23"/>
-          <p:cNvSpPr/>
-          <p:nvPr/>
-        </p:nvSpPr>
-        <p:spPr>
-          <a:xfrm>
-            <a:off x="7360920" y="3602736"/>
-            <a:ext cx="4800600" cy="594360"/>
-          </a:xfrm>
-          <a:prstGeom prst="rect">
-            <a:avLst/>
-          </a:prstGeom>
-          <a:noFill/>
-          <a:ln/>
-        </p:spPr>
-        <p:txBody>
-          <a:bodyPr wrap="square" lIns="0" tIns="0" rIns="0" bIns="0" rtlCol="0" anchor="ctr"/>
-          <a:lstStyle/>
-          <a:p>
-            <a:pPr indent="0" marL="0">
-              <a:buNone/>
-            </a:pPr>
-            <a:r>
-              <a:rPr lang="en-US" sz="1130" dirty="0">
-                <a:solidFill>
-                  <a:srgbClr val="BFE9E2"/>
-                </a:solidFill>
-                <a:latin typeface="Calibri" pitchFamily="34" charset="0"/>
-                <a:ea typeface="Calibri" pitchFamily="34" charset="-122"/>
-                <a:cs typeface="Calibri" pitchFamily="34" charset="-120"/>
-              </a:rPr>
-              <a:t>TTL: messages &amp; handoffs 90d (data minimization); university cache 5 min (fresh + cheap).</a:t>
-            </a:r>
-            <a:endParaRPr lang="en-US" sz="1130" dirty="0"/>
-          </a:p>
-        </p:txBody>
-      </p:sp>
-      <p:sp>
-        <p:nvSpPr>
-          <p:cNvPr id="34" name="Shape 24"/>
-          <p:cNvSpPr/>
-          <p:nvPr/>
-        </p:nvSpPr>
-        <p:spPr>
-          <a:xfrm>
-            <a:off x="6583680" y="4251960"/>
+                <a:latin typeface="Consolas" pitchFamily="34" charset="0"/>
+                <a:ea typeface="Consolas" pitchFamily="34" charset="-122"/>
+                <a:cs typeface="Consolas" pitchFamily="34" charset="-120"/>
+              </a:rPr>
+              <a:t>cache_university_data</a:t>
+            </a:r>
+            <a:endParaRPr lang="en-US" sz="1250" dirty="0"/>
+          </a:p>
+        </p:txBody>
+      </p:sp>
+      <p:sp>
+        <p:nvSpPr>
+          <p:cNvPr id="25" name="Text 17"/>
+          <p:cNvSpPr/>
+          <p:nvPr/>
+        </p:nvSpPr>
+        <p:spPr>
+          <a:xfrm>
+            <a:off x="548640" y="4709160"/>
+            <a:ext cx="6035040" cy="320040"/>
+          </a:xfrm>
+          <a:prstGeom prst="rect">
+            <a:avLst/>
+          </a:prstGeom>
+          <a:noFill/>
+          <a:ln/>
+        </p:spPr>
+        <p:txBody>
+          <a:bodyPr wrap="square" lIns="0" tIns="0" rIns="0" bIns="0" rtlCol="0" anchor="ctr"/>
+          <a:lstStyle/>
+          <a:p>
+            <a:pPr marL="0" indent="0">
+              <a:buNone/>
+            </a:pPr>
+            <a:r>
+              <a:rPr lang="en-US" sz="1150" dirty="0">
+                <a:solidFill>
+                  <a:srgbClr val="2DD4BF"/>
+                </a:solidFill>
+                <a:latin typeface="Consolas" pitchFamily="34" charset="0"/>
+                <a:ea typeface="Consolas" pitchFamily="34" charset="-122"/>
+                <a:cs typeface="Consolas" pitchFamily="34" charset="-120"/>
+              </a:rPr>
+              <a:t>Partition key  /institution_id  on every container</a:t>
+            </a:r>
+            <a:endParaRPr lang="en-US" sz="1150" dirty="0"/>
+          </a:p>
+        </p:txBody>
+      </p:sp>
+      <p:sp>
+        <p:nvSpPr>
+          <p:cNvPr id="26" name="Shape 18"/>
+          <p:cNvSpPr/>
+          <p:nvPr/>
+        </p:nvSpPr>
+        <p:spPr>
+          <a:xfrm>
+            <a:off x="6583680" y="2331720"/>
             <a:ext cx="603504" cy="603504"/>
           </a:xfrm>
           <a:prstGeom prst="ellipse">
@@ -8939,10 +8796,17 @@
           </a:solidFill>
           <a:ln/>
         </p:spPr>
+        <p:txBody>
+          <a:bodyPr/>
+          <a:lstStyle/>
+          <a:p>
+            <a:endParaRPr lang="en-PH"/>
+          </a:p>
+        </p:txBody>
       </p:sp>
       <p:pic>
         <p:nvPicPr>
-          <p:cNvPr id="35" name="Image 8" descr="preencoded.png">    </p:cNvPr>
+          <p:cNvPr id="27" name="Image 6" descr="preencoded.png"/>
           <p:cNvPicPr>
             <a:picLocks noChangeAspect="1"/>
           </p:cNvPicPr>
@@ -8956,7 +8820,7 @@
         </p:blipFill>
         <p:spPr>
           <a:xfrm>
-            <a:off x="6729984" y="4398264"/>
+            <a:off x="6729984" y="2478024"/>
             <a:ext cx="310896" cy="310896"/>
           </a:xfrm>
           <a:prstGeom prst="rect">
@@ -8966,13 +8830,13 @@
       </p:pic>
       <p:sp>
         <p:nvSpPr>
-          <p:cNvPr id="36" name="Text 25"/>
-          <p:cNvSpPr/>
-          <p:nvPr/>
-        </p:nvSpPr>
-        <p:spPr>
-          <a:xfrm>
-            <a:off x="7360920" y="4215384"/>
+          <p:cNvPr id="28" name="Text 19"/>
+          <p:cNvSpPr/>
+          <p:nvPr/>
+        </p:nvSpPr>
+        <p:spPr>
+          <a:xfrm>
+            <a:off x="7360920" y="2295144"/>
             <a:ext cx="4754880" cy="329184"/>
           </a:xfrm>
           <a:prstGeom prst="rect">
@@ -8985,7 +8849,7 @@
           <a:bodyPr wrap="square" lIns="0" tIns="0" rIns="0" bIns="0" rtlCol="0" anchor="ctr"/>
           <a:lstStyle/>
           <a:p>
-            <a:pPr indent="0" marL="0">
+            <a:pPr marL="0" indent="0">
               <a:buNone/>
             </a:pPr>
             <a:r>
@@ -8997,7 +8861,7 @@
                 <a:ea typeface="Trebuchet MS" pitchFamily="34" charset="-122"/>
                 <a:cs typeface="Trebuchet MS" pitchFamily="34" charset="-120"/>
               </a:rPr>
-              <a:t>Recall in the same store</a:t>
+              <a:t>Isolation by design</a:t>
             </a:r>
             <a:endParaRPr lang="en-US" sz="1450" dirty="0"/>
           </a:p>
@@ -9005,13 +8869,13 @@
       </p:sp>
       <p:sp>
         <p:nvSpPr>
-          <p:cNvPr id="37" name="Text 26"/>
-          <p:cNvSpPr/>
-          <p:nvPr/>
-        </p:nvSpPr>
-        <p:spPr>
-          <a:xfrm>
-            <a:off x="7360920" y="4562856"/>
+          <p:cNvPr id="29" name="Text 20"/>
+          <p:cNvSpPr/>
+          <p:nvPr/>
+        </p:nvSpPr>
+        <p:spPr>
+          <a:xfrm>
+            <a:off x="7360920" y="2642616"/>
             <a:ext cx="4800600" cy="594360"/>
           </a:xfrm>
           <a:prstGeom prst="rect">
@@ -9024,7 +8888,7 @@
           <a:bodyPr wrap="square" lIns="0" tIns="0" rIns="0" bIns="0" rtlCol="0" anchor="ctr"/>
           <a:lstStyle/>
           <a:p>
-            <a:pPr indent="0" marL="0">
+            <a:pPr marL="0" indent="0">
               <a:buNone/>
             </a:pPr>
             <a:r>
@@ -9036,7 +8900,7 @@
                 <a:ea typeface="Calibri" pitchFamily="34" charset="-122"/>
                 <a:cs typeface="Calibri" pitchFamily="34" charset="-120"/>
               </a:rPr>
-              <a:t>Vector search over policy_embeddings powers RAG — no bolt-on vector DB.</a:t>
+              <a:t>/institution_id partition → multi-tenant data separation + DPA 2012 compliance.</a:t>
             </a:r>
             <a:endParaRPr lang="en-US" sz="1130" dirty="0"/>
           </a:p>
@@ -9044,13 +8908,13 @@
       </p:sp>
       <p:sp>
         <p:nvSpPr>
-          <p:cNvPr id="38" name="Shape 27"/>
-          <p:cNvSpPr/>
-          <p:nvPr/>
-        </p:nvSpPr>
-        <p:spPr>
-          <a:xfrm>
-            <a:off x="6583680" y="5212080"/>
+          <p:cNvPr id="30" name="Shape 21"/>
+          <p:cNvSpPr/>
+          <p:nvPr/>
+        </p:nvSpPr>
+        <p:spPr>
+          <a:xfrm>
+            <a:off x="6583680" y="3291840"/>
             <a:ext cx="603504" cy="603504"/>
           </a:xfrm>
           <a:prstGeom prst="ellipse">
@@ -9061,10 +8925,17 @@
           </a:solidFill>
           <a:ln/>
         </p:spPr>
+        <p:txBody>
+          <a:bodyPr/>
+          <a:lstStyle/>
+          <a:p>
+            <a:endParaRPr lang="en-PH"/>
+          </a:p>
+        </p:txBody>
       </p:sp>
       <p:pic>
         <p:nvPicPr>
-          <p:cNvPr id="39" name="Image 9" descr="preencoded.png">    </p:cNvPr>
+          <p:cNvPr id="31" name="Image 7" descr="preencoded.png"/>
           <p:cNvPicPr>
             <a:picLocks noChangeAspect="1"/>
           </p:cNvPicPr>
@@ -9078,7 +8949,7 @@
         </p:blipFill>
         <p:spPr>
           <a:xfrm>
-            <a:off x="6729984" y="5358384"/>
+            <a:off x="6729984" y="3438144"/>
             <a:ext cx="310896" cy="310896"/>
           </a:xfrm>
           <a:prstGeom prst="rect">
@@ -9088,13 +8959,13 @@
       </p:pic>
       <p:sp>
         <p:nvSpPr>
-          <p:cNvPr id="40" name="Text 28"/>
-          <p:cNvSpPr/>
-          <p:nvPr/>
-        </p:nvSpPr>
-        <p:spPr>
-          <a:xfrm>
-            <a:off x="7360920" y="5175504"/>
+          <p:cNvPr id="32" name="Text 22"/>
+          <p:cNvSpPr/>
+          <p:nvPr/>
+        </p:nvSpPr>
+        <p:spPr>
+          <a:xfrm>
+            <a:off x="7360920" y="3255264"/>
             <a:ext cx="4754880" cy="329184"/>
           </a:xfrm>
           <a:prstGeom prst="rect">
@@ -9107,7 +8978,7 @@
           <a:bodyPr wrap="square" lIns="0" tIns="0" rIns="0" bIns="0" rtlCol="0" anchor="ctr"/>
           <a:lstStyle/>
           <a:p>
-            <a:pPr indent="0" marL="0">
+            <a:pPr marL="0" indent="0">
               <a:buNone/>
             </a:pPr>
             <a:r>
@@ -9119,7 +8990,7 @@
                 <a:ea typeface="Trebuchet MS" pitchFamily="34" charset="-122"/>
                 <a:cs typeface="Trebuchet MS" pitchFamily="34" charset="-120"/>
               </a:rPr>
-              <a:t>Graceful degradation</a:t>
+              <a:t>Lifecycle built in</a:t>
             </a:r>
             <a:endParaRPr lang="en-US" sz="1450" dirty="0"/>
           </a:p>
@@ -9127,13 +8998,13 @@
       </p:sp>
       <p:sp>
         <p:nvSpPr>
-          <p:cNvPr id="41" name="Text 29"/>
-          <p:cNvSpPr/>
-          <p:nvPr/>
-        </p:nvSpPr>
-        <p:spPr>
-          <a:xfrm>
-            <a:off x="7360920" y="5522976"/>
+          <p:cNvPr id="33" name="Text 23"/>
+          <p:cNvSpPr/>
+          <p:nvPr/>
+        </p:nvSpPr>
+        <p:spPr>
+          <a:xfrm>
+            <a:off x="7360920" y="3602736"/>
             <a:ext cx="4800600" cy="594360"/>
           </a:xfrm>
           <a:prstGeom prst="rect">
@@ -9146,7 +9017,7 @@
           <a:bodyPr wrap="square" lIns="0" tIns="0" rIns="0" bIns="0" rtlCol="0" anchor="ctr"/>
           <a:lstStyle/>
           <a:p>
-            <a:pPr indent="0" marL="0">
+            <a:pPr marL="0" indent="0">
               <a:buNone/>
             </a:pPr>
             <a:r>
@@ -9158,7 +9029,7 @@
                 <a:ea typeface="Calibri" pitchFamily="34" charset="-122"/>
                 <a:cs typeface="Calibri" pitchFamily="34" charset="-120"/>
               </a:rPr>
-              <a:t>Mock-adapter fallback keeps the app running when a university API is down.</a:t>
+              <a:t>TTL: messages &amp; handoffs 90d (data minimization); university cache 5 min (fresh + cheap).</a:t>
             </a:r>
             <a:endParaRPr lang="en-US" sz="1130" dirty="0"/>
           </a:p>
@@ -9166,30 +9037,81 @@
       </p:sp>
       <p:sp>
         <p:nvSpPr>
-          <p:cNvPr id="42" name="Text 30"/>
-          <p:cNvSpPr/>
-          <p:nvPr/>
-        </p:nvSpPr>
-        <p:spPr>
-          <a:xfrm>
-            <a:off x="502920" y="6400800"/>
-            <a:ext cx="5486400" cy="274320"/>
-          </a:xfrm>
-          <a:prstGeom prst="rect">
-            <a:avLst/>
-          </a:prstGeom>
-          <a:noFill/>
-          <a:ln/>
-        </p:spPr>
-        <p:txBody>
-          <a:bodyPr wrap="square" lIns="0" tIns="0" rIns="0" bIns="0" rtlCol="0" anchor="ctr"/>
-          <a:lstStyle/>
-          <a:p>
-            <a:pPr indent="0" marL="0">
-              <a:buNone/>
-            </a:pPr>
-            <a:r>
-              <a:rPr lang="en-US" sz="950" b="1" spc="100" kern="0" dirty="0">
+          <p:cNvPr id="34" name="Shape 24"/>
+          <p:cNvSpPr/>
+          <p:nvPr/>
+        </p:nvSpPr>
+        <p:spPr>
+          <a:xfrm>
+            <a:off x="6583680" y="4251960"/>
+            <a:ext cx="603504" cy="603504"/>
+          </a:xfrm>
+          <a:prstGeom prst="ellipse">
+            <a:avLst/>
+          </a:prstGeom>
+          <a:solidFill>
+            <a:srgbClr val="2DD4BF"/>
+          </a:solidFill>
+          <a:ln/>
+        </p:spPr>
+        <p:txBody>
+          <a:bodyPr/>
+          <a:lstStyle/>
+          <a:p>
+            <a:endParaRPr lang="en-PH"/>
+          </a:p>
+        </p:txBody>
+      </p:sp>
+      <p:pic>
+        <p:nvPicPr>
+          <p:cNvPr id="35" name="Image 8" descr="preencoded.png"/>
+          <p:cNvPicPr>
+            <a:picLocks noChangeAspect="1"/>
+          </p:cNvPicPr>
+          <p:nvPr/>
+        </p:nvPicPr>
+        <p:blipFill>
+          <a:blip r:embed="rId11"/>
+          <a:stretch>
+            <a:fillRect/>
+          </a:stretch>
+        </p:blipFill>
+        <p:spPr>
+          <a:xfrm>
+            <a:off x="6729984" y="4398264"/>
+            <a:ext cx="310896" cy="310896"/>
+          </a:xfrm>
+          <a:prstGeom prst="rect">
+            <a:avLst/>
+          </a:prstGeom>
+        </p:spPr>
+      </p:pic>
+      <p:sp>
+        <p:nvSpPr>
+          <p:cNvPr id="36" name="Text 25"/>
+          <p:cNvSpPr/>
+          <p:nvPr/>
+        </p:nvSpPr>
+        <p:spPr>
+          <a:xfrm>
+            <a:off x="7360920" y="4215384"/>
+            <a:ext cx="4754880" cy="329184"/>
+          </a:xfrm>
+          <a:prstGeom prst="rect">
+            <a:avLst/>
+          </a:prstGeom>
+          <a:noFill/>
+          <a:ln/>
+        </p:spPr>
+        <p:txBody>
+          <a:bodyPr wrap="square" lIns="0" tIns="0" rIns="0" bIns="0" rtlCol="0" anchor="ctr"/>
+          <a:lstStyle/>
+          <a:p>
+            <a:pPr marL="0" indent="0">
+              <a:buNone/>
+            </a:pPr>
+            <a:r>
+              <a:rPr lang="en-US" sz="1450" b="1" dirty="0">
                 <a:solidFill>
                   <a:srgbClr val="FFFFFF"/>
                 </a:solidFill>
@@ -9197,20 +9119,224 @@
                 <a:ea typeface="Trebuchet MS" pitchFamily="34" charset="-122"/>
                 <a:cs typeface="Trebuchet MS" pitchFamily="34" charset="-120"/>
               </a:rPr>
-              <a:t>ARCHON</a:t>
-            </a:r>
-            <a:pPr indent="0" marL="0">
-              <a:buNone/>
-            </a:pPr>
-            <a:r>
-              <a:rPr lang="en-US" sz="950" spc="100" kern="0" dirty="0">
+              <a:t>Recall in the same store</a:t>
+            </a:r>
+            <a:endParaRPr lang="en-US" sz="1450" dirty="0"/>
+          </a:p>
+        </p:txBody>
+      </p:sp>
+      <p:sp>
+        <p:nvSpPr>
+          <p:cNvPr id="37" name="Text 26"/>
+          <p:cNvSpPr/>
+          <p:nvPr/>
+        </p:nvSpPr>
+        <p:spPr>
+          <a:xfrm>
+            <a:off x="7360920" y="4562856"/>
+            <a:ext cx="4800600" cy="594360"/>
+          </a:xfrm>
+          <a:prstGeom prst="rect">
+            <a:avLst/>
+          </a:prstGeom>
+          <a:noFill/>
+          <a:ln/>
+        </p:spPr>
+        <p:txBody>
+          <a:bodyPr wrap="square" lIns="0" tIns="0" rIns="0" bIns="0" rtlCol="0" anchor="ctr"/>
+          <a:lstStyle/>
+          <a:p>
+            <a:pPr marL="0" indent="0">
+              <a:buNone/>
+            </a:pPr>
+            <a:r>
+              <a:rPr lang="en-US" sz="1130" dirty="0">
                 <a:solidFill>
                   <a:srgbClr val="BFE9E2"/>
+                </a:solidFill>
+                <a:latin typeface="Calibri" pitchFamily="34" charset="0"/>
+                <a:ea typeface="Calibri" pitchFamily="34" charset="-122"/>
+                <a:cs typeface="Calibri" pitchFamily="34" charset="-120"/>
+              </a:rPr>
+              <a:t>Vector search over policy_embeddings powers RAG — no bolt-on vector DB.</a:t>
+            </a:r>
+            <a:endParaRPr lang="en-US" sz="1130" dirty="0"/>
+          </a:p>
+        </p:txBody>
+      </p:sp>
+      <p:sp>
+        <p:nvSpPr>
+          <p:cNvPr id="38" name="Shape 27"/>
+          <p:cNvSpPr/>
+          <p:nvPr/>
+        </p:nvSpPr>
+        <p:spPr>
+          <a:xfrm>
+            <a:off x="6583680" y="5212080"/>
+            <a:ext cx="603504" cy="603504"/>
+          </a:xfrm>
+          <a:prstGeom prst="ellipse">
+            <a:avLst/>
+          </a:prstGeom>
+          <a:solidFill>
+            <a:srgbClr val="2DD4BF"/>
+          </a:solidFill>
+          <a:ln/>
+        </p:spPr>
+        <p:txBody>
+          <a:bodyPr/>
+          <a:lstStyle/>
+          <a:p>
+            <a:endParaRPr lang="en-PH"/>
+          </a:p>
+        </p:txBody>
+      </p:sp>
+      <p:pic>
+        <p:nvPicPr>
+          <p:cNvPr id="39" name="Image 9" descr="preencoded.png"/>
+          <p:cNvPicPr>
+            <a:picLocks noChangeAspect="1"/>
+          </p:cNvPicPr>
+          <p:nvPr/>
+        </p:nvPicPr>
+        <p:blipFill>
+          <a:blip r:embed="rId12"/>
+          <a:stretch>
+            <a:fillRect/>
+          </a:stretch>
+        </p:blipFill>
+        <p:spPr>
+          <a:xfrm>
+            <a:off x="6729984" y="5358384"/>
+            <a:ext cx="310896" cy="310896"/>
+          </a:xfrm>
+          <a:prstGeom prst="rect">
+            <a:avLst/>
+          </a:prstGeom>
+        </p:spPr>
+      </p:pic>
+      <p:sp>
+        <p:nvSpPr>
+          <p:cNvPr id="40" name="Text 28"/>
+          <p:cNvSpPr/>
+          <p:nvPr/>
+        </p:nvSpPr>
+        <p:spPr>
+          <a:xfrm>
+            <a:off x="7360920" y="5175504"/>
+            <a:ext cx="4754880" cy="329184"/>
+          </a:xfrm>
+          <a:prstGeom prst="rect">
+            <a:avLst/>
+          </a:prstGeom>
+          <a:noFill/>
+          <a:ln/>
+        </p:spPr>
+        <p:txBody>
+          <a:bodyPr wrap="square" lIns="0" tIns="0" rIns="0" bIns="0" rtlCol="0" anchor="ctr"/>
+          <a:lstStyle/>
+          <a:p>
+            <a:pPr marL="0" indent="0">
+              <a:buNone/>
+            </a:pPr>
+            <a:r>
+              <a:rPr lang="en-US" sz="1450" b="1" dirty="0">
+                <a:solidFill>
+                  <a:srgbClr val="FFFFFF"/>
                 </a:solidFill>
                 <a:latin typeface="Trebuchet MS" pitchFamily="34" charset="0"/>
                 <a:ea typeface="Trebuchet MS" pitchFamily="34" charset="-122"/>
                 <a:cs typeface="Trebuchet MS" pitchFamily="34" charset="-120"/>
               </a:rPr>
+              <a:t>Graceful degradation</a:t>
+            </a:r>
+            <a:endParaRPr lang="en-US" sz="1450" dirty="0"/>
+          </a:p>
+        </p:txBody>
+      </p:sp>
+      <p:sp>
+        <p:nvSpPr>
+          <p:cNvPr id="41" name="Text 29"/>
+          <p:cNvSpPr/>
+          <p:nvPr/>
+        </p:nvSpPr>
+        <p:spPr>
+          <a:xfrm>
+            <a:off x="7360920" y="5522976"/>
+            <a:ext cx="4800600" cy="594360"/>
+          </a:xfrm>
+          <a:prstGeom prst="rect">
+            <a:avLst/>
+          </a:prstGeom>
+          <a:noFill/>
+          <a:ln/>
+        </p:spPr>
+        <p:txBody>
+          <a:bodyPr wrap="square" lIns="0" tIns="0" rIns="0" bIns="0" rtlCol="0" anchor="ctr"/>
+          <a:lstStyle/>
+          <a:p>
+            <a:pPr marL="0" indent="0">
+              <a:buNone/>
+            </a:pPr>
+            <a:r>
+              <a:rPr lang="en-US" sz="1130" dirty="0">
+                <a:solidFill>
+                  <a:srgbClr val="BFE9E2"/>
+                </a:solidFill>
+                <a:latin typeface="Calibri" pitchFamily="34" charset="0"/>
+                <a:ea typeface="Calibri" pitchFamily="34" charset="-122"/>
+                <a:cs typeface="Calibri" pitchFamily="34" charset="-120"/>
+              </a:rPr>
+              <a:t>Mock-adapter fallback keeps the app running when a university API is down.</a:t>
+            </a:r>
+            <a:endParaRPr lang="en-US" sz="1130" dirty="0"/>
+          </a:p>
+        </p:txBody>
+      </p:sp>
+      <p:sp>
+        <p:nvSpPr>
+          <p:cNvPr id="42" name="Text 30"/>
+          <p:cNvSpPr/>
+          <p:nvPr/>
+        </p:nvSpPr>
+        <p:spPr>
+          <a:xfrm>
+            <a:off x="502920" y="6400800"/>
+            <a:ext cx="5486400" cy="274320"/>
+          </a:xfrm>
+          <a:prstGeom prst="rect">
+            <a:avLst/>
+          </a:prstGeom>
+          <a:noFill/>
+          <a:ln/>
+        </p:spPr>
+        <p:txBody>
+          <a:bodyPr wrap="square" lIns="0" tIns="0" rIns="0" bIns="0" rtlCol="0" anchor="ctr"/>
+          <a:lstStyle/>
+          <a:p>
+            <a:pPr marL="0" indent="0">
+              <a:buNone/>
+            </a:pPr>
+            <a:r>
+              <a:rPr lang="en-US" sz="950" b="1" kern="0" spc="100" dirty="0">
+                <a:solidFill>
+                  <a:srgbClr val="FFFFFF"/>
+                </a:solidFill>
+                <a:latin typeface="Trebuchet MS" pitchFamily="34" charset="0"/>
+                <a:ea typeface="Trebuchet MS" pitchFamily="34" charset="-122"/>
+                <a:cs typeface="Trebuchet MS" pitchFamily="34" charset="-120"/>
+              </a:rPr>
+              <a:t>ARCHON</a:t>
+            </a:r>
+            <a:r>
+              <a:rPr lang="en-US" sz="950" kern="0" spc="100" dirty="0">
+                <a:solidFill>
+                  <a:srgbClr val="BFE9E2"/>
+                </a:solidFill>
+                <a:latin typeface="Trebuchet MS" pitchFamily="34" charset="0"/>
+                <a:ea typeface="Trebuchet MS" pitchFamily="34" charset="-122"/>
+                <a:cs typeface="Trebuchet MS" pitchFamily="34" charset="-120"/>
+              </a:rPr>
               <a:t>   ·   Axon Enjin</a:t>
             </a:r>
             <a:endParaRPr lang="en-US" sz="950" dirty="0"/>
@@ -9238,7 +9364,7 @@
           <a:bodyPr wrap="square" lIns="0" tIns="0" rIns="0" bIns="0" rtlCol="0" anchor="ctr"/>
           <a:lstStyle/>
           <a:p>
-            <a:pPr algn="r" indent="0" marL="0">
+            <a:pPr marL="0" indent="0" algn="r">
               <a:buNone/>
             </a:pPr>
             <a:r>
@@ -9272,6 +9398,7 @@
         <a:solidFill>
           <a:srgbClr val="FFFFFF"/>
         </a:solidFill>
+        <a:effectLst/>
       </p:bgPr>
     </p:bg>
     <p:spTree>
@@ -9309,11 +9436,11 @@
           <a:bodyPr wrap="square" lIns="0" tIns="0" rIns="0" bIns="0" rtlCol="0" anchor="ctr"/>
           <a:lstStyle/>
           <a:p>
-            <a:pPr indent="0" marL="0">
-              <a:buNone/>
-            </a:pPr>
-            <a:r>
-              <a:rPr lang="en-US" sz="1250" b="1" spc="200" kern="0" dirty="0">
+            <a:pPr marL="0" indent="0">
+              <a:buNone/>
+            </a:pPr>
+            <a:r>
+              <a:rPr lang="en-US" sz="1250" b="1" kern="0" spc="200" dirty="0">
                 <a:solidFill>
                   <a:srgbClr val="1F8A7D"/>
                 </a:solidFill>
@@ -9348,7 +9475,7 @@
           <a:bodyPr wrap="square" lIns="0" tIns="0" rIns="0" bIns="0" rtlCol="0" anchor="ctr"/>
           <a:lstStyle/>
           <a:p>
-            <a:pPr indent="0" marL="0">
+            <a:pPr marL="0" indent="0">
               <a:buNone/>
             </a:pPr>
             <a:r>
@@ -9387,7 +9514,7 @@
           <a:bodyPr wrap="square" lIns="0" tIns="0" rIns="0" bIns="0" rtlCol="0" anchor="ctr"/>
           <a:lstStyle/>
           <a:p>
-            <a:pPr indent="0" marL="0">
+            <a:pPr marL="0" indent="0">
               <a:buNone/>
             </a:pPr>
             <a:r>
@@ -9426,11 +9553,11 @@
           <a:bodyPr wrap="square" lIns="0" tIns="0" rIns="0" bIns="0" rtlCol="0" anchor="ctr"/>
           <a:lstStyle/>
           <a:p>
-            <a:pPr indent="0" marL="0">
-              <a:buNone/>
-            </a:pPr>
-            <a:r>
-              <a:rPr lang="en-US" sz="1200" b="1" spc="200" kern="0" dirty="0">
+            <a:pPr marL="0" indent="0">
+              <a:buNone/>
+            </a:pPr>
+            <a:r>
+              <a:rPr lang="en-US" sz="1200" b="1" kern="0" spc="200" dirty="0">
                 <a:solidFill>
                   <a:srgbClr val="1F8A7D"/>
                 </a:solidFill>
@@ -9465,6 +9592,13 @@
           </a:solidFill>
           <a:ln/>
         </p:spPr>
+        <p:txBody>
+          <a:bodyPr/>
+          <a:lstStyle/>
+          <a:p>
+            <a:endParaRPr lang="en-PH"/>
+          </a:p>
+        </p:txBody>
       </p:sp>
       <p:sp>
         <p:nvSpPr>
@@ -9485,397 +9619,24 @@
           </a:solidFill>
           <a:ln/>
           <a:effectLst>
-            <a:outerShdw sx="100000" sy="100000" kx="0" ky="0" algn="bl" rotWithShape="0" blurRad="114300" dist="38100" dir="5400000">
+            <a:outerShdw blurRad="114300" dist="38100" dir="5400000" algn="bl" rotWithShape="0">
               <a:srgbClr val="0A2E2B">
                 <a:alpha val="18000"/>
               </a:srgbClr>
             </a:outerShdw>
           </a:effectLst>
         </p:spPr>
+        <p:txBody>
+          <a:bodyPr/>
+          <a:lstStyle/>
+          <a:p>
+            <a:endParaRPr lang="en-PH"/>
+          </a:p>
+        </p:txBody>
       </p:sp>
       <p:pic>
         <p:nvPicPr>
-          <p:cNvPr id="8" name="Image 0" descr="preencoded.png">    </p:cNvPr>
-          <p:cNvPicPr>
-            <a:picLocks noChangeAspect="1"/>
-          </p:cNvPicPr>
-          <p:nvPr/>
-        </p:nvPicPr>
-        <p:blipFill>
-          <a:blip r:embed="rId1"/>
-          <a:stretch>
-            <a:fillRect/>
-          </a:stretch>
-        </p:blipFill>
-        <p:spPr>
-          <a:xfrm>
-            <a:off x="1261872" y="3182112"/>
-            <a:ext cx="448056" cy="448056"/>
-          </a:xfrm>
-          <a:prstGeom prst="rect">
-            <a:avLst/>
-          </a:prstGeom>
-        </p:spPr>
-      </p:pic>
-      <p:sp>
-        <p:nvSpPr>
-          <p:cNvPr id="9" name="Text 6"/>
-          <p:cNvSpPr/>
-          <p:nvPr/>
-        </p:nvSpPr>
-        <p:spPr>
-          <a:xfrm>
-            <a:off x="1033272" y="3977640"/>
-            <a:ext cx="2194560" cy="548640"/>
-          </a:xfrm>
-          <a:prstGeom prst="rect">
-            <a:avLst/>
-          </a:prstGeom>
-          <a:noFill/>
-          <a:ln/>
-        </p:spPr>
-        <p:txBody>
-          <a:bodyPr wrap="square" lIns="0" tIns="0" rIns="0" bIns="0" rtlCol="0" anchor="ctr"/>
-          <a:lstStyle/>
-          <a:p>
-            <a:pPr indent="0" marL="0">
-              <a:buNone/>
-            </a:pPr>
-            <a:r>
-              <a:rPr lang="en-US" sz="1500" b="1" dirty="0">
-                <a:solidFill>
-                  <a:srgbClr val="0A2E2B"/>
-                </a:solidFill>
-                <a:latin typeface="Trebuchet MS" pitchFamily="34" charset="0"/>
-                <a:ea typeface="Trebuchet MS" pitchFamily="34" charset="-122"/>
-                <a:cs typeface="Trebuchet MS" pitchFamily="34" charset="-120"/>
-              </a:rPr>
-              <a:t>Microsoft Entra ID</a:t>
-            </a:r>
-            <a:endParaRPr lang="en-US" sz="1500" dirty="0"/>
-          </a:p>
-        </p:txBody>
-      </p:sp>
-      <p:sp>
-        <p:nvSpPr>
-          <p:cNvPr id="10" name="Text 7"/>
-          <p:cNvSpPr/>
-          <p:nvPr/>
-        </p:nvSpPr>
-        <p:spPr>
-          <a:xfrm>
-            <a:off x="1033272" y="4526280"/>
-            <a:ext cx="2194560" cy="731520"/>
-          </a:xfrm>
-          <a:prstGeom prst="rect">
-            <a:avLst/>
-          </a:prstGeom>
-          <a:noFill/>
-          <a:ln/>
-        </p:spPr>
-        <p:txBody>
-          <a:bodyPr wrap="square" lIns="0" tIns="0" rIns="0" bIns="0" rtlCol="0" anchor="ctr"/>
-          <a:lstStyle/>
-          <a:p>
-            <a:pPr indent="0" marL="0">
-              <a:buNone/>
-            </a:pPr>
-            <a:r>
-              <a:rPr lang="en-US" sz="1150" dirty="0">
-                <a:solidFill>
-                  <a:srgbClr val="3C5A56"/>
-                </a:solidFill>
-                <a:latin typeface="Calibri" pitchFamily="34" charset="0"/>
-                <a:ea typeface="Calibri" pitchFamily="34" charset="-122"/>
-                <a:cs typeface="Calibri" pitchFamily="34" charset="-120"/>
-              </a:rPr>
-              <a:t>Single sign-on (OIDC) with the student's existing university account.</a:t>
-            </a:r>
-            <a:endParaRPr lang="en-US" sz="1150" dirty="0"/>
-          </a:p>
-        </p:txBody>
-      </p:sp>
-      <p:sp>
-        <p:nvSpPr>
-          <p:cNvPr id="11" name="Text 8"/>
-          <p:cNvSpPr/>
-          <p:nvPr/>
-        </p:nvSpPr>
-        <p:spPr>
-          <a:xfrm>
-            <a:off x="3630168" y="2331720"/>
-            <a:ext cx="2560320" cy="274320"/>
-          </a:xfrm>
-          <a:prstGeom prst="rect">
-            <a:avLst/>
-          </a:prstGeom>
-          <a:noFill/>
-          <a:ln/>
-        </p:spPr>
-        <p:txBody>
-          <a:bodyPr wrap="square" lIns="0" tIns="0" rIns="0" bIns="0" rtlCol="0" anchor="ctr"/>
-          <a:lstStyle/>
-          <a:p>
-            <a:pPr indent="0" marL="0">
-              <a:buNone/>
-            </a:pPr>
-            <a:r>
-              <a:rPr lang="en-US" sz="1200" b="1" spc="200" kern="0" dirty="0">
-                <a:solidFill>
-                  <a:srgbClr val="1F8A7D"/>
-                </a:solidFill>
-                <a:latin typeface="Trebuchet MS" pitchFamily="34" charset="0"/>
-                <a:ea typeface="Trebuchet MS" pitchFamily="34" charset="-122"/>
-                <a:cs typeface="Trebuchet MS" pitchFamily="34" charset="-120"/>
-              </a:rPr>
-              <a:t>AI</a:t>
-            </a:r>
-            <a:endParaRPr lang="en-US" sz="1200" dirty="0"/>
-          </a:p>
-        </p:txBody>
-      </p:sp>
-      <p:sp>
-        <p:nvSpPr>
-          <p:cNvPr id="12" name="Shape 9"/>
-          <p:cNvSpPr/>
-          <p:nvPr/>
-        </p:nvSpPr>
-        <p:spPr>
-          <a:xfrm>
-            <a:off x="3630168" y="2697480"/>
-            <a:ext cx="2606040" cy="2651760"/>
-          </a:xfrm>
-          <a:prstGeom prst="roundRect">
-            <a:avLst>
-              <a:gd name="adj" fmla="val 3509"/>
-            </a:avLst>
-          </a:prstGeom>
-          <a:solidFill>
-            <a:srgbClr val="F1F6F5"/>
-          </a:solidFill>
-          <a:ln/>
-        </p:spPr>
-      </p:sp>
-      <p:sp>
-        <p:nvSpPr>
-          <p:cNvPr id="13" name="Shape 10"/>
-          <p:cNvSpPr/>
-          <p:nvPr/>
-        </p:nvSpPr>
-        <p:spPr>
-          <a:xfrm>
-            <a:off x="3904488" y="2971800"/>
-            <a:ext cx="868680" cy="868680"/>
-          </a:xfrm>
-          <a:prstGeom prst="ellipse">
-            <a:avLst/>
-          </a:prstGeom>
-          <a:solidFill>
-            <a:srgbClr val="FFFFFF"/>
-          </a:solidFill>
-          <a:ln/>
-          <a:effectLst>
-            <a:outerShdw sx="100000" sy="100000" kx="0" ky="0" algn="bl" rotWithShape="0" blurRad="114300" dist="38100" dir="5400000">
-              <a:srgbClr val="0A2E2B">
-                <a:alpha val="18000"/>
-              </a:srgbClr>
-            </a:outerShdw>
-          </a:effectLst>
-        </p:spPr>
-      </p:sp>
-      <p:pic>
-        <p:nvPicPr>
-          <p:cNvPr id="14" name="Image 1" descr="preencoded.png">    </p:cNvPr>
-          <p:cNvPicPr>
-            <a:picLocks noChangeAspect="1"/>
-          </p:cNvPicPr>
-          <p:nvPr/>
-        </p:nvPicPr>
-        <p:blipFill>
-          <a:blip r:embed="rId2"/>
-          <a:stretch>
-            <a:fillRect/>
-          </a:stretch>
-        </p:blipFill>
-        <p:spPr>
-          <a:xfrm>
-            <a:off x="4114800" y="3182112"/>
-            <a:ext cx="448056" cy="448056"/>
-          </a:xfrm>
-          <a:prstGeom prst="rect">
-            <a:avLst/>
-          </a:prstGeom>
-        </p:spPr>
-      </p:pic>
-      <p:sp>
-        <p:nvSpPr>
-          <p:cNvPr id="15" name="Text 11"/>
-          <p:cNvSpPr/>
-          <p:nvPr/>
-        </p:nvSpPr>
-        <p:spPr>
-          <a:xfrm>
-            <a:off x="3886200" y="3977640"/>
-            <a:ext cx="2194560" cy="548640"/>
-          </a:xfrm>
-          <a:prstGeom prst="rect">
-            <a:avLst/>
-          </a:prstGeom>
-          <a:noFill/>
-          <a:ln/>
-        </p:spPr>
-        <p:txBody>
-          <a:bodyPr wrap="square" lIns="0" tIns="0" rIns="0" bIns="0" rtlCol="0" anchor="ctr"/>
-          <a:lstStyle/>
-          <a:p>
-            <a:pPr indent="0" marL="0">
-              <a:buNone/>
-            </a:pPr>
-            <a:r>
-              <a:rPr lang="en-US" sz="1500" b="1" dirty="0">
-                <a:solidFill>
-                  <a:srgbClr val="0A2E2B"/>
-                </a:solidFill>
-                <a:latin typeface="Trebuchet MS" pitchFamily="34" charset="0"/>
-                <a:ea typeface="Trebuchet MS" pitchFamily="34" charset="-122"/>
-                <a:cs typeface="Trebuchet MS" pitchFamily="34" charset="-120"/>
-              </a:rPr>
-              <a:t>Azure AI Foundry</a:t>
-            </a:r>
-            <a:endParaRPr lang="en-US" sz="1500" dirty="0"/>
-          </a:p>
-        </p:txBody>
-      </p:sp>
-      <p:sp>
-        <p:nvSpPr>
-          <p:cNvPr id="16" name="Text 12"/>
-          <p:cNvSpPr/>
-          <p:nvPr/>
-        </p:nvSpPr>
-        <p:spPr>
-          <a:xfrm>
-            <a:off x="3886200" y="4526280"/>
-            <a:ext cx="2194560" cy="731520"/>
-          </a:xfrm>
-          <a:prstGeom prst="rect">
-            <a:avLst/>
-          </a:prstGeom>
-          <a:noFill/>
-          <a:ln/>
-        </p:spPr>
-        <p:txBody>
-          <a:bodyPr wrap="square" lIns="0" tIns="0" rIns="0" bIns="0" rtlCol="0" anchor="ctr"/>
-          <a:lstStyle/>
-          <a:p>
-            <a:pPr indent="0" marL="0">
-              <a:buNone/>
-            </a:pPr>
-            <a:r>
-              <a:rPr lang="en-US" sz="1150" dirty="0">
-                <a:solidFill>
-                  <a:srgbClr val="3C5A56"/>
-                </a:solidFill>
-                <a:latin typeface="Calibri" pitchFamily="34" charset="0"/>
-                <a:ea typeface="Calibri" pitchFamily="34" charset="-122"/>
-                <a:cs typeface="Calibri" pitchFamily="34" charset="-120"/>
-              </a:rPr>
-              <a:t>GPT-4o for reasoning + Phi-4 for low-cost intent routing.</a:t>
-            </a:r>
-            <a:endParaRPr lang="en-US" sz="1150" dirty="0"/>
-          </a:p>
-        </p:txBody>
-      </p:sp>
-      <p:sp>
-        <p:nvSpPr>
-          <p:cNvPr id="17" name="Text 13"/>
-          <p:cNvSpPr/>
-          <p:nvPr/>
-        </p:nvSpPr>
-        <p:spPr>
-          <a:xfrm>
-            <a:off x="6483096" y="2331720"/>
-            <a:ext cx="2560320" cy="274320"/>
-          </a:xfrm>
-          <a:prstGeom prst="rect">
-            <a:avLst/>
-          </a:prstGeom>
-          <a:noFill/>
-          <a:ln/>
-        </p:spPr>
-        <p:txBody>
-          <a:bodyPr wrap="square" lIns="0" tIns="0" rIns="0" bIns="0" rtlCol="0" anchor="ctr"/>
-          <a:lstStyle/>
-          <a:p>
-            <a:pPr indent="0" marL="0">
-              <a:buNone/>
-            </a:pPr>
-            <a:r>
-              <a:rPr lang="en-US" sz="1200" b="1" spc="200" kern="0" dirty="0">
-                <a:solidFill>
-                  <a:srgbClr val="1F8A7D"/>
-                </a:solidFill>
-                <a:latin typeface="Trebuchet MS" pitchFamily="34" charset="0"/>
-                <a:ea typeface="Trebuchet MS" pitchFamily="34" charset="-122"/>
-                <a:cs typeface="Trebuchet MS" pitchFamily="34" charset="-120"/>
-              </a:rPr>
-              <a:t>DATA</a:t>
-            </a:r>
-            <a:endParaRPr lang="en-US" sz="1200" dirty="0"/>
-          </a:p>
-        </p:txBody>
-      </p:sp>
-      <p:sp>
-        <p:nvSpPr>
-          <p:cNvPr id="18" name="Shape 14"/>
-          <p:cNvSpPr/>
-          <p:nvPr/>
-        </p:nvSpPr>
-        <p:spPr>
-          <a:xfrm>
-            <a:off x="6483096" y="2697480"/>
-            <a:ext cx="2606040" cy="2651760"/>
-          </a:xfrm>
-          <a:prstGeom prst="roundRect">
-            <a:avLst>
-              <a:gd name="adj" fmla="val 3509"/>
-            </a:avLst>
-          </a:prstGeom>
-          <a:solidFill>
-            <a:srgbClr val="F1F6F5"/>
-          </a:solidFill>
-          <a:ln/>
-        </p:spPr>
-      </p:sp>
-      <p:sp>
-        <p:nvSpPr>
-          <p:cNvPr id="19" name="Shape 15"/>
-          <p:cNvSpPr/>
-          <p:nvPr/>
-        </p:nvSpPr>
-        <p:spPr>
-          <a:xfrm>
-            <a:off x="6757416" y="2971800"/>
-            <a:ext cx="868680" cy="868680"/>
-          </a:xfrm>
-          <a:prstGeom prst="ellipse">
-            <a:avLst/>
-          </a:prstGeom>
-          <a:solidFill>
-            <a:srgbClr val="FFFFFF"/>
-          </a:solidFill>
-          <a:ln/>
-          <a:effectLst>
-            <a:outerShdw sx="100000" sy="100000" kx="0" ky="0" algn="bl" rotWithShape="0" blurRad="114300" dist="38100" dir="5400000">
-              <a:srgbClr val="0A2E2B">
-                <a:alpha val="18000"/>
-              </a:srgbClr>
-            </a:outerShdw>
-          </a:effectLst>
-        </p:spPr>
-      </p:sp>
-      <p:pic>
-        <p:nvPicPr>
-          <p:cNvPr id="20" name="Image 2" descr="preencoded.png">    </p:cNvPr>
+          <p:cNvPr id="8" name="Image 0" descr="preencoded.png"/>
           <p:cNvPicPr>
             <a:picLocks noChangeAspect="1"/>
           </p:cNvPicPr>
@@ -9889,7 +9650,7 @@
         </p:blipFill>
         <p:spPr>
           <a:xfrm>
-            <a:off x="6967728" y="3182112"/>
+            <a:off x="1261872" y="3182112"/>
             <a:ext cx="448056" cy="448056"/>
           </a:xfrm>
           <a:prstGeom prst="rect">
@@ -9899,13 +9660,13 @@
       </p:pic>
       <p:sp>
         <p:nvSpPr>
-          <p:cNvPr id="21" name="Text 16"/>
-          <p:cNvSpPr/>
-          <p:nvPr/>
-        </p:nvSpPr>
-        <p:spPr>
-          <a:xfrm>
-            <a:off x="6739128" y="3977640"/>
+          <p:cNvPr id="9" name="Text 6"/>
+          <p:cNvSpPr/>
+          <p:nvPr/>
+        </p:nvSpPr>
+        <p:spPr>
+          <a:xfrm>
+            <a:off x="1033272" y="3977640"/>
             <a:ext cx="2194560" cy="548640"/>
           </a:xfrm>
           <a:prstGeom prst="rect">
@@ -9918,7 +9679,7 @@
           <a:bodyPr wrap="square" lIns="0" tIns="0" rIns="0" bIns="0" rtlCol="0" anchor="ctr"/>
           <a:lstStyle/>
           <a:p>
-            <a:pPr indent="0" marL="0">
+            <a:pPr marL="0" indent="0">
               <a:buNone/>
             </a:pPr>
             <a:r>
@@ -9930,7 +9691,7 @@
                 <a:ea typeface="Trebuchet MS" pitchFamily="34" charset="-122"/>
                 <a:cs typeface="Trebuchet MS" pitchFamily="34" charset="-120"/>
               </a:rPr>
-              <a:t>Azure Cosmos DB</a:t>
+              <a:t>Microsoft Entra ID</a:t>
             </a:r>
             <a:endParaRPr lang="en-US" sz="1500" dirty="0"/>
           </a:p>
@@ -9938,13 +9699,13 @@
       </p:sp>
       <p:sp>
         <p:nvSpPr>
-          <p:cNvPr id="22" name="Text 17"/>
-          <p:cNvSpPr/>
-          <p:nvPr/>
-        </p:nvSpPr>
-        <p:spPr>
-          <a:xfrm>
-            <a:off x="6739128" y="4526280"/>
+          <p:cNvPr id="10" name="Text 7"/>
+          <p:cNvSpPr/>
+          <p:nvPr/>
+        </p:nvSpPr>
+        <p:spPr>
+          <a:xfrm>
+            <a:off x="1033272" y="4526280"/>
             <a:ext cx="2194560" cy="731520"/>
           </a:xfrm>
           <a:prstGeom prst="rect">
@@ -9957,7 +9718,7 @@
           <a:bodyPr wrap="square" lIns="0" tIns="0" rIns="0" bIns="0" rtlCol="0" anchor="ctr"/>
           <a:lstStyle/>
           <a:p>
-            <a:pPr indent="0" marL="0">
+            <a:pPr marL="0" indent="0">
               <a:buNone/>
             </a:pPr>
             <a:r>
@@ -9969,7 +9730,7 @@
                 <a:ea typeface="Calibri" pitchFamily="34" charset="-122"/>
                 <a:cs typeface="Calibri" pitchFamily="34" charset="-120"/>
               </a:rPr>
-              <a:t>NoSQL records + native vector search in one serverless store.</a:t>
+              <a:t>Single sign-on (OIDC) with the student's existing university account.</a:t>
             </a:r>
             <a:endParaRPr lang="en-US" sz="1150" dirty="0"/>
           </a:p>
@@ -9977,13 +9738,13 @@
       </p:sp>
       <p:sp>
         <p:nvSpPr>
-          <p:cNvPr id="23" name="Text 18"/>
-          <p:cNvSpPr/>
-          <p:nvPr/>
-        </p:nvSpPr>
-        <p:spPr>
-          <a:xfrm>
-            <a:off x="9336024" y="2331720"/>
+          <p:cNvPr id="11" name="Text 8"/>
+          <p:cNvSpPr/>
+          <p:nvPr/>
+        </p:nvSpPr>
+        <p:spPr>
+          <a:xfrm>
+            <a:off x="3630168" y="2331720"/>
             <a:ext cx="2560320" cy="274320"/>
           </a:xfrm>
           <a:prstGeom prst="rect">
@@ -9996,11 +9757,11 @@
           <a:bodyPr wrap="square" lIns="0" tIns="0" rIns="0" bIns="0" rtlCol="0" anchor="ctr"/>
           <a:lstStyle/>
           <a:p>
-            <a:pPr indent="0" marL="0">
-              <a:buNone/>
-            </a:pPr>
-            <a:r>
-              <a:rPr lang="en-US" sz="1200" b="1" spc="200" kern="0" dirty="0">
+            <a:pPr marL="0" indent="0">
+              <a:buNone/>
+            </a:pPr>
+            <a:r>
+              <a:rPr lang="en-US" sz="1200" b="1" kern="0" spc="200" dirty="0">
                 <a:solidFill>
                   <a:srgbClr val="1F8A7D"/>
                 </a:solidFill>
@@ -10008,7 +9769,7 @@
                 <a:ea typeface="Trebuchet MS" pitchFamily="34" charset="-122"/>
                 <a:cs typeface="Trebuchet MS" pitchFamily="34" charset="-120"/>
               </a:rPr>
-              <a:t>DELIVERY</a:t>
+              <a:t>AI</a:t>
             </a:r>
             <a:endParaRPr lang="en-US" sz="1200" dirty="0"/>
           </a:p>
@@ -10016,13 +9777,13 @@
       </p:sp>
       <p:sp>
         <p:nvSpPr>
-          <p:cNvPr id="24" name="Shape 19"/>
-          <p:cNvSpPr/>
-          <p:nvPr/>
-        </p:nvSpPr>
-        <p:spPr>
-          <a:xfrm>
-            <a:off x="9336024" y="2697480"/>
+          <p:cNvPr id="12" name="Shape 9"/>
+          <p:cNvSpPr/>
+          <p:nvPr/>
+        </p:nvSpPr>
+        <p:spPr>
+          <a:xfrm>
+            <a:off x="3630168" y="2697480"/>
             <a:ext cx="2606040" cy="2651760"/>
           </a:xfrm>
           <a:prstGeom prst="roundRect">
@@ -10035,16 +9796,23 @@
           </a:solidFill>
           <a:ln/>
         </p:spPr>
-      </p:sp>
-      <p:sp>
-        <p:nvSpPr>
-          <p:cNvPr id="25" name="Shape 20"/>
-          <p:cNvSpPr/>
-          <p:nvPr/>
-        </p:nvSpPr>
-        <p:spPr>
-          <a:xfrm>
-            <a:off x="9610344" y="2971800"/>
+        <p:txBody>
+          <a:bodyPr/>
+          <a:lstStyle/>
+          <a:p>
+            <a:endParaRPr lang="en-PH"/>
+          </a:p>
+        </p:txBody>
+      </p:sp>
+      <p:sp>
+        <p:nvSpPr>
+          <p:cNvPr id="13" name="Shape 10"/>
+          <p:cNvSpPr/>
+          <p:nvPr/>
+        </p:nvSpPr>
+        <p:spPr>
+          <a:xfrm>
+            <a:off x="3904488" y="2971800"/>
             <a:ext cx="868680" cy="868680"/>
           </a:xfrm>
           <a:prstGeom prst="ellipse">
@@ -10055,17 +9823,24 @@
           </a:solidFill>
           <a:ln/>
           <a:effectLst>
-            <a:outerShdw sx="100000" sy="100000" kx="0" ky="0" algn="bl" rotWithShape="0" blurRad="114300" dist="38100" dir="5400000">
+            <a:outerShdw blurRad="114300" dist="38100" dir="5400000" algn="bl" rotWithShape="0">
               <a:srgbClr val="0A2E2B">
                 <a:alpha val="18000"/>
               </a:srgbClr>
             </a:outerShdw>
           </a:effectLst>
         </p:spPr>
+        <p:txBody>
+          <a:bodyPr/>
+          <a:lstStyle/>
+          <a:p>
+            <a:endParaRPr lang="en-PH"/>
+          </a:p>
+        </p:txBody>
       </p:sp>
       <p:pic>
         <p:nvPicPr>
-          <p:cNvPr id="26" name="Image 3" descr="preencoded.png">    </p:cNvPr>
+          <p:cNvPr id="14" name="Image 1" descr="preencoded.png"/>
           <p:cNvPicPr>
             <a:picLocks noChangeAspect="1"/>
           </p:cNvPicPr>
@@ -10079,7 +9854,7 @@
         </p:blipFill>
         <p:spPr>
           <a:xfrm>
-            <a:off x="9820656" y="3182112"/>
+            <a:off x="4114800" y="3182112"/>
             <a:ext cx="448056" cy="448056"/>
           </a:xfrm>
           <a:prstGeom prst="rect">
@@ -10089,13 +9864,13 @@
       </p:pic>
       <p:sp>
         <p:nvSpPr>
-          <p:cNvPr id="27" name="Text 21"/>
-          <p:cNvSpPr/>
-          <p:nvPr/>
-        </p:nvSpPr>
-        <p:spPr>
-          <a:xfrm>
-            <a:off x="9592056" y="3977640"/>
+          <p:cNvPr id="15" name="Text 11"/>
+          <p:cNvSpPr/>
+          <p:nvPr/>
+        </p:nvSpPr>
+        <p:spPr>
+          <a:xfrm>
+            <a:off x="3886200" y="3977640"/>
             <a:ext cx="2194560" cy="548640"/>
           </a:xfrm>
           <a:prstGeom prst="rect">
@@ -10108,7 +9883,7 @@
           <a:bodyPr wrap="square" lIns="0" tIns="0" rIns="0" bIns="0" rtlCol="0" anchor="ctr"/>
           <a:lstStyle/>
           <a:p>
-            <a:pPr indent="0" marL="0">
+            <a:pPr marL="0" indent="0">
               <a:buNone/>
             </a:pPr>
             <a:r>
@@ -10120,6 +9895,414 @@
                 <a:ea typeface="Trebuchet MS" pitchFamily="34" charset="-122"/>
                 <a:cs typeface="Trebuchet MS" pitchFamily="34" charset="-120"/>
               </a:rPr>
+              <a:t>Azure AI Foundry</a:t>
+            </a:r>
+            <a:endParaRPr lang="en-US" sz="1500" dirty="0"/>
+          </a:p>
+        </p:txBody>
+      </p:sp>
+      <p:sp>
+        <p:nvSpPr>
+          <p:cNvPr id="16" name="Text 12"/>
+          <p:cNvSpPr/>
+          <p:nvPr/>
+        </p:nvSpPr>
+        <p:spPr>
+          <a:xfrm>
+            <a:off x="3886200" y="4526280"/>
+            <a:ext cx="2194560" cy="731520"/>
+          </a:xfrm>
+          <a:prstGeom prst="rect">
+            <a:avLst/>
+          </a:prstGeom>
+          <a:noFill/>
+          <a:ln/>
+        </p:spPr>
+        <p:txBody>
+          <a:bodyPr wrap="square" lIns="0" tIns="0" rIns="0" bIns="0" rtlCol="0" anchor="ctr"/>
+          <a:lstStyle/>
+          <a:p>
+            <a:pPr marL="0" indent="0">
+              <a:buNone/>
+            </a:pPr>
+            <a:r>
+              <a:rPr lang="en-US" sz="1150" dirty="0">
+                <a:solidFill>
+                  <a:srgbClr val="3C5A56"/>
+                </a:solidFill>
+                <a:latin typeface="Calibri" pitchFamily="34" charset="0"/>
+                <a:ea typeface="Calibri" pitchFamily="34" charset="-122"/>
+                <a:cs typeface="Calibri" pitchFamily="34" charset="-120"/>
+              </a:rPr>
+              <a:t>GPT-4o for reasoning + Phi-4 for low-cost intent routing.</a:t>
+            </a:r>
+            <a:endParaRPr lang="en-US" sz="1150" dirty="0"/>
+          </a:p>
+        </p:txBody>
+      </p:sp>
+      <p:sp>
+        <p:nvSpPr>
+          <p:cNvPr id="17" name="Text 13"/>
+          <p:cNvSpPr/>
+          <p:nvPr/>
+        </p:nvSpPr>
+        <p:spPr>
+          <a:xfrm>
+            <a:off x="6483096" y="2331720"/>
+            <a:ext cx="2560320" cy="274320"/>
+          </a:xfrm>
+          <a:prstGeom prst="rect">
+            <a:avLst/>
+          </a:prstGeom>
+          <a:noFill/>
+          <a:ln/>
+        </p:spPr>
+        <p:txBody>
+          <a:bodyPr wrap="square" lIns="0" tIns="0" rIns="0" bIns="0" rtlCol="0" anchor="ctr"/>
+          <a:lstStyle/>
+          <a:p>
+            <a:pPr marL="0" indent="0">
+              <a:buNone/>
+            </a:pPr>
+            <a:r>
+              <a:rPr lang="en-US" sz="1200" b="1" kern="0" spc="200" dirty="0">
+                <a:solidFill>
+                  <a:srgbClr val="1F8A7D"/>
+                </a:solidFill>
+                <a:latin typeface="Trebuchet MS" pitchFamily="34" charset="0"/>
+                <a:ea typeface="Trebuchet MS" pitchFamily="34" charset="-122"/>
+                <a:cs typeface="Trebuchet MS" pitchFamily="34" charset="-120"/>
+              </a:rPr>
+              <a:t>DATA</a:t>
+            </a:r>
+            <a:endParaRPr lang="en-US" sz="1200" dirty="0"/>
+          </a:p>
+        </p:txBody>
+      </p:sp>
+      <p:sp>
+        <p:nvSpPr>
+          <p:cNvPr id="18" name="Shape 14"/>
+          <p:cNvSpPr/>
+          <p:nvPr/>
+        </p:nvSpPr>
+        <p:spPr>
+          <a:xfrm>
+            <a:off x="6483096" y="2697480"/>
+            <a:ext cx="2606040" cy="2651760"/>
+          </a:xfrm>
+          <a:prstGeom prst="roundRect">
+            <a:avLst>
+              <a:gd name="adj" fmla="val 3509"/>
+            </a:avLst>
+          </a:prstGeom>
+          <a:solidFill>
+            <a:srgbClr val="F1F6F5"/>
+          </a:solidFill>
+          <a:ln/>
+        </p:spPr>
+        <p:txBody>
+          <a:bodyPr/>
+          <a:lstStyle/>
+          <a:p>
+            <a:endParaRPr lang="en-PH"/>
+          </a:p>
+        </p:txBody>
+      </p:sp>
+      <p:sp>
+        <p:nvSpPr>
+          <p:cNvPr id="19" name="Shape 15"/>
+          <p:cNvSpPr/>
+          <p:nvPr/>
+        </p:nvSpPr>
+        <p:spPr>
+          <a:xfrm>
+            <a:off x="6757416" y="2971800"/>
+            <a:ext cx="868680" cy="868680"/>
+          </a:xfrm>
+          <a:prstGeom prst="ellipse">
+            <a:avLst/>
+          </a:prstGeom>
+          <a:solidFill>
+            <a:srgbClr val="FFFFFF"/>
+          </a:solidFill>
+          <a:ln/>
+          <a:effectLst>
+            <a:outerShdw blurRad="114300" dist="38100" dir="5400000" algn="bl" rotWithShape="0">
+              <a:srgbClr val="0A2E2B">
+                <a:alpha val="18000"/>
+              </a:srgbClr>
+            </a:outerShdw>
+          </a:effectLst>
+        </p:spPr>
+        <p:txBody>
+          <a:bodyPr/>
+          <a:lstStyle/>
+          <a:p>
+            <a:endParaRPr lang="en-PH"/>
+          </a:p>
+        </p:txBody>
+      </p:sp>
+      <p:pic>
+        <p:nvPicPr>
+          <p:cNvPr id="20" name="Image 2" descr="preencoded.png"/>
+          <p:cNvPicPr>
+            <a:picLocks noChangeAspect="1"/>
+          </p:cNvPicPr>
+          <p:nvPr/>
+        </p:nvPicPr>
+        <p:blipFill>
+          <a:blip r:embed="rId5"/>
+          <a:stretch>
+            <a:fillRect/>
+          </a:stretch>
+        </p:blipFill>
+        <p:spPr>
+          <a:xfrm>
+            <a:off x="6967728" y="3182112"/>
+            <a:ext cx="448056" cy="448056"/>
+          </a:xfrm>
+          <a:prstGeom prst="rect">
+            <a:avLst/>
+          </a:prstGeom>
+        </p:spPr>
+      </p:pic>
+      <p:sp>
+        <p:nvSpPr>
+          <p:cNvPr id="21" name="Text 16"/>
+          <p:cNvSpPr/>
+          <p:nvPr/>
+        </p:nvSpPr>
+        <p:spPr>
+          <a:xfrm>
+            <a:off x="6739128" y="3977640"/>
+            <a:ext cx="2194560" cy="548640"/>
+          </a:xfrm>
+          <a:prstGeom prst="rect">
+            <a:avLst/>
+          </a:prstGeom>
+          <a:noFill/>
+          <a:ln/>
+        </p:spPr>
+        <p:txBody>
+          <a:bodyPr wrap="square" lIns="0" tIns="0" rIns="0" bIns="0" rtlCol="0" anchor="ctr"/>
+          <a:lstStyle/>
+          <a:p>
+            <a:pPr marL="0" indent="0">
+              <a:buNone/>
+            </a:pPr>
+            <a:r>
+              <a:rPr lang="en-US" sz="1500" b="1" dirty="0">
+                <a:solidFill>
+                  <a:srgbClr val="0A2E2B"/>
+                </a:solidFill>
+                <a:latin typeface="Trebuchet MS" pitchFamily="34" charset="0"/>
+                <a:ea typeface="Trebuchet MS" pitchFamily="34" charset="-122"/>
+                <a:cs typeface="Trebuchet MS" pitchFamily="34" charset="-120"/>
+              </a:rPr>
+              <a:t>Azure Cosmos DB</a:t>
+            </a:r>
+            <a:endParaRPr lang="en-US" sz="1500" dirty="0"/>
+          </a:p>
+        </p:txBody>
+      </p:sp>
+      <p:sp>
+        <p:nvSpPr>
+          <p:cNvPr id="22" name="Text 17"/>
+          <p:cNvSpPr/>
+          <p:nvPr/>
+        </p:nvSpPr>
+        <p:spPr>
+          <a:xfrm>
+            <a:off x="6739128" y="4526280"/>
+            <a:ext cx="2194560" cy="731520"/>
+          </a:xfrm>
+          <a:prstGeom prst="rect">
+            <a:avLst/>
+          </a:prstGeom>
+          <a:noFill/>
+          <a:ln/>
+        </p:spPr>
+        <p:txBody>
+          <a:bodyPr wrap="square" lIns="0" tIns="0" rIns="0" bIns="0" rtlCol="0" anchor="ctr"/>
+          <a:lstStyle/>
+          <a:p>
+            <a:pPr marL="0" indent="0">
+              <a:buNone/>
+            </a:pPr>
+            <a:r>
+              <a:rPr lang="en-US" sz="1150" dirty="0">
+                <a:solidFill>
+                  <a:srgbClr val="3C5A56"/>
+                </a:solidFill>
+                <a:latin typeface="Calibri" pitchFamily="34" charset="0"/>
+                <a:ea typeface="Calibri" pitchFamily="34" charset="-122"/>
+                <a:cs typeface="Calibri" pitchFamily="34" charset="-120"/>
+              </a:rPr>
+              <a:t>NoSQL records + native vector search in one serverless store.</a:t>
+            </a:r>
+            <a:endParaRPr lang="en-US" sz="1150" dirty="0"/>
+          </a:p>
+        </p:txBody>
+      </p:sp>
+      <p:sp>
+        <p:nvSpPr>
+          <p:cNvPr id="23" name="Text 18"/>
+          <p:cNvSpPr/>
+          <p:nvPr/>
+        </p:nvSpPr>
+        <p:spPr>
+          <a:xfrm>
+            <a:off x="9336024" y="2331720"/>
+            <a:ext cx="2560320" cy="274320"/>
+          </a:xfrm>
+          <a:prstGeom prst="rect">
+            <a:avLst/>
+          </a:prstGeom>
+          <a:noFill/>
+          <a:ln/>
+        </p:spPr>
+        <p:txBody>
+          <a:bodyPr wrap="square" lIns="0" tIns="0" rIns="0" bIns="0" rtlCol="0" anchor="ctr"/>
+          <a:lstStyle/>
+          <a:p>
+            <a:pPr marL="0" indent="0">
+              <a:buNone/>
+            </a:pPr>
+            <a:r>
+              <a:rPr lang="en-US" sz="1200" b="1" kern="0" spc="200" dirty="0">
+                <a:solidFill>
+                  <a:srgbClr val="1F8A7D"/>
+                </a:solidFill>
+                <a:latin typeface="Trebuchet MS" pitchFamily="34" charset="0"/>
+                <a:ea typeface="Trebuchet MS" pitchFamily="34" charset="-122"/>
+                <a:cs typeface="Trebuchet MS" pitchFamily="34" charset="-120"/>
+              </a:rPr>
+              <a:t>DELIVERY</a:t>
+            </a:r>
+            <a:endParaRPr lang="en-US" sz="1200" dirty="0"/>
+          </a:p>
+        </p:txBody>
+      </p:sp>
+      <p:sp>
+        <p:nvSpPr>
+          <p:cNvPr id="24" name="Shape 19"/>
+          <p:cNvSpPr/>
+          <p:nvPr/>
+        </p:nvSpPr>
+        <p:spPr>
+          <a:xfrm>
+            <a:off x="9336024" y="2697480"/>
+            <a:ext cx="2606040" cy="2651760"/>
+          </a:xfrm>
+          <a:prstGeom prst="roundRect">
+            <a:avLst>
+              <a:gd name="adj" fmla="val 3509"/>
+            </a:avLst>
+          </a:prstGeom>
+          <a:solidFill>
+            <a:srgbClr val="F1F6F5"/>
+          </a:solidFill>
+          <a:ln/>
+        </p:spPr>
+        <p:txBody>
+          <a:bodyPr/>
+          <a:lstStyle/>
+          <a:p>
+            <a:endParaRPr lang="en-PH"/>
+          </a:p>
+        </p:txBody>
+      </p:sp>
+      <p:sp>
+        <p:nvSpPr>
+          <p:cNvPr id="25" name="Shape 20"/>
+          <p:cNvSpPr/>
+          <p:nvPr/>
+        </p:nvSpPr>
+        <p:spPr>
+          <a:xfrm>
+            <a:off x="9610344" y="2971800"/>
+            <a:ext cx="868680" cy="868680"/>
+          </a:xfrm>
+          <a:prstGeom prst="ellipse">
+            <a:avLst/>
+          </a:prstGeom>
+          <a:solidFill>
+            <a:srgbClr val="FFFFFF"/>
+          </a:solidFill>
+          <a:ln/>
+          <a:effectLst>
+            <a:outerShdw blurRad="114300" dist="38100" dir="5400000" algn="bl" rotWithShape="0">
+              <a:srgbClr val="0A2E2B">
+                <a:alpha val="18000"/>
+              </a:srgbClr>
+            </a:outerShdw>
+          </a:effectLst>
+        </p:spPr>
+        <p:txBody>
+          <a:bodyPr/>
+          <a:lstStyle/>
+          <a:p>
+            <a:endParaRPr lang="en-PH"/>
+          </a:p>
+        </p:txBody>
+      </p:sp>
+      <p:pic>
+        <p:nvPicPr>
+          <p:cNvPr id="26" name="Image 3" descr="preencoded.png"/>
+          <p:cNvPicPr>
+            <a:picLocks noChangeAspect="1"/>
+          </p:cNvPicPr>
+          <p:nvPr/>
+        </p:nvPicPr>
+        <p:blipFill>
+          <a:blip r:embed="rId6"/>
+          <a:stretch>
+            <a:fillRect/>
+          </a:stretch>
+        </p:blipFill>
+        <p:spPr>
+          <a:xfrm>
+            <a:off x="9820656" y="3182112"/>
+            <a:ext cx="448056" cy="448056"/>
+          </a:xfrm>
+          <a:prstGeom prst="rect">
+            <a:avLst/>
+          </a:prstGeom>
+        </p:spPr>
+      </p:pic>
+      <p:sp>
+        <p:nvSpPr>
+          <p:cNvPr id="27" name="Text 21"/>
+          <p:cNvSpPr/>
+          <p:nvPr/>
+        </p:nvSpPr>
+        <p:spPr>
+          <a:xfrm>
+            <a:off x="9592056" y="3977640"/>
+            <a:ext cx="2194560" cy="548640"/>
+          </a:xfrm>
+          <a:prstGeom prst="rect">
+            <a:avLst/>
+          </a:prstGeom>
+          <a:noFill/>
+          <a:ln/>
+        </p:spPr>
+        <p:txBody>
+          <a:bodyPr wrap="square" lIns="0" tIns="0" rIns="0" bIns="0" rtlCol="0" anchor="ctr"/>
+          <a:lstStyle/>
+          <a:p>
+            <a:pPr marL="0" indent="0">
+              <a:buNone/>
+            </a:pPr>
+            <a:r>
+              <a:rPr lang="en-US" sz="1500" b="1" dirty="0">
+                <a:solidFill>
+                  <a:srgbClr val="0A2E2B"/>
+                </a:solidFill>
+                <a:latin typeface="Trebuchet MS" pitchFamily="34" charset="0"/>
+                <a:ea typeface="Trebuchet MS" pitchFamily="34" charset="-122"/>
+                <a:cs typeface="Trebuchet MS" pitchFamily="34" charset="-120"/>
+              </a:rPr>
               <a:t>Microsoft Graph</a:t>
             </a:r>
             <a:endParaRPr lang="en-US" sz="1500" dirty="0"/>
@@ -10147,7 +10330,7 @@
           <a:bodyPr wrap="square" lIns="0" tIns="0" rIns="0" bIns="0" rtlCol="0" anchor="ctr"/>
           <a:lstStyle/>
           <a:p>
-            <a:pPr indent="0" marL="0">
+            <a:pPr marL="0" indent="0">
               <a:buNone/>
             </a:pPr>
             <a:r>
@@ -10186,6 +10369,13 @@
           </a:solidFill>
           <a:ln/>
         </p:spPr>
+        <p:txBody>
+          <a:bodyPr/>
+          <a:lstStyle/>
+          <a:p>
+            <a:endParaRPr lang="en-PH"/>
+          </a:p>
+        </p:txBody>
       </p:sp>
       <p:sp>
         <p:nvSpPr>
@@ -10208,7 +10398,7 @@
           <a:bodyPr wrap="square" lIns="0" tIns="0" rIns="0" bIns="0" rtlCol="0" anchor="ctr"/>
           <a:lstStyle/>
           <a:p>
-            <a:pPr algn="ctr" indent="0" marL="0">
+            <a:pPr marL="0" indent="0" algn="ctr">
               <a:buNone/>
             </a:pPr>
             <a:r>
@@ -10222,9 +10412,6 @@
               </a:rPr>
               <a:t>Shipped on  </a:t>
             </a:r>
-            <a:pPr algn="ctr" indent="0" marL="0">
-              <a:buNone/>
-            </a:pPr>
             <a:r>
               <a:rPr lang="en-US" sz="1350" b="1" dirty="0">
                 <a:solidFill>
@@ -10236,9 +10423,6 @@
               </a:rPr>
               <a:t>Next.js 16</a:t>
             </a:r>
-            <a:pPr algn="ctr" indent="0" marL="0">
-              <a:buNone/>
-            </a:pPr>
             <a:r>
               <a:rPr lang="en-US" sz="1350" dirty="0">
                 <a:solidFill>
@@ -10250,9 +10434,6 @@
               </a:rPr>
               <a:t>  ·  full-stack monolith deployed on  </a:t>
             </a:r>
-            <a:pPr algn="ctr" indent="0" marL="0">
-              <a:buNone/>
-            </a:pPr>
             <a:r>
               <a:rPr lang="en-US" sz="1350" b="1" dirty="0">
                 <a:solidFill>
@@ -10264,9 +10445,6 @@
               </a:rPr>
               <a:t>Vercel</a:t>
             </a:r>
-            <a:pPr algn="ctr" indent="0" marL="0">
-              <a:buNone/>
-            </a:pPr>
             <a:r>
               <a:rPr lang="en-US" sz="1350" dirty="0">
                 <a:solidFill>
@@ -10303,11 +10481,11 @@
           <a:bodyPr wrap="square" lIns="0" tIns="0" rIns="0" bIns="0" rtlCol="0" anchor="ctr"/>
           <a:lstStyle/>
           <a:p>
-            <a:pPr indent="0" marL="0">
-              <a:buNone/>
-            </a:pPr>
-            <a:r>
-              <a:rPr lang="en-US" sz="950" b="1" spc="100" kern="0" dirty="0">
+            <a:pPr marL="0" indent="0">
+              <a:buNone/>
+            </a:pPr>
+            <a:r>
+              <a:rPr lang="en-US" sz="950" b="1" kern="0" spc="100" dirty="0">
                 <a:solidFill>
                   <a:srgbClr val="0A2E2B"/>
                 </a:solidFill>
@@ -10317,11 +10495,8 @@
               </a:rPr>
               <a:t>ARCHON</a:t>
             </a:r>
-            <a:pPr indent="0" marL="0">
-              <a:buNone/>
-            </a:pPr>
-            <a:r>
-              <a:rPr lang="en-US" sz="950" spc="100" kern="0" dirty="0">
+            <a:r>
+              <a:rPr lang="en-US" sz="950" kern="0" spc="100" dirty="0">
                 <a:solidFill>
                   <a:srgbClr val="7C938E"/>
                 </a:solidFill>
@@ -10356,7 +10531,7 @@
           <a:bodyPr wrap="square" lIns="0" tIns="0" rIns="0" bIns="0" rtlCol="0" anchor="ctr"/>
           <a:lstStyle/>
           <a:p>
-            <a:pPr algn="r" indent="0" marL="0">
+            <a:pPr marL="0" indent="0" algn="r">
               <a:buNone/>
             </a:pPr>
             <a:r>
@@ -10390,6 +10565,7 @@
         <a:solidFill>
           <a:srgbClr val="0A2E2B"/>
         </a:solidFill>
+        <a:effectLst/>
       </p:bgPr>
     </p:bg>
     <p:spTree>
@@ -10427,6 +10603,13 @@
           </a:solidFill>
           <a:ln/>
         </p:spPr>
+        <p:txBody>
+          <a:bodyPr/>
+          <a:lstStyle/>
+          <a:p>
+            <a:endParaRPr lang="en-PH"/>
+          </a:p>
+        </p:txBody>
       </p:sp>
       <p:sp>
         <p:nvSpPr>
@@ -10449,11 +10632,11 @@
           <a:bodyPr wrap="square" lIns="0" tIns="0" rIns="0" bIns="0" rtlCol="0" anchor="ctr"/>
           <a:lstStyle/>
           <a:p>
-            <a:pPr indent="0" marL="0">
-              <a:buNone/>
-            </a:pPr>
-            <a:r>
-              <a:rPr lang="en-US" sz="1250" b="1" spc="200" kern="0" dirty="0">
+            <a:pPr marL="0" indent="0">
+              <a:buNone/>
+            </a:pPr>
+            <a:r>
+              <a:rPr lang="en-US" sz="1250" b="1" kern="0" spc="200" dirty="0">
                 <a:solidFill>
                   <a:srgbClr val="2DD4BF"/>
                 </a:solidFill>
@@ -10488,7 +10671,7 @@
           <a:bodyPr wrap="square" lIns="0" tIns="0" rIns="0" bIns="0" rtlCol="0" anchor="ctr"/>
           <a:lstStyle/>
           <a:p>
-            <a:pPr indent="0" marL="0">
+            <a:pPr marL="0" indent="0">
               <a:buNone/>
             </a:pPr>
             <a:r>
@@ -10532,6 +10715,13 @@
             <a:prstDash val="solid"/>
           </a:ln>
         </p:spPr>
+        <p:txBody>
+          <a:bodyPr/>
+          <a:lstStyle/>
+          <a:p>
+            <a:endParaRPr lang="en-PH"/>
+          </a:p>
+        </p:txBody>
       </p:sp>
       <p:sp>
         <p:nvSpPr>
@@ -10554,7 +10744,7 @@
           <a:bodyPr wrap="square" lIns="0" tIns="0" rIns="0" bIns="0" rtlCol="0" anchor="ctr"/>
           <a:lstStyle/>
           <a:p>
-            <a:pPr algn="ctr" indent="0" marL="0">
+            <a:pPr marL="0" indent="0" algn="ctr">
               <a:buNone/>
             </a:pPr>
             <a:r>
@@ -10593,7 +10783,7 @@
           <a:bodyPr wrap="square" lIns="0" tIns="0" rIns="0" bIns="0" rtlCol="0" anchor="ctr"/>
           <a:lstStyle/>
           <a:p>
-            <a:pPr algn="ctr" indent="0" marL="0">
+            <a:pPr marL="0" indent="0" algn="ctr">
               <a:buNone/>
             </a:pPr>
             <a:r>
@@ -10632,11 +10822,11 @@
           <a:bodyPr wrap="square" lIns="0" tIns="0" rIns="0" bIns="0" rtlCol="0" anchor="ctr"/>
           <a:lstStyle/>
           <a:p>
-            <a:pPr algn="ctr" indent="0" marL="0">
-              <a:buNone/>
-            </a:pPr>
-            <a:r>
-              <a:rPr lang="en-US" sz="1200" b="1" spc="100" kern="0" dirty="0">
+            <a:pPr marL="0" indent="0" algn="ctr">
+              <a:buNone/>
+            </a:pPr>
+            <a:r>
+              <a:rPr lang="en-US" sz="1200" b="1" kern="0" spc="100" dirty="0">
                 <a:solidFill>
                   <a:srgbClr val="2DD4BF"/>
                 </a:solidFill>
@@ -10676,6 +10866,13 @@
             <a:prstDash val="solid"/>
           </a:ln>
         </p:spPr>
+        <p:txBody>
+          <a:bodyPr/>
+          <a:lstStyle/>
+          <a:p>
+            <a:endParaRPr lang="en-PH"/>
+          </a:p>
+        </p:txBody>
       </p:sp>
       <p:sp>
         <p:nvSpPr>
@@ -10698,7 +10895,7 @@
           <a:bodyPr wrap="square" lIns="0" tIns="0" rIns="0" bIns="0" rtlCol="0" anchor="ctr"/>
           <a:lstStyle/>
           <a:p>
-            <a:pPr algn="ctr" indent="0" marL="0">
+            <a:pPr marL="0" indent="0" algn="ctr">
               <a:buNone/>
             </a:pPr>
             <a:r>
@@ -10737,7 +10934,7 @@
           <a:bodyPr wrap="square" lIns="0" tIns="0" rIns="0" bIns="0" rtlCol="0" anchor="ctr"/>
           <a:lstStyle/>
           <a:p>
-            <a:pPr algn="ctr" indent="0" marL="0">
+            <a:pPr marL="0" indent="0" algn="ctr">
               <a:buNone/>
             </a:pPr>
             <a:r>
@@ -10776,11 +10973,11 @@
           <a:bodyPr wrap="square" lIns="0" tIns="0" rIns="0" bIns="0" rtlCol="0" anchor="ctr"/>
           <a:lstStyle/>
           <a:p>
-            <a:pPr algn="ctr" indent="0" marL="0">
-              <a:buNone/>
-            </a:pPr>
-            <a:r>
-              <a:rPr lang="en-US" sz="1200" b="1" spc="100" kern="0" dirty="0">
+            <a:pPr marL="0" indent="0" algn="ctr">
+              <a:buNone/>
+            </a:pPr>
+            <a:r>
+              <a:rPr lang="en-US" sz="1200" b="1" kern="0" spc="100" dirty="0">
                 <a:solidFill>
                   <a:srgbClr val="2DD4BF"/>
                 </a:solidFill>
@@ -10820,6 +11017,13 @@
             <a:prstDash val="solid"/>
           </a:ln>
         </p:spPr>
+        <p:txBody>
+          <a:bodyPr/>
+          <a:lstStyle/>
+          <a:p>
+            <a:endParaRPr lang="en-PH"/>
+          </a:p>
+        </p:txBody>
       </p:sp>
       <p:sp>
         <p:nvSpPr>
@@ -10842,7 +11046,7 @@
           <a:bodyPr wrap="square" lIns="0" tIns="0" rIns="0" bIns="0" rtlCol="0" anchor="ctr"/>
           <a:lstStyle/>
           <a:p>
-            <a:pPr algn="ctr" indent="0" marL="0">
+            <a:pPr marL="0" indent="0" algn="ctr">
               <a:buNone/>
             </a:pPr>
             <a:r>
@@ -10881,7 +11085,7 @@
           <a:bodyPr wrap="square" lIns="0" tIns="0" rIns="0" bIns="0" rtlCol="0" anchor="ctr"/>
           <a:lstStyle/>
           <a:p>
-            <a:pPr algn="ctr" indent="0" marL="0">
+            <a:pPr marL="0" indent="0" algn="ctr">
               <a:buNone/>
             </a:pPr>
             <a:r>
@@ -10920,11 +11124,11 @@
           <a:bodyPr wrap="square" lIns="0" tIns="0" rIns="0" bIns="0" rtlCol="0" anchor="ctr"/>
           <a:lstStyle/>
           <a:p>
-            <a:pPr algn="ctr" indent="0" marL="0">
-              <a:buNone/>
-            </a:pPr>
-            <a:r>
-              <a:rPr lang="en-US" sz="1200" b="1" spc="100" kern="0" dirty="0">
+            <a:pPr marL="0" indent="0" algn="ctr">
+              <a:buNone/>
+            </a:pPr>
+            <a:r>
+              <a:rPr lang="en-US" sz="1200" b="1" kern="0" spc="100" dirty="0">
                 <a:solidFill>
                   <a:srgbClr val="2DD4BF"/>
                 </a:solidFill>
@@ -10959,7 +11163,7 @@
           <a:bodyPr wrap="square" lIns="0" tIns="0" rIns="0" bIns="0" rtlCol="0" anchor="ctr"/>
           <a:lstStyle/>
           <a:p>
-            <a:pPr indent="0" marL="0">
+            <a:pPr marL="0" indent="0">
               <a:buNone/>
             </a:pPr>
             <a:r>
@@ -10998,7 +11202,7 @@
           <a:bodyPr wrap="square" lIns="0" tIns="0" rIns="0" bIns="0" rtlCol="0" anchor="ctr"/>
           <a:lstStyle/>
           <a:p>
-            <a:pPr indent="0" marL="0">
+            <a:pPr marL="0" indent="0">
               <a:buNone/>
             </a:pPr>
             <a:r>
@@ -11018,14 +11222,14 @@
       </p:sp>
       <p:pic>
         <p:nvPicPr>
-          <p:cNvPr id="19" name="Image 0" descr="D:\PROJECTS\archon\client\public\web-app-manifest-512x512.png">    </p:cNvPr>
+          <p:cNvPr id="19" name="Image 0" descr="D:\PROJECTS\archon\client\public\web-app-manifest-512x512.png"/>
           <p:cNvPicPr>
             <a:picLocks noChangeAspect="1"/>
           </p:cNvPicPr>
           <p:nvPr/>
         </p:nvPicPr>
         <p:blipFill>
-          <a:blip r:embed="rId1"/>
+          <a:blip r:embed="rId3"/>
           <a:stretch>
             <a:fillRect/>
           </a:stretch>
@@ -11061,7 +11265,7 @@
           <a:bodyPr wrap="square" lIns="0" tIns="0" rIns="0" bIns="0" rtlCol="0" anchor="ctr"/>
           <a:lstStyle/>
           <a:p>
-            <a:pPr indent="0" marL="0">
+            <a:pPr marL="0" indent="0">
               <a:buNone/>
             </a:pPr>
             <a:r>
@@ -11100,7 +11304,7 @@
           <a:bodyPr wrap="square" lIns="0" tIns="0" rIns="0" bIns="0" rtlCol="0" anchor="ctr"/>
           <a:lstStyle/>
           <a:p>
-            <a:pPr indent="0" marL="0">
+            <a:pPr marL="0" indent="0">
               <a:buNone/>
             </a:pPr>
             <a:r>
@@ -11139,24 +11343,31 @@
           </a:solidFill>
           <a:ln/>
           <a:effectLst>
-            <a:outerShdw sx="100000" sy="100000" kx="0" ky="0" algn="bl" rotWithShape="0" blurRad="114300" dist="38100" dir="5400000">
+            <a:outerShdw blurRad="114300" dist="38100" dir="5400000" algn="bl" rotWithShape="0">
               <a:srgbClr val="0A2E2B">
                 <a:alpha val="18000"/>
               </a:srgbClr>
             </a:outerShdw>
           </a:effectLst>
         </p:spPr>
+        <p:txBody>
+          <a:bodyPr/>
+          <a:lstStyle/>
+          <a:p>
+            <a:endParaRPr lang="en-PH"/>
+          </a:p>
+        </p:txBody>
       </p:sp>
       <p:pic>
         <p:nvPicPr>
-          <p:cNvPr id="23" name="Image 1" descr="preencoded.png">    </p:cNvPr>
+          <p:cNvPr id="23" name="Image 1" descr="preencoded.png"/>
           <p:cNvPicPr>
             <a:picLocks noChangeAspect="1"/>
           </p:cNvPicPr>
           <p:nvPr/>
         </p:nvPicPr>
         <p:blipFill>
-          <a:blip r:embed="rId2"/>
+          <a:blip r:embed="rId4"/>
           <a:stretch>
             <a:fillRect/>
           </a:stretch>
@@ -11192,7 +11403,7 @@
           <a:bodyPr wrap="square" lIns="0" tIns="0" rIns="0" bIns="0" rtlCol="0" anchor="ctr"/>
           <a:lstStyle/>
           <a:p>
-            <a:pPr algn="ctr" indent="0" marL="0">
+            <a:pPr marL="0" indent="0" algn="ctr">
               <a:buNone/>
             </a:pPr>
             <a:r>
@@ -11511,4 +11722,319 @@
     </a:ext>
   </a:extLst>
 </a:theme>
+</file>
+
+<file path=ppt/theme/theme2.xml><?xml version="1.0" encoding="utf-8"?>
+<a:theme xmlns:a="http://schemas.openxmlformats.org/drawingml/2006/main" name="Office Theme">
+  <a:themeElements>
+    <a:clrScheme name="Office">
+      <a:dk1>
+        <a:sysClr val="windowText" lastClr="000000"/>
+      </a:dk1>
+      <a:lt1>
+        <a:sysClr val="window" lastClr="FFFFFF"/>
+      </a:lt1>
+      <a:dk2>
+        <a:srgbClr val="0E2841"/>
+      </a:dk2>
+      <a:lt2>
+        <a:srgbClr val="E8E8E8"/>
+      </a:lt2>
+      <a:accent1>
+        <a:srgbClr val="156082"/>
+      </a:accent1>
+      <a:accent2>
+        <a:srgbClr val="E97132"/>
+      </a:accent2>
+      <a:accent3>
+        <a:srgbClr val="196B24"/>
+      </a:accent3>
+      <a:accent4>
+        <a:srgbClr val="0F9ED5"/>
+      </a:accent4>
+      <a:accent5>
+        <a:srgbClr val="A02B93"/>
+      </a:accent5>
+      <a:accent6>
+        <a:srgbClr val="4EA72E"/>
+      </a:accent6>
+      <a:hlink>
+        <a:srgbClr val="467886"/>
+      </a:hlink>
+      <a:folHlink>
+        <a:srgbClr val="96607D"/>
+      </a:folHlink>
+    </a:clrScheme>
+    <a:fontScheme name="Office">
+      <a:majorFont>
+        <a:latin typeface="Aptos Display" panose="02110004020202020204"/>
+        <a:ea typeface=""/>
+        <a:cs typeface=""/>
+        <a:font script="Jpan" typeface="游ゴシック Light"/>
+        <a:font script="Hang" typeface="맑은 고딕"/>
+        <a:font script="Hans" typeface="等线 Light"/>
+        <a:font script="Hant" typeface="新細明體"/>
+        <a:font script="Arab" typeface="Times New Roman"/>
+        <a:font script="Hebr" typeface="Times New Roman"/>
+        <a:font script="Thai" typeface="Angsana New"/>
+        <a:font script="Ethi" typeface="Nyala"/>
+        <a:font script="Beng" typeface="Vrinda"/>
+        <a:font script="Gujr" typeface="Shruti"/>
+        <a:font script="Khmr" typeface="MoolBoran"/>
+        <a:font script="Knda" typeface="Tunga"/>
+        <a:font script="Guru" typeface="Raavi"/>
+        <a:font script="Cans" typeface="Euphemia"/>
+        <a:font script="Cher" typeface="Plantagenet Cherokee"/>
+        <a:font script="Yiii" typeface="Microsoft Yi Baiti"/>
+        <a:font script="Tibt" typeface="Microsoft Himalaya"/>
+        <a:font script="Thaa" typeface="MV Boli"/>
+        <a:font script="Deva" typeface="Mangal"/>
+        <a:font script="Telu" typeface="Gautami"/>
+        <a:font script="Taml" typeface="Latha"/>
+        <a:font script="Syrc" typeface="Estrangelo Edessa"/>
+        <a:font script="Orya" typeface="Kalinga"/>
+        <a:font script="Mlym" typeface="Kartika"/>
+        <a:font script="Laoo" typeface="DokChampa"/>
+        <a:font script="Sinh" typeface="Iskoola Pota"/>
+        <a:font script="Mong" typeface="Mongolian Baiti"/>
+        <a:font script="Viet" typeface="Times New Roman"/>
+        <a:font script="Uigh" typeface="Microsoft Uighur"/>
+        <a:font script="Geor" typeface="Sylfaen"/>
+        <a:font script="Armn" typeface="Arial"/>
+        <a:font script="Bugi" typeface="Leelawadee UI"/>
+        <a:font script="Bopo" typeface="Microsoft JhengHei"/>
+        <a:font script="Java" typeface="Javanese Text"/>
+        <a:font script="Lisu" typeface="Segoe UI"/>
+        <a:font script="Mymr" typeface="Myanmar Text"/>
+        <a:font script="Nkoo" typeface="Ebrima"/>
+        <a:font script="Olck" typeface="Nirmala UI"/>
+        <a:font script="Osma" typeface="Ebrima"/>
+        <a:font script="Phag" typeface="Phagspa"/>
+        <a:font script="Syrn" typeface="Estrangelo Edessa"/>
+        <a:font script="Syrj" typeface="Estrangelo Edessa"/>
+        <a:font script="Syre" typeface="Estrangelo Edessa"/>
+        <a:font script="Sora" typeface="Nirmala UI"/>
+        <a:font script="Tale" typeface="Microsoft Tai Le"/>
+        <a:font script="Talu" typeface="Microsoft New Tai Lue"/>
+        <a:font script="Tfng" typeface="Ebrima"/>
+      </a:majorFont>
+      <a:minorFont>
+        <a:latin typeface="Aptos" panose="02110004020202020204"/>
+        <a:ea typeface=""/>
+        <a:cs typeface=""/>
+        <a:font script="Jpan" typeface="游ゴシック"/>
+        <a:font script="Hang" typeface="맑은 고딕"/>
+        <a:font script="Hans" typeface="等线"/>
+        <a:font script="Hant" typeface="新細明體"/>
+        <a:font script="Arab" typeface="Arial"/>
+        <a:font script="Hebr" typeface="Arial"/>
+        <a:font script="Thai" typeface="Cordia New"/>
+        <a:font script="Ethi" typeface="Nyala"/>
+        <a:font script="Beng" typeface="Vrinda"/>
+        <a:font script="Gujr" typeface="Shruti"/>
+        <a:font script="Khmr" typeface="DaunPenh"/>
+        <a:font script="Knda" typeface="Tunga"/>
+        <a:font script="Guru" typeface="Raavi"/>
+        <a:font script="Cans" typeface="Euphemia"/>
+        <a:font script="Cher" typeface="Plantagenet Cherokee"/>
+        <a:font script="Yiii" typeface="Microsoft Yi Baiti"/>
+        <a:font script="Tibt" typeface="Microsoft Himalaya"/>
+        <a:font script="Thaa" typeface="MV Boli"/>
+        <a:font script="Deva" typeface="Mangal"/>
+        <a:font script="Telu" typeface="Gautami"/>
+        <a:font script="Taml" typeface="Latha"/>
+        <a:font script="Syrc" typeface="Estrangelo Edessa"/>
+        <a:font script="Orya" typeface="Kalinga"/>
+        <a:font script="Mlym" typeface="Kartika"/>
+        <a:font script="Laoo" typeface="DokChampa"/>
+        <a:font script="Sinh" typeface="Iskoola Pota"/>
+        <a:font script="Mong" typeface="Mongolian Baiti"/>
+        <a:font script="Viet" typeface="Arial"/>
+        <a:font script="Uigh" typeface="Microsoft Uighur"/>
+        <a:font script="Geor" typeface="Sylfaen"/>
+        <a:font script="Armn" typeface="Arial"/>
+        <a:font script="Bugi" typeface="Leelawadee UI"/>
+        <a:font script="Bopo" typeface="Microsoft JhengHei"/>
+        <a:font script="Java" typeface="Javanese Text"/>
+        <a:font script="Lisu" typeface="Segoe UI"/>
+        <a:font script="Mymr" typeface="Myanmar Text"/>
+        <a:font script="Nkoo" typeface="Ebrima"/>
+        <a:font script="Olck" typeface="Nirmala UI"/>
+        <a:font script="Osma" typeface="Ebrima"/>
+        <a:font script="Phag" typeface="Phagspa"/>
+        <a:font script="Syrn" typeface="Estrangelo Edessa"/>
+        <a:font script="Syrj" typeface="Estrangelo Edessa"/>
+        <a:font script="Syre" typeface="Estrangelo Edessa"/>
+        <a:font script="Sora" typeface="Nirmala UI"/>
+        <a:font script="Tale" typeface="Microsoft Tai Le"/>
+        <a:font script="Talu" typeface="Microsoft New Tai Lue"/>
+        <a:font script="Tfng" typeface="Ebrima"/>
+      </a:minorFont>
+    </a:fontScheme>
+    <a:fmtScheme name="Office">
+      <a:fillStyleLst>
+        <a:solidFill>
+          <a:schemeClr val="phClr"/>
+        </a:solidFill>
+        <a:gradFill rotWithShape="1">
+          <a:gsLst>
+            <a:gs pos="0">
+              <a:schemeClr val="phClr">
+                <a:lumMod val="110000"/>
+                <a:satMod val="105000"/>
+                <a:tint val="67000"/>
+              </a:schemeClr>
+            </a:gs>
+            <a:gs pos="50000">
+              <a:schemeClr val="phClr">
+                <a:lumMod val="105000"/>
+                <a:satMod val="103000"/>
+                <a:tint val="73000"/>
+              </a:schemeClr>
+            </a:gs>
+            <a:gs pos="100000">
+              <a:schemeClr val="phClr">
+                <a:lumMod val="105000"/>
+                <a:satMod val="109000"/>
+                <a:tint val="81000"/>
+              </a:schemeClr>
+            </a:gs>
+          </a:gsLst>
+          <a:lin ang="5400000" scaled="0"/>
+        </a:gradFill>
+        <a:gradFill rotWithShape="1">
+          <a:gsLst>
+            <a:gs pos="0">
+              <a:schemeClr val="phClr">
+                <a:satMod val="103000"/>
+                <a:lumMod val="102000"/>
+                <a:tint val="94000"/>
+              </a:schemeClr>
+            </a:gs>
+            <a:gs pos="50000">
+              <a:schemeClr val="phClr">
+                <a:satMod val="110000"/>
+                <a:lumMod val="100000"/>
+                <a:shade val="100000"/>
+              </a:schemeClr>
+            </a:gs>
+            <a:gs pos="100000">
+              <a:schemeClr val="phClr">
+                <a:lumMod val="99000"/>
+                <a:satMod val="120000"/>
+                <a:shade val="78000"/>
+              </a:schemeClr>
+            </a:gs>
+          </a:gsLst>
+          <a:lin ang="5400000" scaled="0"/>
+        </a:gradFill>
+      </a:fillStyleLst>
+      <a:lnStyleLst>
+        <a:ln w="12700" cap="flat" cmpd="sng" algn="ctr">
+          <a:solidFill>
+            <a:schemeClr val="phClr"/>
+          </a:solidFill>
+          <a:prstDash val="solid"/>
+          <a:miter lim="800000"/>
+        </a:ln>
+        <a:ln w="19050" cap="flat" cmpd="sng" algn="ctr">
+          <a:solidFill>
+            <a:schemeClr val="phClr"/>
+          </a:solidFill>
+          <a:prstDash val="solid"/>
+          <a:miter lim="800000"/>
+        </a:ln>
+        <a:ln w="25400" cap="flat" cmpd="sng" algn="ctr">
+          <a:solidFill>
+            <a:schemeClr val="phClr"/>
+          </a:solidFill>
+          <a:prstDash val="solid"/>
+          <a:miter lim="800000"/>
+        </a:ln>
+      </a:lnStyleLst>
+      <a:effectStyleLst>
+        <a:effectStyle>
+          <a:effectLst/>
+        </a:effectStyle>
+        <a:effectStyle>
+          <a:effectLst/>
+        </a:effectStyle>
+        <a:effectStyle>
+          <a:effectLst>
+            <a:outerShdw blurRad="57150" dist="19050" dir="5400000" algn="ctr" rotWithShape="0">
+              <a:srgbClr val="000000">
+                <a:alpha val="63000"/>
+              </a:srgbClr>
+            </a:outerShdw>
+          </a:effectLst>
+        </a:effectStyle>
+      </a:effectStyleLst>
+      <a:bgFillStyleLst>
+        <a:solidFill>
+          <a:schemeClr val="phClr"/>
+        </a:solidFill>
+        <a:solidFill>
+          <a:schemeClr val="phClr">
+            <a:tint val="95000"/>
+            <a:satMod val="170000"/>
+          </a:schemeClr>
+        </a:solidFill>
+        <a:gradFill rotWithShape="1">
+          <a:gsLst>
+            <a:gs pos="0">
+              <a:schemeClr val="phClr">
+                <a:tint val="93000"/>
+                <a:satMod val="150000"/>
+                <a:shade val="98000"/>
+                <a:lumMod val="102000"/>
+              </a:schemeClr>
+            </a:gs>
+            <a:gs pos="50000">
+              <a:schemeClr val="phClr">
+                <a:tint val="98000"/>
+                <a:satMod val="130000"/>
+                <a:shade val="90000"/>
+                <a:lumMod val="103000"/>
+              </a:schemeClr>
+            </a:gs>
+            <a:gs pos="100000">
+              <a:schemeClr val="phClr">
+                <a:shade val="63000"/>
+                <a:satMod val="120000"/>
+              </a:schemeClr>
+            </a:gs>
+          </a:gsLst>
+          <a:lin ang="5400000" scaled="0"/>
+        </a:gradFill>
+      </a:bgFillStyleLst>
+    </a:fmtScheme>
+  </a:themeElements>
+  <a:objectDefaults>
+    <a:lnDef>
+      <a:spPr/>
+      <a:bodyPr/>
+      <a:lstStyle/>
+      <a:style>
+        <a:lnRef idx="2">
+          <a:schemeClr val="accent1"/>
+        </a:lnRef>
+        <a:fillRef idx="0">
+          <a:schemeClr val="accent1"/>
+        </a:fillRef>
+        <a:effectRef idx="1">
+          <a:schemeClr val="accent1"/>
+        </a:effectRef>
+        <a:fontRef idx="minor">
+          <a:schemeClr val="tx1"/>
+        </a:fontRef>
+      </a:style>
+    </a:lnDef>
+  </a:objectDefaults>
+  <a:extraClrSchemeLst/>
+  <a:extLst>
+    <a:ext uri="{05A4C25C-085E-4340-85A3-A5531E510DB2}">
+      <thm15:themeFamily xmlns:thm15="http://schemas.microsoft.com/office/thememl/2012/main" name="Office Theme" id="{2E142A2C-CD16-42D6-873A-C26D2A0506FA}" vid="{1BDDFF52-6CD6-40A5-AB3C-68EB2F1E4D0A}"/>
+    </a:ext>
+  </a:extLst>
+</a:theme>
 </file>
--- a/deck/Archon-KPMG-Pitch.pptx
+++ b/deck/Archon-KPMG-Pitch.pptx
@@ -11421,6 +11421,36 @@
           </a:p>
         </p:txBody>
       </p:sp>
+      <p:pic>
+        <p:nvPicPr>
+          <p:cNvPr id="26" name="Picture 25">
+            <a:extLst>
+              <a:ext uri="{FF2B5EF4-FFF2-40B4-BE49-F238E27FC236}">
+                <a16:creationId xmlns:a16="http://schemas.microsoft.com/office/drawing/2014/main" id="{D2111332-5ACB-72C9-3EF0-1B835329D4B7}"/>
+              </a:ext>
+            </a:extLst>
+          </p:cNvPr>
+          <p:cNvPicPr>
+            <a:picLocks noChangeAspect="1"/>
+          </p:cNvPicPr>
+          <p:nvPr/>
+        </p:nvPicPr>
+        <p:blipFill>
+          <a:blip r:embed="rId5"/>
+          <a:stretch>
+            <a:fillRect/>
+          </a:stretch>
+        </p:blipFill>
+        <p:spPr>
+          <a:xfrm>
+            <a:off x="9144000" y="4389120"/>
+            <a:ext cx="2103120" cy="2103120"/>
+          </a:xfrm>
+          <a:prstGeom prst="rect">
+            <a:avLst/>
+          </a:prstGeom>
+        </p:spPr>
+      </p:pic>
     </p:spTree>
   </p:cSld>
   <p:clrMapOvr>

--- a/deck/Archon-KPMG-Pitch.pptx
+++ b/deck/Archon-KPMG-Pitch.pptx
@@ -1539,35 +1539,6 @@
       </p:sp>
       <p:sp>
         <p:nvSpPr>
-          <p:cNvPr id="8" name="Shape 5"/>
-          <p:cNvSpPr/>
-          <p:nvPr/>
-        </p:nvSpPr>
-        <p:spPr>
-          <a:xfrm>
-            <a:off x="841248" y="5212080"/>
-            <a:ext cx="2585923" cy="310896"/>
-          </a:xfrm>
-          <a:prstGeom prst="roundRect">
-            <a:avLst>
-              <a:gd name="adj" fmla="val 50000"/>
-            </a:avLst>
-          </a:prstGeom>
-          <a:solidFill>
-            <a:srgbClr val="2DD4BF"/>
-          </a:solidFill>
-          <a:ln/>
-        </p:spPr>
-        <p:txBody>
-          <a:bodyPr/>
-          <a:lstStyle/>
-          <a:p>
-            <a:endParaRPr lang="en-PH"/>
-          </a:p>
-        </p:txBody>
-      </p:sp>
-      <p:sp>
-        <p:nvSpPr>
           <p:cNvPr id="9" name="Text 6"/>
           <p:cNvSpPr/>
           <p:nvPr/>
@@ -1607,42 +1578,13 @@
       </p:sp>
       <p:sp>
         <p:nvSpPr>
-          <p:cNvPr id="10" name="Shape 7"/>
-          <p:cNvSpPr/>
-          <p:nvPr/>
-        </p:nvSpPr>
-        <p:spPr>
-          <a:xfrm>
-            <a:off x="4572000" y="5212080"/>
-            <a:ext cx="1408176" cy="310896"/>
-          </a:xfrm>
-          <a:prstGeom prst="roundRect">
-            <a:avLst>
-              <a:gd name="adj" fmla="val 50000"/>
-            </a:avLst>
-          </a:prstGeom>
-          <a:solidFill>
-            <a:srgbClr val="103F3A"/>
-          </a:solidFill>
-          <a:ln/>
-        </p:spPr>
-        <p:txBody>
-          <a:bodyPr/>
-          <a:lstStyle/>
-          <a:p>
-            <a:endParaRPr lang="en-PH"/>
-          </a:p>
-        </p:txBody>
-      </p:sp>
-      <p:sp>
-        <p:nvSpPr>
           <p:cNvPr id="11" name="Text 8"/>
           <p:cNvSpPr/>
           <p:nvPr/>
         </p:nvSpPr>
         <p:spPr>
           <a:xfrm>
-            <a:off x="4572000" y="5212080"/>
+            <a:off x="841248" y="5541637"/>
             <a:ext cx="1408176" cy="310896"/>
           </a:xfrm>
           <a:prstGeom prst="rect">
@@ -2935,9 +2877,6 @@
           <a:bodyPr wrap="square" lIns="0" tIns="0" rIns="0" bIns="0" rtlCol="0" anchor="ctr"/>
           <a:lstStyle/>
           <a:p>
-            <a:pPr marL="0" indent="0">
-              <a:buNone/>
-            </a:pPr>
             <a:r>
               <a:rPr lang="en-US" sz="3300" b="1" dirty="0">
                 <a:solidFill>
@@ -2947,7 +2886,7 @@
                 <a:ea typeface="Trebuchet MS" pitchFamily="34" charset="-122"/>
                 <a:cs typeface="Trebuchet MS" pitchFamily="34" charset="-120"/>
               </a:rPr>
-              <a:t>Not a chatbot. An autonomous agent.</a:t>
+              <a:t>Cross-Department Data Orchestration &amp; Native AI Agent</a:t>
             </a:r>
             <a:endParaRPr lang="en-US" sz="3300" dirty="0"/>
           </a:p>
@@ -2986,7 +2925,7 @@
                 <a:ea typeface="Calibri" pitchFamily="34" charset="-122"/>
                 <a:cs typeface="Calibri" pitchFamily="34" charset="-120"/>
               </a:rPr>
-              <a:t>Archon reads a student's real records across departments, diagnoses the issue, and resolves it — before a human ever sees it.</a:t>
+              <a:t>Archon reads a student's real records across departments, diagnoses the issue, and resolves it</a:t>
             </a:r>
             <a:endParaRPr lang="en-US" sz="1450" dirty="0"/>
           </a:p>
@@ -3866,7 +3805,7 @@
                 <a:ea typeface="Trebuchet MS" pitchFamily="34" charset="-122"/>
                 <a:cs typeface="Trebuchet MS" pitchFamily="34" charset="-120"/>
               </a:rPr>
-              <a:t>Built for a phone in a hallway.</a:t>
+              <a:t>Student’s Mobile Interface</a:t>
             </a:r>
             <a:endParaRPr lang="en-US" sz="3300" dirty="0"/>
           </a:p>
@@ -4835,7 +4774,7 @@
                 <a:ea typeface="Trebuchet MS" pitchFamily="34" charset="-122"/>
                 <a:cs typeface="Trebuchet MS" pitchFamily="34" charset="-120"/>
               </a:rPr>
-              <a:t>Mobile-first, 375px</a:t>
+              <a:t>Mobile-first</a:t>
             </a:r>
             <a:endParaRPr lang="en-US" sz="1600" dirty="0"/>
           </a:p>
@@ -5084,7 +5023,7 @@
                 <a:ea typeface="Calibri" pitchFamily="34" charset="-122"/>
                 <a:cs typeface="Calibri" pitchFamily="34" charset="-120"/>
               </a:rPr>
-              <a:t>Balances, holds, and deadlines render as glanceable cards — not walls of text.</a:t>
+              <a:t>Balances, holds, and deadlines render as glanceable cards</a:t>
             </a:r>
             <a:endParaRPr lang="en-US" sz="1250" dirty="0"/>
           </a:p>
@@ -5284,6 +5223,152 @@
           </a:p>
         </p:txBody>
       </p:sp>
+      <p:pic>
+        <p:nvPicPr>
+          <p:cNvPr id="1026" name="Picture 2" descr="No description available.">
+            <a:extLst>
+              <a:ext uri="{FF2B5EF4-FFF2-40B4-BE49-F238E27FC236}">
+                <a16:creationId xmlns:a16="http://schemas.microsoft.com/office/drawing/2014/main" id="{241A08BC-5E22-BDC0-76AD-EC836D875D83}"/>
+              </a:ext>
+            </a:extLst>
+          </p:cNvPr>
+          <p:cNvPicPr>
+            <a:picLocks noChangeAspect="1" noChangeArrowheads="1"/>
+          </p:cNvPicPr>
+          <p:nvPr/>
+        </p:nvPicPr>
+        <p:blipFill rotWithShape="1">
+          <a:blip r:embed="rId5">
+            <a:extLst>
+              <a:ext uri="{28A0092B-C50C-407E-A947-70E740481C1C}">
+                <a14:useLocalDpi xmlns:a14="http://schemas.microsoft.com/office/drawing/2010/main" val="0"/>
+              </a:ext>
+            </a:extLst>
+          </a:blip>
+          <a:srcRect b="7710"/>
+          <a:stretch>
+            <a:fillRect/>
+          </a:stretch>
+        </p:blipFill>
+        <p:spPr bwMode="auto">
+          <a:xfrm>
+            <a:off x="3416003" y="1843558"/>
+            <a:ext cx="2242781" cy="4597348"/>
+          </a:xfrm>
+          <a:prstGeom prst="rect">
+            <a:avLst/>
+          </a:prstGeom>
+          <a:noFill/>
+          <a:extLst>
+            <a:ext uri="{909E8E84-426E-40DD-AFC4-6F175D3DCCD1}">
+              <a14:hiddenFill xmlns:a14="http://schemas.microsoft.com/office/drawing/2010/main">
+                <a:solidFill>
+                  <a:srgbClr val="FFFFFF"/>
+                </a:solidFill>
+              </a14:hiddenFill>
+            </a:ext>
+          </a:extLst>
+        </p:spPr>
+      </p:pic>
+      <p:sp>
+        <p:nvSpPr>
+          <p:cNvPr id="4" name="Rectangle: Rounded Corners 3">
+            <a:extLst>
+              <a:ext uri="{FF2B5EF4-FFF2-40B4-BE49-F238E27FC236}">
+                <a16:creationId xmlns:a16="http://schemas.microsoft.com/office/drawing/2014/main" id="{B80015CB-A7AD-2C59-27D6-ACD0822B7DFC}"/>
+              </a:ext>
+            </a:extLst>
+          </p:cNvPr>
+          <p:cNvSpPr/>
+          <p:nvPr/>
+        </p:nvSpPr>
+        <p:spPr>
+          <a:xfrm>
+            <a:off x="4554791" y="2240280"/>
+            <a:ext cx="1002182" cy="521208"/>
+          </a:xfrm>
+          <a:prstGeom prst="roundRect">
+            <a:avLst/>
+          </a:prstGeom>
+          <a:solidFill>
+            <a:srgbClr val="FCFCFA"/>
+          </a:solidFill>
+          <a:ln>
+            <a:noFill/>
+          </a:ln>
+        </p:spPr>
+        <p:style>
+          <a:lnRef idx="2">
+            <a:schemeClr val="accent1">
+              <a:shade val="15000"/>
+            </a:schemeClr>
+          </a:lnRef>
+          <a:fillRef idx="1">
+            <a:schemeClr val="accent1"/>
+          </a:fillRef>
+          <a:effectRef idx="0">
+            <a:schemeClr val="accent1"/>
+          </a:effectRef>
+          <a:fontRef idx="minor">
+            <a:schemeClr val="lt1"/>
+          </a:fontRef>
+        </p:style>
+        <p:txBody>
+          <a:bodyPr rtlCol="0" anchor="ctr"/>
+          <a:lstStyle/>
+          <a:p>
+            <a:pPr algn="ctr"/>
+            <a:endParaRPr lang="en-PH"/>
+          </a:p>
+        </p:txBody>
+      </p:sp>
+      <p:pic>
+        <p:nvPicPr>
+          <p:cNvPr id="1028" name="Picture 4" descr="No description available.">
+            <a:extLst>
+              <a:ext uri="{FF2B5EF4-FFF2-40B4-BE49-F238E27FC236}">
+                <a16:creationId xmlns:a16="http://schemas.microsoft.com/office/drawing/2014/main" id="{AE02FA2D-7DFA-8711-45B7-632798D1D728}"/>
+              </a:ext>
+            </a:extLst>
+          </p:cNvPr>
+          <p:cNvPicPr>
+            <a:picLocks noChangeAspect="1" noChangeArrowheads="1"/>
+          </p:cNvPicPr>
+          <p:nvPr/>
+        </p:nvPicPr>
+        <p:blipFill rotWithShape="1">
+          <a:blip r:embed="rId6">
+            <a:extLst>
+              <a:ext uri="{28A0092B-C50C-407E-A947-70E740481C1C}">
+                <a14:useLocalDpi xmlns:a14="http://schemas.microsoft.com/office/drawing/2010/main" val="0"/>
+              </a:ext>
+            </a:extLst>
+          </a:blip>
+          <a:srcRect b="6911"/>
+          <a:stretch>
+            <a:fillRect/>
+          </a:stretch>
+        </p:blipFill>
+        <p:spPr bwMode="auto">
+          <a:xfrm>
+            <a:off x="930015" y="1843558"/>
+            <a:ext cx="2204139" cy="4557242"/>
+          </a:xfrm>
+          <a:prstGeom prst="rect">
+            <a:avLst/>
+          </a:prstGeom>
+          <a:noFill/>
+          <a:extLst>
+            <a:ext uri="{909E8E84-426E-40DD-AFC4-6F175D3DCCD1}">
+              <a14:hiddenFill xmlns:a14="http://schemas.microsoft.com/office/drawing/2010/main">
+                <a:solidFill>
+                  <a:srgbClr val="FFFFFF"/>
+                </a:solidFill>
+              </a14:hiddenFill>
+            </a:ext>
+          </a:extLst>
+        </p:spPr>
+      </p:pic>
     </p:spTree>
   </p:cSld>
   <p:clrMapOvr>
@@ -5389,7 +5474,7 @@
                 <a:ea typeface="Trebuchet MS" pitchFamily="34" charset="-122"/>
                 <a:cs typeface="Trebuchet MS" pitchFamily="34" charset="-120"/>
               </a:rPr>
-              <a:t>Two products. One system.</a:t>
+              <a:t>Admin’s Desktop Interface</a:t>
             </a:r>
             <a:endParaRPr lang="en-US" sz="3300" dirty="0"/>
           </a:p>
@@ -6428,7 +6513,7 @@
         </p:nvSpPr>
         <p:spPr>
           <a:xfrm>
-            <a:off x="8732520" y="2359152"/>
+            <a:off x="8732520" y="2505456"/>
             <a:ext cx="3108960" cy="365760"/>
           </a:xfrm>
           <a:prstGeom prst="rect">
@@ -6456,45 +6541,6 @@
               <a:t>AI-suggested replies</a:t>
             </a:r>
             <a:endParaRPr lang="en-US" sz="1500" dirty="0"/>
-          </a:p>
-        </p:txBody>
-      </p:sp>
-      <p:sp>
-        <p:nvSpPr>
-          <p:cNvPr id="35" name="Text 32"/>
-          <p:cNvSpPr/>
-          <p:nvPr/>
-        </p:nvSpPr>
-        <p:spPr>
-          <a:xfrm>
-            <a:off x="8732520" y="2724912"/>
-            <a:ext cx="3154680" cy="731520"/>
-          </a:xfrm>
-          <a:prstGeom prst="rect">
-            <a:avLst/>
-          </a:prstGeom>
-          <a:noFill/>
-          <a:ln/>
-        </p:spPr>
-        <p:txBody>
-          <a:bodyPr wrap="square" lIns="0" tIns="0" rIns="0" bIns="0" rtlCol="0" anchor="ctr"/>
-          <a:lstStyle/>
-          <a:p>
-            <a:pPr marL="0" indent="0">
-              <a:buNone/>
-            </a:pPr>
-            <a:r>
-              <a:rPr lang="en-US" sz="1200" dirty="0">
-                <a:solidFill>
-                  <a:srgbClr val="3C5A56"/>
-                </a:solidFill>
-                <a:latin typeface="Calibri" pitchFamily="34" charset="0"/>
-                <a:ea typeface="Calibri" pitchFamily="34" charset="-122"/>
-                <a:cs typeface="Calibri" pitchFamily="34" charset="-120"/>
-              </a:rPr>
-              <a:t>Each ticket arrives with a confidence score and an editable, one-click response.</a:t>
-            </a:r>
-            <a:endParaRPr lang="en-US" sz="1200" dirty="0"/>
           </a:p>
         </p:txBody>
       </p:sp>
@@ -6557,7 +6603,7 @@
         </p:nvSpPr>
         <p:spPr>
           <a:xfrm>
-            <a:off x="8732520" y="3593592"/>
+            <a:off x="8732520" y="3715077"/>
             <a:ext cx="3108960" cy="365760"/>
           </a:xfrm>
           <a:prstGeom prst="rect">
@@ -6585,45 +6631,6 @@
               <a:t>Context-preserving handoff</a:t>
             </a:r>
             <a:endParaRPr lang="en-US" sz="1500" dirty="0"/>
-          </a:p>
-        </p:txBody>
-      </p:sp>
-      <p:sp>
-        <p:nvSpPr>
-          <p:cNvPr id="39" name="Text 35"/>
-          <p:cNvSpPr/>
-          <p:nvPr/>
-        </p:nvSpPr>
-        <p:spPr>
-          <a:xfrm>
-            <a:off x="8732520" y="3959352"/>
-            <a:ext cx="3154680" cy="731520"/>
-          </a:xfrm>
-          <a:prstGeom prst="rect">
-            <a:avLst/>
-          </a:prstGeom>
-          <a:noFill/>
-          <a:ln/>
-        </p:spPr>
-        <p:txBody>
-          <a:bodyPr wrap="square" lIns="0" tIns="0" rIns="0" bIns="0" rtlCol="0" anchor="ctr"/>
-          <a:lstStyle/>
-          <a:p>
-            <a:pPr marL="0" indent="0">
-              <a:buNone/>
-            </a:pPr>
-            <a:r>
-              <a:rPr lang="en-US" sz="1200" dirty="0">
-                <a:solidFill>
-                  <a:srgbClr val="3C5A56"/>
-                </a:solidFill>
-                <a:latin typeface="Calibri" pitchFamily="34" charset="0"/>
-                <a:ea typeface="Calibri" pitchFamily="34" charset="-122"/>
-                <a:cs typeface="Calibri" pitchFamily="34" charset="-120"/>
-              </a:rPr>
-              <a:t>The student never repeats their story — the full packet travels with the ticket.</a:t>
-            </a:r>
-            <a:endParaRPr lang="en-US" sz="1200" dirty="0"/>
           </a:p>
         </p:txBody>
       </p:sp>
@@ -6686,7 +6693,7 @@
         </p:nvSpPr>
         <p:spPr>
           <a:xfrm>
-            <a:off x="8732520" y="4828032"/>
+            <a:off x="8732520" y="4960620"/>
             <a:ext cx="3108960" cy="365760"/>
           </a:xfrm>
           <a:prstGeom prst="rect">
@@ -6719,14 +6726,14 @@
       </p:sp>
       <p:sp>
         <p:nvSpPr>
-          <p:cNvPr id="43" name="Text 38"/>
-          <p:cNvSpPr/>
-          <p:nvPr/>
-        </p:nvSpPr>
-        <p:spPr>
-          <a:xfrm>
-            <a:off x="8732520" y="5193792"/>
-            <a:ext cx="3154680" cy="731520"/>
+          <p:cNvPr id="44" name="Text 39"/>
+          <p:cNvSpPr/>
+          <p:nvPr/>
+        </p:nvSpPr>
+        <p:spPr>
+          <a:xfrm>
+            <a:off x="502920" y="6400800"/>
+            <a:ext cx="5486400" cy="274320"/>
           </a:xfrm>
           <a:prstGeom prst="rect">
             <a:avLst/>
@@ -6742,109 +6749,100 @@
               <a:buNone/>
             </a:pPr>
             <a:r>
-              <a:rPr lang="en-US" sz="1200" dirty="0">
-                <a:solidFill>
-                  <a:srgbClr val="3C5A56"/>
+              <a:rPr lang="en-US" sz="950" b="1" kern="0" spc="100" dirty="0">
+                <a:solidFill>
+                  <a:srgbClr val="0A2E2B"/>
+                </a:solidFill>
+                <a:latin typeface="Trebuchet MS" pitchFamily="34" charset="0"/>
+                <a:ea typeface="Trebuchet MS" pitchFamily="34" charset="-122"/>
+                <a:cs typeface="Trebuchet MS" pitchFamily="34" charset="-120"/>
+              </a:rPr>
+              <a:t>ARCHON</a:t>
+            </a:r>
+            <a:r>
+              <a:rPr lang="en-US" sz="950" kern="0" spc="100" dirty="0">
+                <a:solidFill>
+                  <a:srgbClr val="7C938E"/>
+                </a:solidFill>
+                <a:latin typeface="Trebuchet MS" pitchFamily="34" charset="0"/>
+                <a:ea typeface="Trebuchet MS" pitchFamily="34" charset="-122"/>
+                <a:cs typeface="Trebuchet MS" pitchFamily="34" charset="-120"/>
+              </a:rPr>
+              <a:t>   ·   Axon Enjin</a:t>
+            </a:r>
+            <a:endParaRPr lang="en-US" sz="950" dirty="0"/>
+          </a:p>
+        </p:txBody>
+      </p:sp>
+      <p:sp>
+        <p:nvSpPr>
+          <p:cNvPr id="45" name="Text 40"/>
+          <p:cNvSpPr/>
+          <p:nvPr/>
+        </p:nvSpPr>
+        <p:spPr>
+          <a:xfrm>
+            <a:off x="7573975" y="6400800"/>
+            <a:ext cx="4114800" cy="274320"/>
+          </a:xfrm>
+          <a:prstGeom prst="rect">
+            <a:avLst/>
+          </a:prstGeom>
+          <a:noFill/>
+          <a:ln/>
+        </p:spPr>
+        <p:txBody>
+          <a:bodyPr wrap="square" lIns="0" tIns="0" rIns="0" bIns="0" rtlCol="0" anchor="ctr"/>
+          <a:lstStyle/>
+          <a:p>
+            <a:pPr marL="0" indent="0" algn="r">
+              <a:buNone/>
+            </a:pPr>
+            <a:r>
+              <a:rPr lang="en-US" sz="950" dirty="0">
+                <a:solidFill>
+                  <a:srgbClr val="7C938E"/>
                 </a:solidFill>
                 <a:latin typeface="Calibri" pitchFamily="34" charset="0"/>
                 <a:ea typeface="Calibri" pitchFamily="34" charset="-122"/>
                 <a:cs typeface="Calibri" pitchFamily="34" charset="-120"/>
               </a:rPr>
-              <a:t>Cost-per-ticket, deflection rate, and CSAT — the numbers leaders ask for.</a:t>
-            </a:r>
-            <a:endParaRPr lang="en-US" sz="1200" dirty="0"/>
-          </a:p>
-        </p:txBody>
-      </p:sp>
-      <p:sp>
-        <p:nvSpPr>
-          <p:cNvPr id="44" name="Text 39"/>
-          <p:cNvSpPr/>
-          <p:nvPr/>
-        </p:nvSpPr>
-        <p:spPr>
-          <a:xfrm>
-            <a:off x="502920" y="6400800"/>
-            <a:ext cx="5486400" cy="274320"/>
-          </a:xfrm>
-          <a:prstGeom prst="rect">
-            <a:avLst/>
-          </a:prstGeom>
-          <a:noFill/>
-          <a:ln/>
-        </p:spPr>
-        <p:txBody>
-          <a:bodyPr wrap="square" lIns="0" tIns="0" rIns="0" bIns="0" rtlCol="0" anchor="ctr"/>
-          <a:lstStyle/>
-          <a:p>
-            <a:pPr marL="0" indent="0">
-              <a:buNone/>
-            </a:pPr>
-            <a:r>
-              <a:rPr lang="en-US" sz="950" b="1" kern="0" spc="100" dirty="0">
-                <a:solidFill>
-                  <a:srgbClr val="0A2E2B"/>
-                </a:solidFill>
-                <a:latin typeface="Trebuchet MS" pitchFamily="34" charset="0"/>
-                <a:ea typeface="Trebuchet MS" pitchFamily="34" charset="-122"/>
-                <a:cs typeface="Trebuchet MS" pitchFamily="34" charset="-120"/>
-              </a:rPr>
-              <a:t>ARCHON</a:t>
-            </a:r>
-            <a:r>
-              <a:rPr lang="en-US" sz="950" kern="0" spc="100" dirty="0">
-                <a:solidFill>
-                  <a:srgbClr val="7C938E"/>
-                </a:solidFill>
-                <a:latin typeface="Trebuchet MS" pitchFamily="34" charset="0"/>
-                <a:ea typeface="Trebuchet MS" pitchFamily="34" charset="-122"/>
-                <a:cs typeface="Trebuchet MS" pitchFamily="34" charset="-120"/>
-              </a:rPr>
-              <a:t>   ·   Axon Enjin</a:t>
+              <a:t>KPMG Academic Innovation 2026   ·   5/9</a:t>
             </a:r>
             <a:endParaRPr lang="en-US" sz="950" dirty="0"/>
           </a:p>
         </p:txBody>
       </p:sp>
-      <p:sp>
-        <p:nvSpPr>
-          <p:cNvPr id="45" name="Text 40"/>
-          <p:cNvSpPr/>
-          <p:nvPr/>
-        </p:nvSpPr>
-        <p:spPr>
-          <a:xfrm>
-            <a:off x="7573975" y="6400800"/>
-            <a:ext cx="4114800" cy="274320"/>
-          </a:xfrm>
-          <a:prstGeom prst="rect">
-            <a:avLst/>
-          </a:prstGeom>
-          <a:noFill/>
-          <a:ln/>
-        </p:spPr>
-        <p:txBody>
-          <a:bodyPr wrap="square" lIns="0" tIns="0" rIns="0" bIns="0" rtlCol="0" anchor="ctr"/>
-          <a:lstStyle/>
-          <a:p>
-            <a:pPr marL="0" indent="0" algn="r">
-              <a:buNone/>
-            </a:pPr>
-            <a:r>
-              <a:rPr lang="en-US" sz="950" dirty="0">
-                <a:solidFill>
-                  <a:srgbClr val="7C938E"/>
-                </a:solidFill>
-                <a:latin typeface="Calibri" pitchFamily="34" charset="0"/>
-                <a:ea typeface="Calibri" pitchFamily="34" charset="-122"/>
-                <a:cs typeface="Calibri" pitchFamily="34" charset="-120"/>
-              </a:rPr>
-              <a:t>KPMG Academic Innovation 2026   ·   5/9</a:t>
-            </a:r>
-            <a:endParaRPr lang="en-US" sz="950" dirty="0"/>
-          </a:p>
-        </p:txBody>
-      </p:sp>
+      <p:pic>
+        <p:nvPicPr>
+          <p:cNvPr id="47" name="Picture 46">
+            <a:extLst>
+              <a:ext uri="{FF2B5EF4-FFF2-40B4-BE49-F238E27FC236}">
+                <a16:creationId xmlns:a16="http://schemas.microsoft.com/office/drawing/2014/main" id="{1E80719E-0D33-843E-60D7-B8EA06C260B9}"/>
+              </a:ext>
+            </a:extLst>
+          </p:cNvPr>
+          <p:cNvPicPr>
+            <a:picLocks noChangeAspect="1"/>
+          </p:cNvPicPr>
+          <p:nvPr/>
+        </p:nvPicPr>
+        <p:blipFill>
+          <a:blip r:embed="rId6"/>
+          <a:stretch>
+            <a:fillRect/>
+          </a:stretch>
+        </p:blipFill>
+        <p:spPr>
+          <a:xfrm>
+            <a:off x="777240" y="2258970"/>
+            <a:ext cx="6766560" cy="3717567"/>
+          </a:xfrm>
+          <a:prstGeom prst="rect">
+            <a:avLst/>
+          </a:prstGeom>
+        </p:spPr>
+      </p:pic>
     </p:spTree>
   </p:cSld>
   <p:clrMapOvr>
@@ -6950,7 +6948,7 @@
                 <a:ea typeface="Trebuchet MS" pitchFamily="34" charset="-122"/>
                 <a:cs typeface="Trebuchet MS" pitchFamily="34" charset="-120"/>
               </a:rPr>
-              <a:t>From question to resolution — autonomously.</a:t>
+              <a:t>From question to resolution, autonomously.</a:t>
             </a:r>
             <a:endParaRPr lang="en-US" sz="3300" dirty="0"/>
           </a:p>
@@ -7763,7 +7761,7 @@
                 <a:ea typeface="Trebuchet MS" pitchFamily="34" charset="-122"/>
                 <a:cs typeface="Trebuchet MS" pitchFamily="34" charset="-120"/>
               </a:rPr>
-              <a:t>Routine tickets close instantly — target ≥30% deflection.</a:t>
+              <a:t>Routine tickets close instantly with target ≥30% deflection.</a:t>
             </a:r>
             <a:endParaRPr lang="en-US" sz="1500" dirty="0"/>
           </a:p>
@@ -7872,7 +7870,23 @@
                 <a:ea typeface="Trebuchet MS" pitchFamily="34" charset="-122"/>
                 <a:cs typeface="Trebuchet MS" pitchFamily="34" charset="-120"/>
               </a:rPr>
-              <a:t>Hard cases escalate with a full context packet + Teams/Outlook alert.</a:t>
+              <a:t>Hard cases escalate with a full context packet</a:t>
+            </a:r>
+          </a:p>
+          <a:p>
+            <a:pPr marL="0" indent="0">
+              <a:buNone/>
+            </a:pPr>
+            <a:r>
+              <a:rPr lang="en-US" sz="1150" dirty="0">
+                <a:solidFill>
+                  <a:srgbClr val="FFFFFF"/>
+                </a:solidFill>
+                <a:latin typeface="Trebuchet MS" pitchFamily="34" charset="0"/>
+                <a:ea typeface="Trebuchet MS" pitchFamily="34" charset="-122"/>
+                <a:cs typeface="Trebuchet MS" pitchFamily="34" charset="-120"/>
+              </a:rPr>
+              <a:t>+ Teams/Outlook alert.</a:t>
             </a:r>
             <a:endParaRPr lang="en-US" sz="1500" dirty="0"/>
           </a:p>
@@ -9029,7 +9043,23 @@
                 <a:ea typeface="Calibri" pitchFamily="34" charset="-122"/>
                 <a:cs typeface="Calibri" pitchFamily="34" charset="-120"/>
               </a:rPr>
-              <a:t>TTL: messages &amp; handoffs 90d (data minimization); university cache 5 min (fresh + cheap).</a:t>
+              <a:t>TTL: messages &amp; handoffs 90d (data minimization);</a:t>
+            </a:r>
+          </a:p>
+          <a:p>
+            <a:pPr marL="0" indent="0">
+              <a:buNone/>
+            </a:pPr>
+            <a:r>
+              <a:rPr lang="en-US" sz="1130" dirty="0">
+                <a:solidFill>
+                  <a:srgbClr val="BFE9E2"/>
+                </a:solidFill>
+                <a:latin typeface="Calibri" pitchFamily="34" charset="0"/>
+                <a:ea typeface="Calibri" pitchFamily="34" charset="-122"/>
+                <a:cs typeface="Calibri" pitchFamily="34" charset="-120"/>
+              </a:rPr>
+              <a:t>university cache 5 min (fresh + cheap).</a:t>
             </a:r>
             <a:endParaRPr lang="en-US" sz="1130" dirty="0"/>
           </a:p>
@@ -9158,7 +9188,23 @@
                 <a:ea typeface="Calibri" pitchFamily="34" charset="-122"/>
                 <a:cs typeface="Calibri" pitchFamily="34" charset="-120"/>
               </a:rPr>
-              <a:t>Vector search over policy_embeddings powers RAG — no bolt-on vector DB.</a:t>
+              <a:t>Vector search over policy_embeddings powers RAG</a:t>
+            </a:r>
+          </a:p>
+          <a:p>
+            <a:pPr marL="0" indent="0">
+              <a:buNone/>
+            </a:pPr>
+            <a:r>
+              <a:rPr lang="en-US" sz="1130" dirty="0">
+                <a:solidFill>
+                  <a:srgbClr val="BFE9E2"/>
+                </a:solidFill>
+                <a:latin typeface="Calibri" pitchFamily="34" charset="0"/>
+                <a:ea typeface="Calibri" pitchFamily="34" charset="-122"/>
+                <a:cs typeface="Calibri" pitchFamily="34" charset="-120"/>
+              </a:rPr>
+              <a:t>no bolt-on vector DB.</a:t>
             </a:r>
             <a:endParaRPr lang="en-US" sz="1130" dirty="0"/>
           </a:p>
